--- a/Lab4/DSPLAB04.pptx
+++ b/Lab4/DSPLAB04.pptx
@@ -133,6 +133,73 @@
     </p:ext>
   </p:extLst>
 </p:presentation>
+</file>
+
+<file path=ppt/revisionInfo.xml><?xml version="1.0" encoding="utf-8"?>
+<p1510:revInfo xmlns:a="http://schemas.openxmlformats.org/drawingml/2006/main" xmlns:r="http://schemas.openxmlformats.org/officeDocument/2006/relationships" xmlns:p1510="http://schemas.microsoft.com/office/powerpoint/2015/10/main">
+  <p1510:revLst>
+    <p1510:client id="{B96ED3E0-A110-4CC7-B3B5-4D6D7439EA48}" v="2" dt="2025-11-24T03:10:05.246"/>
+  </p1510:revLst>
+</p1510:revInfo>
+</file>
+
+<file path=ppt/changesInfos/changesInfo1.xml><?xml version="1.0" encoding="utf-8"?>
+<pc:chgInfo xmlns:a="http://schemas.openxmlformats.org/drawingml/2006/main" xmlns:r="http://schemas.openxmlformats.org/officeDocument/2006/relationships" xmlns:ac="http://schemas.microsoft.com/office/drawing/2013/main/command" xmlns:pc="http://schemas.microsoft.com/office/powerpoint/2013/main/command">
+  <pc:docChgLst>
+    <pc:chgData name="惠心 簡" userId="7494a85472f25f00" providerId="LiveId" clId="{4151118C-67CD-42CB-A947-F50F90C04C80}"/>
+    <pc:docChg chg="undo custSel modSld">
+      <pc:chgData name="惠心 簡" userId="7494a85472f25f00" providerId="LiveId" clId="{4151118C-67CD-42CB-A947-F50F90C04C80}" dt="2025-11-24T03:10:05.277" v="7" actId="27636"/>
+      <pc:docMkLst>
+        <pc:docMk/>
+      </pc:docMkLst>
+      <pc:sldChg chg="modSp mod">
+        <pc:chgData name="惠心 簡" userId="7494a85472f25f00" providerId="LiveId" clId="{4151118C-67CD-42CB-A947-F50F90C04C80}" dt="2025-11-24T02:53:16.921" v="2" actId="20577"/>
+        <pc:sldMkLst>
+          <pc:docMk/>
+          <pc:sldMk cId="773788289" sldId="296"/>
+        </pc:sldMkLst>
+        <pc:spChg chg="mod">
+          <ac:chgData name="惠心 簡" userId="7494a85472f25f00" providerId="LiveId" clId="{4151118C-67CD-42CB-A947-F50F90C04C80}" dt="2025-11-24T02:53:16.921" v="2" actId="20577"/>
+          <ac:spMkLst>
+            <pc:docMk/>
+            <pc:sldMk cId="773788289" sldId="296"/>
+            <ac:spMk id="6" creationId="{CA83BB80-2E4D-5D8A-8FFB-AA64580343F9}"/>
+          </ac:spMkLst>
+        </pc:spChg>
+      </pc:sldChg>
+      <pc:sldChg chg="modSp mod">
+        <pc:chgData name="惠心 簡" userId="7494a85472f25f00" providerId="LiveId" clId="{4151118C-67CD-42CB-A947-F50F90C04C80}" dt="2025-11-24T03:10:05.277" v="7" actId="27636"/>
+        <pc:sldMkLst>
+          <pc:docMk/>
+          <pc:sldMk cId="1508381609" sldId="309"/>
+        </pc:sldMkLst>
+        <pc:spChg chg="mod">
+          <ac:chgData name="惠心 簡" userId="7494a85472f25f00" providerId="LiveId" clId="{4151118C-67CD-42CB-A947-F50F90C04C80}" dt="2025-11-24T03:10:05.277" v="7" actId="27636"/>
+          <ac:spMkLst>
+            <pc:docMk/>
+            <pc:sldMk cId="1508381609" sldId="309"/>
+            <ac:spMk id="3" creationId="{801ECED5-B1A4-272F-8BBC-01027D7E7A84}"/>
+          </ac:spMkLst>
+        </pc:spChg>
+      </pc:sldChg>
+      <pc:sldChg chg="modSp">
+        <pc:chgData name="惠心 簡" userId="7494a85472f25f00" providerId="LiveId" clId="{4151118C-67CD-42CB-A947-F50F90C04C80}" dt="2025-11-24T03:10:04.569" v="3"/>
+        <pc:sldMkLst>
+          <pc:docMk/>
+          <pc:sldMk cId="1707635147" sldId="317"/>
+        </pc:sldMkLst>
+        <pc:spChg chg="mod">
+          <ac:chgData name="惠心 簡" userId="7494a85472f25f00" providerId="LiveId" clId="{4151118C-67CD-42CB-A947-F50F90C04C80}" dt="2025-11-24T03:10:04.569" v="3"/>
+          <ac:spMkLst>
+            <pc:docMk/>
+            <pc:sldMk cId="1707635147" sldId="317"/>
+            <ac:spMk id="2" creationId="{00000000-0000-0000-0000-000000000000}"/>
+          </ac:spMkLst>
+        </pc:spChg>
+      </pc:sldChg>
+    </pc:docChg>
+  </pc:docChgLst>
+</pc:chgInfo>
 </file>
 
 <file path=ppt/slideLayouts/slideLayout1.xml><?xml version="1.0" encoding="utf-8"?>
@@ -302,6 +369,13 @@
               <a:schemeClr val="lt1"/>
             </a:fontRef>
           </p:style>
+          <p:txBody>
+            <a:bodyPr/>
+            <a:lstStyle/>
+            <a:p>
+              <a:endParaRPr lang="zh-TW" altLang="en-US"/>
+            </a:p>
+          </p:txBody>
         </p:sp>
         <p:sp>
           <p:nvSpPr>
@@ -365,6 +439,13 @@
               <a:schemeClr val="lt1"/>
             </a:fontRef>
           </p:style>
+          <p:txBody>
+            <a:bodyPr/>
+            <a:lstStyle/>
+            <a:p>
+              <a:endParaRPr lang="zh-TW" altLang="en-US"/>
+            </a:p>
+          </p:txBody>
         </p:sp>
         <p:sp>
           <p:nvSpPr>
@@ -406,6 +487,13 @@
               <a:schemeClr val="lt1"/>
             </a:fontRef>
           </p:style>
+          <p:txBody>
+            <a:bodyPr/>
+            <a:lstStyle/>
+            <a:p>
+              <a:endParaRPr lang="zh-TW" altLang="en-US"/>
+            </a:p>
+          </p:txBody>
         </p:sp>
         <p:sp>
           <p:nvSpPr>
@@ -470,6 +558,13 @@
               <a:schemeClr val="lt1"/>
             </a:fontRef>
           </p:style>
+          <p:txBody>
+            <a:bodyPr/>
+            <a:lstStyle/>
+            <a:p>
+              <a:endParaRPr lang="zh-TW" altLang="en-US"/>
+            </a:p>
+          </p:txBody>
         </p:sp>
         <p:sp>
           <p:nvSpPr>
@@ -534,6 +629,13 @@
               <a:schemeClr val="lt1"/>
             </a:fontRef>
           </p:style>
+          <p:txBody>
+            <a:bodyPr/>
+            <a:lstStyle/>
+            <a:p>
+              <a:endParaRPr lang="zh-TW" altLang="en-US"/>
+            </a:p>
+          </p:txBody>
         </p:sp>
         <p:sp>
           <p:nvSpPr>
@@ -598,6 +700,13 @@
               <a:schemeClr val="lt1"/>
             </a:fontRef>
           </p:style>
+          <p:txBody>
+            <a:bodyPr/>
+            <a:lstStyle/>
+            <a:p>
+              <a:endParaRPr lang="zh-TW" altLang="en-US"/>
+            </a:p>
+          </p:txBody>
         </p:sp>
         <p:sp>
           <p:nvSpPr>
@@ -640,6 +749,13 @@
               <a:schemeClr val="lt1"/>
             </a:fontRef>
           </p:style>
+          <p:txBody>
+            <a:bodyPr/>
+            <a:lstStyle/>
+            <a:p>
+              <a:endParaRPr lang="zh-TW" altLang="en-US"/>
+            </a:p>
+          </p:txBody>
         </p:sp>
         <p:sp>
           <p:nvSpPr>
@@ -682,6 +798,13 @@
               <a:schemeClr val="lt1"/>
             </a:fontRef>
           </p:style>
+          <p:txBody>
+            <a:bodyPr/>
+            <a:lstStyle/>
+            <a:p>
+              <a:endParaRPr lang="zh-TW" altLang="en-US"/>
+            </a:p>
+          </p:txBody>
         </p:sp>
       </p:grpSp>
       <p:sp>
@@ -717,7 +840,7 @@
           </a:lstStyle>
           <a:p>
             <a:r>
-              <a:rPr lang="zh-TW" altLang="en-US" smtClean="0"/>
+              <a:rPr lang="zh-TW" altLang="en-US"/>
               <a:t>按一下以編輯母片標題樣式</a:t>
             </a:r>
             <a:endParaRPr lang="en-US" dirty="0"/>
@@ -837,7 +960,7 @@
           </a:lstStyle>
           <a:p>
             <a:r>
-              <a:rPr lang="zh-TW" altLang="en-US" smtClean="0"/>
+              <a:rPr lang="zh-TW" altLang="en-US"/>
               <a:t>按一下以編輯母片副標題樣式</a:t>
             </a:r>
             <a:endParaRPr lang="en-US" dirty="0"/>
@@ -862,7 +985,7 @@
             <a:fld id="{B61BEF0D-F0BB-DE4B-95CE-6DB70DBA9567}" type="datetimeFigureOut">
               <a:rPr lang="en-US" smtClean="0"/>
               <a:pPr/>
-              <a:t>11/4/2025</a:t>
+              <a:t>11/24/2025</a:t>
             </a:fld>
             <a:endParaRPr lang="en-US" dirty="0"/>
           </a:p>
@@ -968,7 +1091,7 @@
           </a:lstStyle>
           <a:p>
             <a:r>
-              <a:rPr lang="zh-TW" altLang="en-US" smtClean="0"/>
+              <a:rPr lang="zh-TW" altLang="en-US"/>
               <a:t>按一下以編輯母片標題樣式</a:t>
             </a:r>
             <a:endParaRPr lang="en-US" dirty="0"/>
@@ -1091,7 +1214,7 @@
           <a:p>
             <a:pPr lvl="0"/>
             <a:r>
-              <a:rPr lang="zh-TW" altLang="en-US" smtClean="0"/>
+              <a:rPr lang="zh-TW" altLang="en-US"/>
               <a:t>編輯母片文字樣式</a:t>
             </a:r>
           </a:p>
@@ -1115,7 +1238,7 @@
             <a:fld id="{B61BEF0D-F0BB-DE4B-95CE-6DB70DBA9567}" type="datetimeFigureOut">
               <a:rPr lang="en-US" smtClean="0"/>
               <a:pPr/>
-              <a:t>11/4/2025</a:t>
+              <a:t>11/24/2025</a:t>
             </a:fld>
             <a:endParaRPr lang="en-US" dirty="0"/>
           </a:p>
@@ -1221,7 +1344,7 @@
           </a:lstStyle>
           <a:p>
             <a:r>
-              <a:rPr lang="zh-TW" altLang="en-US" smtClean="0"/>
+              <a:rPr lang="zh-TW" altLang="en-US"/>
               <a:t>按一下以編輯母片標題樣式</a:t>
             </a:r>
             <a:endParaRPr lang="en-US" dirty="0"/>
@@ -1285,7 +1408,7 @@
           <a:p>
             <a:pPr lvl="0"/>
             <a:r>
-              <a:rPr lang="zh-TW" altLang="en-US" smtClean="0"/>
+              <a:rPr lang="zh-TW" altLang="en-US"/>
               <a:t>編輯母片文字樣式</a:t>
             </a:r>
           </a:p>
@@ -1407,7 +1530,7 @@
           <a:p>
             <a:pPr lvl="0"/>
             <a:r>
-              <a:rPr lang="zh-TW" altLang="en-US" smtClean="0"/>
+              <a:rPr lang="zh-TW" altLang="en-US"/>
               <a:t>編輯母片文字樣式</a:t>
             </a:r>
           </a:p>
@@ -1431,7 +1554,7 @@
             <a:fld id="{B61BEF0D-F0BB-DE4B-95CE-6DB70DBA9567}" type="datetimeFigureOut">
               <a:rPr lang="en-US" smtClean="0"/>
               <a:pPr/>
-              <a:t>11/4/2025</a:t>
+              <a:t>11/24/2025</a:t>
             </a:fld>
             <a:endParaRPr lang="en-US" dirty="0"/>
           </a:p>
@@ -1613,7 +1736,7 @@
           </a:lstStyle>
           <a:p>
             <a:r>
-              <a:rPr lang="zh-TW" altLang="en-US" smtClean="0"/>
+              <a:rPr lang="zh-TW" altLang="en-US"/>
               <a:t>按一下以編輯母片標題樣式</a:t>
             </a:r>
             <a:endParaRPr lang="en-US" dirty="0"/>
@@ -1736,7 +1859,7 @@
           <a:p>
             <a:pPr lvl="0"/>
             <a:r>
-              <a:rPr lang="zh-TW" altLang="en-US" smtClean="0"/>
+              <a:rPr lang="zh-TW" altLang="en-US"/>
               <a:t>編輯母片文字樣式</a:t>
             </a:r>
           </a:p>
@@ -1760,7 +1883,7 @@
             <a:fld id="{B61BEF0D-F0BB-DE4B-95CE-6DB70DBA9567}" type="datetimeFigureOut">
               <a:rPr lang="en-US" smtClean="0"/>
               <a:pPr/>
-              <a:t>11/4/2025</a:t>
+              <a:t>11/24/2025</a:t>
             </a:fld>
             <a:endParaRPr lang="en-US" dirty="0"/>
           </a:p>
@@ -1866,7 +1989,7 @@
           </a:lstStyle>
           <a:p>
             <a:r>
-              <a:rPr lang="zh-TW" altLang="en-US" smtClean="0"/>
+              <a:rPr lang="zh-TW" altLang="en-US"/>
               <a:t>按一下以編輯母片標題樣式</a:t>
             </a:r>
             <a:endParaRPr lang="en-US" dirty="0"/>
@@ -1930,7 +2053,7 @@
           <a:p>
             <a:pPr lvl="0"/>
             <a:r>
-              <a:rPr lang="zh-TW" altLang="en-US" smtClean="0"/>
+              <a:rPr lang="zh-TW" altLang="en-US"/>
               <a:t>編輯母片文字樣式</a:t>
             </a:r>
           </a:p>
@@ -2052,7 +2175,7 @@
           <a:p>
             <a:pPr lvl="0"/>
             <a:r>
-              <a:rPr lang="zh-TW" altLang="en-US" smtClean="0"/>
+              <a:rPr lang="zh-TW" altLang="en-US"/>
               <a:t>編輯母片文字樣式</a:t>
             </a:r>
           </a:p>
@@ -2076,7 +2199,7 @@
             <a:fld id="{B61BEF0D-F0BB-DE4B-95CE-6DB70DBA9567}" type="datetimeFigureOut">
               <a:rPr lang="en-US" smtClean="0"/>
               <a:pPr/>
-              <a:t>11/4/2025</a:t>
+              <a:t>11/24/2025</a:t>
             </a:fld>
             <a:endParaRPr lang="en-US" dirty="0"/>
           </a:p>
@@ -2258,7 +2381,7 @@
           </a:lstStyle>
           <a:p>
             <a:r>
-              <a:rPr lang="zh-TW" altLang="en-US" smtClean="0"/>
+              <a:rPr lang="zh-TW" altLang="en-US"/>
               <a:t>按一下以編輯母片標題樣式</a:t>
             </a:r>
             <a:endParaRPr lang="en-US" dirty="0"/>
@@ -2319,7 +2442,7 @@
           <a:p>
             <a:pPr lvl="0"/>
             <a:r>
-              <a:rPr lang="zh-TW" altLang="en-US" smtClean="0"/>
+              <a:rPr lang="zh-TW" altLang="en-US"/>
               <a:t>編輯母片文字樣式</a:t>
             </a:r>
           </a:p>
@@ -2441,7 +2564,7 @@
           <a:p>
             <a:pPr lvl="0"/>
             <a:r>
-              <a:rPr lang="zh-TW" altLang="en-US" smtClean="0"/>
+              <a:rPr lang="zh-TW" altLang="en-US"/>
               <a:t>編輯母片文字樣式</a:t>
             </a:r>
           </a:p>
@@ -2465,7 +2588,7 @@
             <a:fld id="{B61BEF0D-F0BB-DE4B-95CE-6DB70DBA9567}" type="datetimeFigureOut">
               <a:rPr lang="en-US" smtClean="0"/>
               <a:pPr/>
-              <a:t>11/4/2025</a:t>
+              <a:t>11/24/2025</a:t>
             </a:fld>
             <a:endParaRPr lang="en-US" dirty="0"/>
           </a:p>
@@ -2560,7 +2683,7 @@
           <a:lstStyle/>
           <a:p>
             <a:r>
-              <a:rPr lang="zh-TW" altLang="en-US" smtClean="0"/>
+              <a:rPr lang="zh-TW" altLang="en-US"/>
               <a:t>按一下以編輯母片標題樣式</a:t>
             </a:r>
             <a:endParaRPr lang="en-US" dirty="0"/>
@@ -2584,35 +2707,35 @@
           <a:p>
             <a:pPr lvl="0"/>
             <a:r>
-              <a:rPr lang="zh-TW" altLang="en-US" smtClean="0"/>
+              <a:rPr lang="zh-TW" altLang="en-US"/>
               <a:t>編輯母片文字樣式</a:t>
             </a:r>
           </a:p>
           <a:p>
             <a:pPr lvl="1"/>
             <a:r>
-              <a:rPr lang="zh-TW" altLang="en-US" smtClean="0"/>
+              <a:rPr lang="zh-TW" altLang="en-US"/>
               <a:t>第二層</a:t>
             </a:r>
           </a:p>
           <a:p>
             <a:pPr lvl="2"/>
             <a:r>
-              <a:rPr lang="zh-TW" altLang="en-US" smtClean="0"/>
+              <a:rPr lang="zh-TW" altLang="en-US"/>
               <a:t>第三層</a:t>
             </a:r>
           </a:p>
           <a:p>
             <a:pPr lvl="3"/>
             <a:r>
-              <a:rPr lang="zh-TW" altLang="en-US" smtClean="0"/>
+              <a:rPr lang="zh-TW" altLang="en-US"/>
               <a:t>第四層</a:t>
             </a:r>
           </a:p>
           <a:p>
             <a:pPr lvl="4"/>
             <a:r>
-              <a:rPr lang="zh-TW" altLang="en-US" smtClean="0"/>
+              <a:rPr lang="zh-TW" altLang="en-US"/>
               <a:t>第五層</a:t>
             </a:r>
             <a:endParaRPr lang="en-US" dirty="0"/>
@@ -2636,7 +2759,7 @@
           <a:p>
             <a:fld id="{55C6B4A9-1611-4792-9094-5F34BCA07E0B}" type="datetimeFigureOut">
               <a:rPr lang="en-US" smtClean="0"/>
-              <a:t>11/4/2025</a:t>
+              <a:t>11/24/2025</a:t>
             </a:fld>
             <a:endParaRPr lang="en-US" dirty="0"/>
           </a:p>
@@ -2735,7 +2858,7 @@
           <a:lstStyle/>
           <a:p>
             <a:r>
-              <a:rPr lang="zh-TW" altLang="en-US" smtClean="0"/>
+              <a:rPr lang="zh-TW" altLang="en-US"/>
               <a:t>按一下以編輯母片標題樣式</a:t>
             </a:r>
             <a:endParaRPr lang="en-US" dirty="0"/>
@@ -2764,35 +2887,35 @@
           <a:p>
             <a:pPr lvl="0"/>
             <a:r>
-              <a:rPr lang="zh-TW" altLang="en-US" smtClean="0"/>
+              <a:rPr lang="zh-TW" altLang="en-US"/>
               <a:t>編輯母片文字樣式</a:t>
             </a:r>
           </a:p>
           <a:p>
             <a:pPr lvl="1"/>
             <a:r>
-              <a:rPr lang="zh-TW" altLang="en-US" smtClean="0"/>
+              <a:rPr lang="zh-TW" altLang="en-US"/>
               <a:t>第二層</a:t>
             </a:r>
           </a:p>
           <a:p>
             <a:pPr lvl="2"/>
             <a:r>
-              <a:rPr lang="zh-TW" altLang="en-US" smtClean="0"/>
+              <a:rPr lang="zh-TW" altLang="en-US"/>
               <a:t>第三層</a:t>
             </a:r>
           </a:p>
           <a:p>
             <a:pPr lvl="3"/>
             <a:r>
-              <a:rPr lang="zh-TW" altLang="en-US" smtClean="0"/>
+              <a:rPr lang="zh-TW" altLang="en-US"/>
               <a:t>第四層</a:t>
             </a:r>
           </a:p>
           <a:p>
             <a:pPr lvl="4"/>
             <a:r>
-              <a:rPr lang="zh-TW" altLang="en-US" smtClean="0"/>
+              <a:rPr lang="zh-TW" altLang="en-US"/>
               <a:t>第五層</a:t>
             </a:r>
             <a:endParaRPr lang="en-US" dirty="0"/>
@@ -2817,7 +2940,7 @@
             <a:fld id="{B61BEF0D-F0BB-DE4B-95CE-6DB70DBA9567}" type="datetimeFigureOut">
               <a:rPr lang="en-US" smtClean="0"/>
               <a:pPr/>
-              <a:t>11/4/2025</a:t>
+              <a:t>11/24/2025</a:t>
             </a:fld>
             <a:endParaRPr lang="en-US" dirty="0"/>
           </a:p>
@@ -2912,7 +3035,7 @@
           <a:lstStyle/>
           <a:p>
             <a:r>
-              <a:rPr lang="zh-TW" altLang="en-US" smtClean="0"/>
+              <a:rPr lang="zh-TW" altLang="en-US"/>
               <a:t>按一下以編輯母片標題樣式</a:t>
             </a:r>
             <a:endParaRPr lang="en-US" dirty="0"/>
@@ -2936,35 +3059,35 @@
           <a:p>
             <a:pPr lvl="0"/>
             <a:r>
-              <a:rPr lang="zh-TW" altLang="en-US" smtClean="0"/>
+              <a:rPr lang="zh-TW" altLang="en-US"/>
               <a:t>編輯母片文字樣式</a:t>
             </a:r>
           </a:p>
           <a:p>
             <a:pPr lvl="1"/>
             <a:r>
-              <a:rPr lang="zh-TW" altLang="en-US" smtClean="0"/>
+              <a:rPr lang="zh-TW" altLang="en-US"/>
               <a:t>第二層</a:t>
             </a:r>
           </a:p>
           <a:p>
             <a:pPr lvl="2"/>
             <a:r>
-              <a:rPr lang="zh-TW" altLang="en-US" smtClean="0"/>
+              <a:rPr lang="zh-TW" altLang="en-US"/>
               <a:t>第三層</a:t>
             </a:r>
           </a:p>
           <a:p>
             <a:pPr lvl="3"/>
             <a:r>
-              <a:rPr lang="zh-TW" altLang="en-US" smtClean="0"/>
+              <a:rPr lang="zh-TW" altLang="en-US"/>
               <a:t>第四層</a:t>
             </a:r>
           </a:p>
           <a:p>
             <a:pPr lvl="4"/>
             <a:r>
-              <a:rPr lang="zh-TW" altLang="en-US" smtClean="0"/>
+              <a:rPr lang="zh-TW" altLang="en-US"/>
               <a:t>第五層</a:t>
             </a:r>
             <a:endParaRPr lang="en-US" dirty="0"/>
@@ -2989,7 +3112,7 @@
             <a:fld id="{B61BEF0D-F0BB-DE4B-95CE-6DB70DBA9567}" type="datetimeFigureOut">
               <a:rPr lang="en-US" smtClean="0"/>
               <a:pPr/>
-              <a:t>11/4/2025</a:t>
+              <a:t>11/24/2025</a:t>
             </a:fld>
             <a:endParaRPr lang="en-US" dirty="0"/>
           </a:p>
@@ -3093,7 +3216,7 @@
           </a:lstStyle>
           <a:p>
             <a:r>
-              <a:rPr lang="zh-TW" altLang="en-US" smtClean="0"/>
+              <a:rPr lang="zh-TW" altLang="en-US"/>
               <a:t>按一下以編輯母片標題樣式</a:t>
             </a:r>
             <a:endParaRPr lang="en-US" dirty="0"/>
@@ -3214,7 +3337,7 @@
           <a:p>
             <a:pPr lvl="0"/>
             <a:r>
-              <a:rPr lang="zh-TW" altLang="en-US" smtClean="0"/>
+              <a:rPr lang="zh-TW" altLang="en-US"/>
               <a:t>編輯母片文字樣式</a:t>
             </a:r>
           </a:p>
@@ -3238,7 +3361,7 @@
             <a:fld id="{B61BEF0D-F0BB-DE4B-95CE-6DB70DBA9567}" type="datetimeFigureOut">
               <a:rPr lang="en-US" smtClean="0"/>
               <a:pPr/>
-              <a:t>11/4/2025</a:t>
+              <a:t>11/24/2025</a:t>
             </a:fld>
             <a:endParaRPr lang="en-US" dirty="0"/>
           </a:p>
@@ -3333,7 +3456,7 @@
           <a:lstStyle/>
           <a:p>
             <a:r>
-              <a:rPr lang="zh-TW" altLang="en-US" smtClean="0"/>
+              <a:rPr lang="zh-TW" altLang="en-US"/>
               <a:t>按一下以編輯母片標題樣式</a:t>
             </a:r>
             <a:endParaRPr lang="en-US" dirty="0"/>
@@ -3362,35 +3485,35 @@
           <a:p>
             <a:pPr lvl="0"/>
             <a:r>
-              <a:rPr lang="zh-TW" altLang="en-US" smtClean="0"/>
+              <a:rPr lang="zh-TW" altLang="en-US"/>
               <a:t>編輯母片文字樣式</a:t>
             </a:r>
           </a:p>
           <a:p>
             <a:pPr lvl="1"/>
             <a:r>
-              <a:rPr lang="zh-TW" altLang="en-US" smtClean="0"/>
+              <a:rPr lang="zh-TW" altLang="en-US"/>
               <a:t>第二層</a:t>
             </a:r>
           </a:p>
           <a:p>
             <a:pPr lvl="2"/>
             <a:r>
-              <a:rPr lang="zh-TW" altLang="en-US" smtClean="0"/>
+              <a:rPr lang="zh-TW" altLang="en-US"/>
               <a:t>第三層</a:t>
             </a:r>
           </a:p>
           <a:p>
             <a:pPr lvl="3"/>
             <a:r>
-              <a:rPr lang="zh-TW" altLang="en-US" smtClean="0"/>
+              <a:rPr lang="zh-TW" altLang="en-US"/>
               <a:t>第四層</a:t>
             </a:r>
           </a:p>
           <a:p>
             <a:pPr lvl="4"/>
             <a:r>
-              <a:rPr lang="zh-TW" altLang="en-US" smtClean="0"/>
+              <a:rPr lang="zh-TW" altLang="en-US"/>
               <a:t>第五層</a:t>
             </a:r>
             <a:endParaRPr lang="en-US" dirty="0"/>
@@ -3419,35 +3542,35 @@
           <a:p>
             <a:pPr lvl="0"/>
             <a:r>
-              <a:rPr lang="zh-TW" altLang="en-US" smtClean="0"/>
+              <a:rPr lang="zh-TW" altLang="en-US"/>
               <a:t>編輯母片文字樣式</a:t>
             </a:r>
           </a:p>
           <a:p>
             <a:pPr lvl="1"/>
             <a:r>
-              <a:rPr lang="zh-TW" altLang="en-US" smtClean="0"/>
+              <a:rPr lang="zh-TW" altLang="en-US"/>
               <a:t>第二層</a:t>
             </a:r>
           </a:p>
           <a:p>
             <a:pPr lvl="2"/>
             <a:r>
-              <a:rPr lang="zh-TW" altLang="en-US" smtClean="0"/>
+              <a:rPr lang="zh-TW" altLang="en-US"/>
               <a:t>第三層</a:t>
             </a:r>
           </a:p>
           <a:p>
             <a:pPr lvl="3"/>
             <a:r>
-              <a:rPr lang="zh-TW" altLang="en-US" smtClean="0"/>
+              <a:rPr lang="zh-TW" altLang="en-US"/>
               <a:t>第四層</a:t>
             </a:r>
           </a:p>
           <a:p>
             <a:pPr lvl="4"/>
             <a:r>
-              <a:rPr lang="zh-TW" altLang="en-US" smtClean="0"/>
+              <a:rPr lang="zh-TW" altLang="en-US"/>
               <a:t>第五層</a:t>
             </a:r>
             <a:endParaRPr lang="en-US" dirty="0"/>
@@ -3472,7 +3595,7 @@
             <a:fld id="{B61BEF0D-F0BB-DE4B-95CE-6DB70DBA9567}" type="datetimeFigureOut">
               <a:rPr lang="en-US" smtClean="0"/>
               <a:pPr/>
-              <a:t>11/4/2025</a:t>
+              <a:t>11/24/2025</a:t>
             </a:fld>
             <a:endParaRPr lang="en-US" dirty="0"/>
           </a:p>
@@ -3571,7 +3694,7 @@
           </a:lstStyle>
           <a:p>
             <a:r>
-              <a:rPr lang="zh-TW" altLang="en-US" smtClean="0"/>
+              <a:rPr lang="zh-TW" altLang="en-US"/>
               <a:t>按一下以編輯母片標題樣式</a:t>
             </a:r>
             <a:endParaRPr lang="en-US" dirty="0"/>
@@ -3639,7 +3762,7 @@
           <a:p>
             <a:pPr lvl="0"/>
             <a:r>
-              <a:rPr lang="zh-TW" altLang="en-US" smtClean="0"/>
+              <a:rPr lang="zh-TW" altLang="en-US"/>
               <a:t>編輯母片文字樣式</a:t>
             </a:r>
           </a:p>
@@ -3669,35 +3792,35 @@
           <a:p>
             <a:pPr lvl="0"/>
             <a:r>
-              <a:rPr lang="zh-TW" altLang="en-US" smtClean="0"/>
+              <a:rPr lang="zh-TW" altLang="en-US"/>
               <a:t>編輯母片文字樣式</a:t>
             </a:r>
           </a:p>
           <a:p>
             <a:pPr lvl="1"/>
             <a:r>
-              <a:rPr lang="zh-TW" altLang="en-US" smtClean="0"/>
+              <a:rPr lang="zh-TW" altLang="en-US"/>
               <a:t>第二層</a:t>
             </a:r>
           </a:p>
           <a:p>
             <a:pPr lvl="2"/>
             <a:r>
-              <a:rPr lang="zh-TW" altLang="en-US" smtClean="0"/>
+              <a:rPr lang="zh-TW" altLang="en-US"/>
               <a:t>第三層</a:t>
             </a:r>
           </a:p>
           <a:p>
             <a:pPr lvl="3"/>
             <a:r>
-              <a:rPr lang="zh-TW" altLang="en-US" smtClean="0"/>
+              <a:rPr lang="zh-TW" altLang="en-US"/>
               <a:t>第四層</a:t>
             </a:r>
           </a:p>
           <a:p>
             <a:pPr lvl="4"/>
             <a:r>
-              <a:rPr lang="zh-TW" altLang="en-US" smtClean="0"/>
+              <a:rPr lang="zh-TW" altLang="en-US"/>
               <a:t>第五層</a:t>
             </a:r>
             <a:endParaRPr lang="en-US" dirty="0"/>
@@ -3765,7 +3888,7 @@
           <a:p>
             <a:pPr lvl="0"/>
             <a:r>
-              <a:rPr lang="zh-TW" altLang="en-US" smtClean="0"/>
+              <a:rPr lang="zh-TW" altLang="en-US"/>
               <a:t>編輯母片文字樣式</a:t>
             </a:r>
           </a:p>
@@ -3795,35 +3918,35 @@
           <a:p>
             <a:pPr lvl="0"/>
             <a:r>
-              <a:rPr lang="zh-TW" altLang="en-US" smtClean="0"/>
+              <a:rPr lang="zh-TW" altLang="en-US"/>
               <a:t>編輯母片文字樣式</a:t>
             </a:r>
           </a:p>
           <a:p>
             <a:pPr lvl="1"/>
             <a:r>
-              <a:rPr lang="zh-TW" altLang="en-US" smtClean="0"/>
+              <a:rPr lang="zh-TW" altLang="en-US"/>
               <a:t>第二層</a:t>
             </a:r>
           </a:p>
           <a:p>
             <a:pPr lvl="2"/>
             <a:r>
-              <a:rPr lang="zh-TW" altLang="en-US" smtClean="0"/>
+              <a:rPr lang="zh-TW" altLang="en-US"/>
               <a:t>第三層</a:t>
             </a:r>
           </a:p>
           <a:p>
             <a:pPr lvl="3"/>
             <a:r>
-              <a:rPr lang="zh-TW" altLang="en-US" smtClean="0"/>
+              <a:rPr lang="zh-TW" altLang="en-US"/>
               <a:t>第四層</a:t>
             </a:r>
           </a:p>
           <a:p>
             <a:pPr lvl="4"/>
             <a:r>
-              <a:rPr lang="zh-TW" altLang="en-US" smtClean="0"/>
+              <a:rPr lang="zh-TW" altLang="en-US"/>
               <a:t>第五層</a:t>
             </a:r>
             <a:endParaRPr lang="en-US" dirty="0"/>
@@ -3848,7 +3971,7 @@
             <a:fld id="{B61BEF0D-F0BB-DE4B-95CE-6DB70DBA9567}" type="datetimeFigureOut">
               <a:rPr lang="en-US" smtClean="0"/>
               <a:pPr/>
-              <a:t>11/4/2025</a:t>
+              <a:t>11/24/2025</a:t>
             </a:fld>
             <a:endParaRPr lang="en-US" dirty="0"/>
           </a:p>
@@ -3948,7 +4071,7 @@
           <a:lstStyle/>
           <a:p>
             <a:r>
-              <a:rPr lang="zh-TW" altLang="en-US" smtClean="0"/>
+              <a:rPr lang="zh-TW" altLang="en-US"/>
               <a:t>按一下以編輯母片標題樣式</a:t>
             </a:r>
             <a:endParaRPr lang="en-US" dirty="0"/>
@@ -3973,7 +4096,7 @@
             <a:fld id="{B61BEF0D-F0BB-DE4B-95CE-6DB70DBA9567}" type="datetimeFigureOut">
               <a:rPr lang="en-US" smtClean="0"/>
               <a:pPr/>
-              <a:t>11/4/2025</a:t>
+              <a:t>11/24/2025</a:t>
             </a:fld>
             <a:endParaRPr lang="en-US" dirty="0"/>
           </a:p>
@@ -4070,7 +4193,7 @@
             <a:fld id="{B61BEF0D-F0BB-DE4B-95CE-6DB70DBA9567}" type="datetimeFigureOut">
               <a:rPr lang="en-US" smtClean="0"/>
               <a:pPr/>
-              <a:t>11/4/2025</a:t>
+              <a:t>11/24/2025</a:t>
             </a:fld>
             <a:endParaRPr lang="en-US" dirty="0"/>
           </a:p>
@@ -4176,7 +4299,7 @@
           </a:lstStyle>
           <a:p>
             <a:r>
-              <a:rPr lang="zh-TW" altLang="en-US" smtClean="0"/>
+              <a:rPr lang="zh-TW" altLang="en-US"/>
               <a:t>按一下以編輯母片標題樣式</a:t>
             </a:r>
             <a:endParaRPr lang="en-US" dirty="0"/>
@@ -4207,35 +4330,35 @@
           <a:p>
             <a:pPr lvl="0"/>
             <a:r>
-              <a:rPr lang="zh-TW" altLang="en-US" smtClean="0"/>
+              <a:rPr lang="zh-TW" altLang="en-US"/>
               <a:t>編輯母片文字樣式</a:t>
             </a:r>
           </a:p>
           <a:p>
             <a:pPr lvl="1"/>
             <a:r>
-              <a:rPr lang="zh-TW" altLang="en-US" smtClean="0"/>
+              <a:rPr lang="zh-TW" altLang="en-US"/>
               <a:t>第二層</a:t>
             </a:r>
           </a:p>
           <a:p>
             <a:pPr lvl="2"/>
             <a:r>
-              <a:rPr lang="zh-TW" altLang="en-US" smtClean="0"/>
+              <a:rPr lang="zh-TW" altLang="en-US"/>
               <a:t>第三層</a:t>
             </a:r>
           </a:p>
           <a:p>
             <a:pPr lvl="3"/>
             <a:r>
-              <a:rPr lang="zh-TW" altLang="en-US" smtClean="0"/>
+              <a:rPr lang="zh-TW" altLang="en-US"/>
               <a:t>第四層</a:t>
             </a:r>
           </a:p>
           <a:p>
             <a:pPr lvl="4"/>
             <a:r>
-              <a:rPr lang="zh-TW" altLang="en-US" smtClean="0"/>
+              <a:rPr lang="zh-TW" altLang="en-US"/>
               <a:t>第五層</a:t>
             </a:r>
             <a:endParaRPr lang="en-US" dirty="0"/>
@@ -4303,7 +4426,7 @@
           <a:p>
             <a:pPr lvl="0"/>
             <a:r>
-              <a:rPr lang="zh-TW" altLang="en-US" smtClean="0"/>
+              <a:rPr lang="zh-TW" altLang="en-US"/>
               <a:t>編輯母片文字樣式</a:t>
             </a:r>
           </a:p>
@@ -4327,7 +4450,7 @@
             <a:fld id="{B61BEF0D-F0BB-DE4B-95CE-6DB70DBA9567}" type="datetimeFigureOut">
               <a:rPr lang="en-US" smtClean="0"/>
               <a:pPr/>
-              <a:t>11/4/2025</a:t>
+              <a:t>11/24/2025</a:t>
             </a:fld>
             <a:endParaRPr lang="en-US" dirty="0"/>
           </a:p>
@@ -4433,7 +4556,7 @@
           </a:lstStyle>
           <a:p>
             <a:r>
-              <a:rPr lang="zh-TW" altLang="en-US" smtClean="0"/>
+              <a:rPr lang="zh-TW" altLang="en-US"/>
               <a:t>按一下以編輯母片標題樣式</a:t>
             </a:r>
             <a:endParaRPr lang="en-US" dirty="0"/>
@@ -4500,7 +4623,7 @@
           </a:lstStyle>
           <a:p>
             <a:r>
-              <a:rPr lang="zh-TW" altLang="en-US" smtClean="0"/>
+              <a:rPr lang="zh-TW" altLang="en-US"/>
               <a:t>按一下圖示以新增圖片</a:t>
             </a:r>
             <a:endParaRPr lang="en-US" dirty="0"/>
@@ -4568,7 +4691,7 @@
           <a:p>
             <a:pPr lvl="0"/>
             <a:r>
-              <a:rPr lang="zh-TW" altLang="en-US" smtClean="0"/>
+              <a:rPr lang="zh-TW" altLang="en-US"/>
               <a:t>編輯母片文字樣式</a:t>
             </a:r>
           </a:p>
@@ -4592,7 +4715,7 @@
             <a:fld id="{B61BEF0D-F0BB-DE4B-95CE-6DB70DBA9567}" type="datetimeFigureOut">
               <a:rPr lang="en-US" smtClean="0"/>
               <a:pPr/>
-              <a:t>11/4/2025</a:t>
+              <a:t>11/24/2025</a:t>
             </a:fld>
             <a:endParaRPr lang="en-US" dirty="0"/>
           </a:p>
@@ -4826,6 +4949,13 @@
               <a:schemeClr val="lt1"/>
             </a:fontRef>
           </p:style>
+          <p:txBody>
+            <a:bodyPr/>
+            <a:lstStyle/>
+            <a:p>
+              <a:endParaRPr lang="zh-TW" altLang="en-US"/>
+            </a:p>
+          </p:txBody>
         </p:sp>
         <p:sp>
           <p:nvSpPr>
@@ -4889,6 +5019,13 @@
               <a:schemeClr val="lt1"/>
             </a:fontRef>
           </p:style>
+          <p:txBody>
+            <a:bodyPr/>
+            <a:lstStyle/>
+            <a:p>
+              <a:endParaRPr lang="zh-TW" altLang="en-US"/>
+            </a:p>
+          </p:txBody>
         </p:sp>
         <p:sp>
           <p:nvSpPr>
@@ -4930,6 +5067,13 @@
               <a:schemeClr val="lt1"/>
             </a:fontRef>
           </p:style>
+          <p:txBody>
+            <a:bodyPr/>
+            <a:lstStyle/>
+            <a:p>
+              <a:endParaRPr lang="zh-TW" altLang="en-US"/>
+            </a:p>
+          </p:txBody>
         </p:sp>
         <p:sp>
           <p:nvSpPr>
@@ -4994,6 +5138,13 @@
               <a:schemeClr val="lt1"/>
             </a:fontRef>
           </p:style>
+          <p:txBody>
+            <a:bodyPr/>
+            <a:lstStyle/>
+            <a:p>
+              <a:endParaRPr lang="zh-TW" altLang="en-US"/>
+            </a:p>
+          </p:txBody>
         </p:sp>
         <p:sp>
           <p:nvSpPr>
@@ -5058,6 +5209,13 @@
               <a:schemeClr val="lt1"/>
             </a:fontRef>
           </p:style>
+          <p:txBody>
+            <a:bodyPr/>
+            <a:lstStyle/>
+            <a:p>
+              <a:endParaRPr lang="zh-TW" altLang="en-US"/>
+            </a:p>
+          </p:txBody>
         </p:sp>
         <p:sp>
           <p:nvSpPr>
@@ -5122,6 +5280,13 @@
               <a:schemeClr val="lt1"/>
             </a:fontRef>
           </p:style>
+          <p:txBody>
+            <a:bodyPr/>
+            <a:lstStyle/>
+            <a:p>
+              <a:endParaRPr lang="zh-TW" altLang="en-US"/>
+            </a:p>
+          </p:txBody>
         </p:sp>
         <p:sp>
           <p:nvSpPr>
@@ -5164,6 +5329,13 @@
               <a:schemeClr val="lt1"/>
             </a:fontRef>
           </p:style>
+          <p:txBody>
+            <a:bodyPr/>
+            <a:lstStyle/>
+            <a:p>
+              <a:endParaRPr lang="zh-TW" altLang="en-US"/>
+            </a:p>
+          </p:txBody>
         </p:sp>
         <p:sp>
           <p:nvSpPr>
@@ -5206,6 +5378,13 @@
               <a:schemeClr val="lt1"/>
             </a:fontRef>
           </p:style>
+          <p:txBody>
+            <a:bodyPr/>
+            <a:lstStyle/>
+            <a:p>
+              <a:endParaRPr lang="zh-TW" altLang="en-US"/>
+            </a:p>
+          </p:txBody>
         </p:sp>
       </p:grpSp>
       <p:sp>
@@ -5234,7 +5413,7 @@
           <a:lstStyle/>
           <a:p>
             <a:r>
-              <a:rPr lang="zh-TW" altLang="en-US" smtClean="0"/>
+              <a:rPr lang="zh-TW" altLang="en-US"/>
               <a:t>按一下以編輯母片標題樣式</a:t>
             </a:r>
             <a:endParaRPr lang="en-US" dirty="0"/>
@@ -5268,35 +5447,35 @@
           <a:p>
             <a:pPr lvl="0"/>
             <a:r>
-              <a:rPr lang="zh-TW" altLang="en-US" smtClean="0"/>
+              <a:rPr lang="zh-TW" altLang="en-US"/>
               <a:t>編輯母片文字樣式</a:t>
             </a:r>
           </a:p>
           <a:p>
             <a:pPr lvl="1"/>
             <a:r>
-              <a:rPr lang="zh-TW" altLang="en-US" smtClean="0"/>
+              <a:rPr lang="zh-TW" altLang="en-US"/>
               <a:t>第二層</a:t>
             </a:r>
           </a:p>
           <a:p>
             <a:pPr lvl="2"/>
             <a:r>
-              <a:rPr lang="zh-TW" altLang="en-US" smtClean="0"/>
+              <a:rPr lang="zh-TW" altLang="en-US"/>
               <a:t>第三層</a:t>
             </a:r>
           </a:p>
           <a:p>
             <a:pPr lvl="3"/>
             <a:r>
-              <a:rPr lang="zh-TW" altLang="en-US" smtClean="0"/>
+              <a:rPr lang="zh-TW" altLang="en-US"/>
               <a:t>第四層</a:t>
             </a:r>
           </a:p>
           <a:p>
             <a:pPr lvl="4"/>
             <a:r>
-              <a:rPr lang="zh-TW" altLang="en-US" smtClean="0"/>
+              <a:rPr lang="zh-TW" altLang="en-US"/>
               <a:t>第五層</a:t>
             </a:r>
             <a:endParaRPr lang="en-US" dirty="0"/>
@@ -5339,7 +5518,7 @@
             <a:fld id="{B61BEF0D-F0BB-DE4B-95CE-6DB70DBA9567}" type="datetimeFigureOut">
               <a:rPr lang="en-US" smtClean="0"/>
               <a:pPr/>
-              <a:t>11/4/2025</a:t>
+              <a:t>11/24/2025</a:t>
             </a:fld>
             <a:endParaRPr lang="en-US" dirty="0"/>
           </a:p>
@@ -5909,15 +6088,15 @@
           <a:p>
             <a:pPr algn="ctr"/>
             <a:r>
-              <a:rPr lang="zh-TW" altLang="zh-TW" dirty="0" smtClean="0"/>
+              <a:rPr lang="zh-TW" altLang="zh-TW" dirty="0"/>
               <a:t>DSP LAB</a:t>
             </a:r>
             <a:r>
-              <a:rPr lang="en-US" altLang="zh-TW" dirty="0" smtClean="0"/>
+              <a:rPr lang="en-US" altLang="zh-TW" dirty="0"/>
               <a:t>4</a:t>
             </a:r>
             <a:br>
-              <a:rPr lang="en-US" altLang="zh-TW" dirty="0" smtClean="0"/>
+              <a:rPr lang="en-US" altLang="zh-TW" dirty="0"/>
             </a:br>
             <a:r>
               <a:rPr lang="zh-TW" altLang="en-US" sz="4800" dirty="0">
@@ -5926,16 +6105,7 @@
                 </a:solidFill>
                 <a:latin typeface="+mn-ea"/>
               </a:rPr>
-              <a:t>光達</a:t>
-            </a:r>
-            <a:r>
-              <a:rPr lang="zh-TW" altLang="en-US" sz="4800" dirty="0" smtClean="0">
-                <a:solidFill>
-                  <a:srgbClr val="2E75B6"/>
-                </a:solidFill>
-                <a:latin typeface="+mn-ea"/>
-              </a:rPr>
-              <a:t>實驗</a:t>
+              <a:t>光達實驗</a:t>
             </a:r>
             <a:endParaRPr lang="zh-TW" altLang="en-US" sz="4800" dirty="0"/>
           </a:p>
@@ -5951,13 +6121,6 @@
   <p:clrMapOvr>
     <a:masterClrMapping/>
   </p:clrMapOvr>
-  <p:timing>
-    <p:tnLst>
-      <p:par>
-        <p:cTn id="1" dur="indefinite" restart="never" nodeType="tmRoot"/>
-      </p:par>
-    </p:tnLst>
-  </p:timing>
 </p:sld>
 </file>
 
@@ -6007,10 +6170,6 @@
               <a:rPr lang="en-US" altLang="zh-TW" sz="4000" dirty="0"/>
               <a:t>histogram</a:t>
             </a:r>
-            <a:r>
-              <a:rPr lang="en-US" altLang="zh-TW" dirty="0"/>
-              <a:t/>
-            </a:r>
             <a:br>
               <a:rPr lang="en-US" altLang="zh-TW" dirty="0"/>
             </a:br>
@@ -6054,19 +6213,11 @@
               <a:t>●</a:t>
             </a:r>
             <a:r>
-              <a:rPr lang="zh-TW" altLang="en-US" sz="2000" dirty="0" smtClean="0"/>
-              <a:t>同</a:t>
-            </a:r>
-            <a:r>
               <a:rPr lang="zh-TW" altLang="en-US" sz="2000" dirty="0"/>
-              <a:t>實驗</a:t>
-            </a:r>
-            <a:r>
-              <a:rPr lang="zh-TW" altLang="en-US" sz="2000" dirty="0" smtClean="0"/>
-              <a:t>一，</a:t>
-            </a:r>
-            <a:r>
-              <a:rPr lang="en-US" altLang="zh-TW" sz="2000" dirty="0" smtClean="0"/>
+              <a:t>同實驗一，</a:t>
+            </a:r>
+            <a:r>
+              <a:rPr lang="en-US" altLang="zh-TW" sz="2000" dirty="0"/>
               <a:t>histogram</a:t>
             </a:r>
             <a:r>
@@ -6087,14 +6238,10 @@
             </a:r>
             <a:r>
               <a:rPr lang="zh-TW" altLang="en-US" sz="2000" dirty="0"/>
-              <a:t>，把收到訊號的時間分佈</a:t>
-            </a:r>
-            <a:r>
-              <a:rPr lang="zh-TW" altLang="en-US" sz="2000" dirty="0" smtClean="0"/>
-              <a:t>在</a:t>
-            </a:r>
-            <a:r>
-              <a:rPr lang="en-US" altLang="zh-TW" sz="2000" dirty="0" smtClean="0"/>
+              <a:t>，把收到訊號的時間分佈在</a:t>
+            </a:r>
+            <a:r>
+              <a:rPr lang="en-US" altLang="zh-TW" sz="2000" dirty="0"/>
               <a:t>0~1250</a:t>
             </a:r>
             <a:r>
@@ -6111,11 +6258,7 @@
             </a:r>
             <a:r>
               <a:rPr lang="en-US" altLang="zh-TW" sz="2000" dirty="0"/>
-              <a:t>:100ps</a:t>
-            </a:r>
-            <a:r>
-              <a:rPr lang="en-US" altLang="zh-TW" sz="2000" dirty="0" smtClean="0"/>
-              <a:t>)</a:t>
+              <a:t>:100ps)</a:t>
             </a:r>
           </a:p>
           <a:p>
@@ -6129,26 +6272,19 @@
               <a:buNone/>
             </a:pPr>
             <a:r>
-              <a:rPr lang="zh-TW" altLang="en-US" sz="2000" dirty="0" smtClean="0">
-                <a:latin typeface="Century Gothic" panose="020B0502020202020204" pitchFamily="34" charset="0"/>
-              </a:rPr>
-              <a:t>●</a:t>
-            </a:r>
-            <a:r>
               <a:rPr lang="zh-TW" altLang="en-US" sz="2000" dirty="0">
                 <a:latin typeface="Century Gothic" panose="020B0502020202020204" pitchFamily="34" charset="0"/>
               </a:rPr>
-              <a:t>以下為參考完成圖</a:t>
+              <a:t>●以下為參考完成圖</a:t>
             </a:r>
             <a:r>
               <a:rPr lang="zh-TW" altLang="en-US" sz="2000" dirty="0"/>
               <a:t>，峰值大約在</a:t>
             </a:r>
             <a:r>
-              <a:rPr lang="en-US" altLang="zh-TW" sz="2000" dirty="0" smtClean="0"/>
+              <a:rPr lang="en-US" altLang="zh-TW" sz="2000" dirty="0"/>
               <a:t>12-14m</a:t>
             </a:r>
-            <a:endParaRPr lang="en-US" altLang="zh-TW" sz="2000" dirty="0"/>
           </a:p>
           <a:p>
             <a:pPr marL="0" indent="0">
@@ -6191,13 +6327,6 @@
   <p:clrMapOvr>
     <a:masterClrMapping/>
   </p:clrMapOvr>
-  <p:timing>
-    <p:tnLst>
-      <p:par>
-        <p:cTn id="1" dur="indefinite" restart="never" nodeType="tmRoot"/>
-      </p:par>
-    </p:tnLst>
-  </p:timing>
 </p:sld>
 </file>
 
@@ -6241,21 +6370,8 @@
           <a:p>
             <a:r>
               <a:rPr lang="zh-TW" altLang="en-US" b="1" dirty="0"/>
-              <a:t>光達</a:t>
-            </a:r>
-            <a:r>
-              <a:rPr lang="zh-TW" altLang="en-US" b="1" dirty="0" smtClean="0"/>
-              <a:t>使用</a:t>
-            </a:r>
-            <a:r>
-              <a:rPr lang="zh-TW" altLang="en-US" b="1" dirty="0"/>
-              <a:t>與資料</a:t>
-            </a:r>
-            <a:r>
-              <a:rPr lang="zh-TW" altLang="en-US" b="1" dirty="0" smtClean="0"/>
-              <a:t>指引</a:t>
-            </a:r>
-            <a:endParaRPr lang="zh-TW" altLang="en-US" b="1" dirty="0"/>
+              <a:t>光達使用與資料指引</a:t>
+            </a:r>
           </a:p>
         </p:txBody>
       </p:sp>
@@ -6269,13 +6385,6 @@
   <p:clrMapOvr>
     <a:masterClrMapping/>
   </p:clrMapOvr>
-  <p:timing>
-    <p:tnLst>
-      <p:par>
-        <p:cTn id="1" dur="indefinite" restart="never" nodeType="tmRoot"/>
-      </p:par>
-    </p:tnLst>
-  </p:timing>
 </p:sld>
 </file>
 
@@ -6349,15 +6458,7 @@
           <a:p>
             <a:r>
               <a:rPr lang="zh-TW" altLang="en-US" sz="4000" dirty="0"/>
-              <a:t>光達</a:t>
-            </a:r>
-            <a:r>
-              <a:rPr lang="zh-TW" altLang="en-US" sz="4000" dirty="0" smtClean="0"/>
-              <a:t>使用</a:t>
-            </a:r>
-            <a:r>
-              <a:rPr lang="zh-TW" altLang="en-US" sz="4000" dirty="0"/>
-              <a:t>指引</a:t>
+              <a:t>光達使用指引</a:t>
             </a:r>
           </a:p>
         </p:txBody>
@@ -6385,14 +6486,16 @@
           </a:xfrm>
         </p:spPr>
         <p:txBody>
-          <a:bodyPr/>
+          <a:bodyPr>
+            <a:normAutofit lnSpcReduction="10000"/>
+          </a:bodyPr>
           <a:lstStyle/>
           <a:p>
             <a:pPr marL="0" indent="0">
               <a:buNone/>
             </a:pPr>
             <a:r>
-              <a:rPr lang="zh-TW" altLang="en-US" sz="2000" dirty="0" smtClean="0">
+              <a:rPr lang="zh-TW" altLang="en-US" sz="2000" dirty="0">
                 <a:solidFill>
                   <a:schemeClr val="tx1"/>
                 </a:solidFill>
@@ -6401,14 +6504,14 @@
               <a:t>●到以下網址</a:t>
             </a:r>
             <a:r>
-              <a:rPr lang="zh-TW" altLang="en-US" sz="2000" dirty="0" smtClean="0">
+              <a:rPr lang="zh-TW" altLang="en-US" sz="2000" dirty="0">
                 <a:solidFill>
                   <a:schemeClr val="tx1"/>
                 </a:solidFill>
               </a:rPr>
               <a:t>安裝應用程式</a:t>
             </a:r>
-            <a:endParaRPr lang="en-US" altLang="zh-TW" sz="2000" dirty="0" smtClean="0">
+            <a:endParaRPr lang="en-US" altLang="zh-TW" sz="2000" dirty="0">
               <a:solidFill>
                 <a:schemeClr val="tx1"/>
               </a:solidFill>
@@ -6454,7 +6557,7 @@
             <a:pPr marL="0" indent="0">
               <a:buNone/>
             </a:pPr>
-            <a:endParaRPr lang="en-US" altLang="zh-TW" dirty="0" smtClean="0">
+            <a:endParaRPr lang="en-US" altLang="zh-TW" dirty="0">
               <a:latin typeface="Century Gothic" panose="020B0502020202020204" pitchFamily="34" charset="0"/>
             </a:endParaRPr>
           </a:p>
@@ -6463,7 +6566,7 @@
               <a:buNone/>
             </a:pPr>
             <a:r>
-              <a:rPr lang="zh-TW" altLang="en-US" sz="2000" dirty="0" smtClean="0">
+              <a:rPr lang="zh-TW" altLang="en-US" sz="2000" dirty="0">
                 <a:solidFill>
                   <a:schemeClr val="tx1"/>
                 </a:solidFill>
@@ -6472,31 +6575,15 @@
               <a:t>●</a:t>
             </a:r>
             <a:r>
-              <a:rPr lang="zh-TW" altLang="en-US" sz="2000" dirty="0" smtClean="0">
-                <a:solidFill>
-                  <a:schemeClr val="tx1"/>
-                </a:solidFill>
-              </a:rPr>
-              <a:t>接上</a:t>
-            </a:r>
-            <a:r>
               <a:rPr lang="zh-TW" altLang="en-US" sz="2000" dirty="0">
                 <a:solidFill>
                   <a:schemeClr val="tx1"/>
                 </a:solidFill>
               </a:rPr>
-              <a:t>光</a:t>
-            </a:r>
-            <a:r>
-              <a:rPr lang="zh-TW" altLang="en-US" sz="2000" dirty="0" smtClean="0">
-                <a:solidFill>
-                  <a:schemeClr val="tx1"/>
-                </a:solidFill>
-              </a:rPr>
-              <a:t>達後，開啟</a:t>
-            </a:r>
-            <a:r>
-              <a:rPr lang="en-US" altLang="zh-TW" sz="2000" dirty="0" smtClean="0">
+              <a:t>接上光達後，開啟</a:t>
+            </a:r>
+            <a:r>
+              <a:rPr lang="en-US" altLang="zh-TW" sz="2000" dirty="0">
                 <a:solidFill>
                   <a:schemeClr val="tx1"/>
                 </a:solidFill>
@@ -6504,7 +6591,7 @@
               <a:t>RealSense Viewer</a:t>
             </a:r>
             <a:r>
-              <a:rPr lang="zh-TW" altLang="en-US" sz="2000" dirty="0" smtClean="0">
+              <a:rPr lang="zh-TW" altLang="en-US" sz="2000" dirty="0">
                 <a:solidFill>
                   <a:schemeClr val="tx1"/>
                 </a:solidFill>
@@ -6559,21 +6646,8 @@
                   <a:srgbClr val="FF0000"/>
                 </a:solidFill>
               </a:rPr>
-              <a:t>開啟</a:t>
-            </a:r>
-            <a:r>
-              <a:rPr lang="zh-TW" altLang="en-US" b="1" dirty="0" smtClean="0">
-                <a:solidFill>
-                  <a:srgbClr val="FF0000"/>
-                </a:solidFill>
-              </a:rPr>
-              <a:t>深度相機</a:t>
-            </a:r>
-            <a:endParaRPr lang="zh-TW" altLang="en-US" b="1" dirty="0">
-              <a:solidFill>
-                <a:srgbClr val="FF0000"/>
-              </a:solidFill>
-            </a:endParaRPr>
+              <a:t>開啟深度相機</a:t>
+            </a:r>
           </a:p>
         </p:txBody>
       </p:sp>
@@ -6606,18 +6680,13 @@
           <a:lstStyle/>
           <a:p>
             <a:r>
-              <a:rPr lang="zh-TW" altLang="en-US" b="1" dirty="0" smtClean="0">
+              <a:rPr lang="zh-TW" altLang="en-US" b="1" dirty="0">
                 <a:solidFill>
                   <a:srgbClr val="FF0000"/>
                 </a:solidFill>
               </a:rPr>
               <a:t>拍照並存檔</a:t>
             </a:r>
-            <a:endParaRPr lang="zh-TW" altLang="en-US" b="1" dirty="0">
-              <a:solidFill>
-                <a:srgbClr val="FF0000"/>
-              </a:solidFill>
-            </a:endParaRPr>
           </a:p>
         </p:txBody>
       </p:sp>
@@ -6841,7 +6910,7 @@
           <a:lstStyle/>
           <a:p>
             <a:r>
-              <a:rPr lang="zh-TW" altLang="en-US" b="1" dirty="0" smtClean="0">
+              <a:rPr lang="zh-TW" altLang="en-US" b="1" dirty="0">
                 <a:solidFill>
                   <a:srgbClr val="FF0000"/>
                 </a:solidFill>
@@ -6849,7 +6918,7 @@
               <a:t>切換到</a:t>
             </a:r>
             <a:r>
-              <a:rPr lang="en-US" altLang="zh-TW" b="1" dirty="0" smtClean="0">
+              <a:rPr lang="en-US" altLang="zh-TW" b="1" dirty="0">
                 <a:solidFill>
                   <a:srgbClr val="FF0000"/>
                 </a:solidFill>
@@ -6874,13 +6943,6 @@
   <p:clrMapOvr>
     <a:masterClrMapping/>
   </p:clrMapOvr>
-  <p:timing>
-    <p:tnLst>
-      <p:par>
-        <p:cTn id="1" dur="indefinite" restart="never" nodeType="tmRoot"/>
-      </p:par>
-    </p:tnLst>
-  </p:timing>
 </p:sld>
 </file>
 
@@ -6930,28 +6992,12 @@
           <a:lstStyle/>
           <a:p>
             <a:r>
-              <a:rPr lang="zh-TW" altLang="en-US" sz="4400" dirty="0" smtClean="0">
+              <a:rPr lang="zh-TW" altLang="en-US" sz="4400" dirty="0">
                 <a:solidFill>
                   <a:srgbClr val="2E75B6"/>
                 </a:solidFill>
               </a:rPr>
-              <a:t>檔案</a:t>
-            </a:r>
-            <a:r>
-              <a:rPr lang="zh-TW" altLang="en-US" sz="4400" dirty="0">
-                <a:solidFill>
-                  <a:srgbClr val="2E75B6"/>
-                </a:solidFill>
-              </a:rPr>
-              <a:t>說明</a:t>
-            </a:r>
-            <a:r>
-              <a:rPr lang="en-US" altLang="zh-TW" sz="4000" dirty="0">
-                <a:solidFill>
-                  <a:schemeClr val="tx1"/>
-                </a:solidFill>
-              </a:rPr>
-              <a:t/>
+              <a:t>檔案說明</a:t>
             </a:r>
             <a:br>
               <a:rPr lang="en-US" altLang="zh-TW" sz="4000" dirty="0">
@@ -6994,7 +7040,7 @@
               <a:buNone/>
             </a:pPr>
             <a:r>
-              <a:rPr lang="en-US" altLang="zh-TW" sz="2000" dirty="0" smtClean="0">
+              <a:rPr lang="en-US" altLang="zh-TW" sz="2000" dirty="0">
                 <a:solidFill>
                   <a:schemeClr val="tx1"/>
                 </a:solidFill>
@@ -7002,7 +7048,7 @@
               <a:t>(1)</a:t>
             </a:r>
             <a:r>
-              <a:rPr lang="zh-TW" altLang="en-US" sz="2000" dirty="0" smtClean="0">
+              <a:rPr lang="zh-TW" altLang="en-US" sz="2000" dirty="0">
                 <a:solidFill>
                   <a:schemeClr val="tx1"/>
                 </a:solidFill>
@@ -7015,15 +7061,7 @@
                   <a:schemeClr val="tx1"/>
                 </a:solidFill>
               </a:rPr>
-              <a:t>_</a:t>
-            </a:r>
-            <a:r>
-              <a:rPr lang="en-US" altLang="zh-TW" sz="2000" dirty="0" smtClean="0">
-                <a:solidFill>
-                  <a:schemeClr val="tx1"/>
-                </a:solidFill>
-              </a:rPr>
-              <a:t>Depth.png:</a:t>
+              <a:t>_Depth.png:</a:t>
             </a:r>
             <a:r>
               <a:rPr lang="zh-TW" altLang="en-US" sz="2000" dirty="0">
@@ -7031,31 +7069,7 @@
                   <a:schemeClr val="tx1"/>
                 </a:solidFill>
               </a:rPr>
-              <a:t>幫助檢視深淺</a:t>
-            </a:r>
-            <a:r>
-              <a:rPr lang="zh-TW" altLang="en-US" sz="2000" dirty="0" smtClean="0">
-                <a:solidFill>
-                  <a:schemeClr val="tx1"/>
-                </a:solidFill>
-              </a:rPr>
-              <a:t>變化</a:t>
-            </a:r>
-            <a:r>
-              <a:rPr lang="zh-TW" altLang="en-US" sz="2000" dirty="0">
-                <a:solidFill>
-                  <a:schemeClr val="tx1"/>
-                </a:solidFill>
-              </a:rPr>
-              <a:t>的可</a:t>
-            </a:r>
-            <a:r>
-              <a:rPr lang="zh-TW" altLang="en-US" sz="2000" dirty="0" smtClean="0">
-                <a:solidFill>
-                  <a:schemeClr val="tx1"/>
-                </a:solidFill>
-              </a:rPr>
-              <a:t>視化圖片</a:t>
+              <a:t>幫助檢視深淺變化的可視化圖片</a:t>
             </a:r>
             <a:endParaRPr lang="en-US" altLang="zh-TW" sz="2000" dirty="0">
               <a:solidFill>
@@ -7068,7 +7082,7 @@
               <a:buNone/>
             </a:pPr>
             <a:r>
-              <a:rPr lang="en-US" altLang="zh-TW" sz="2000" dirty="0" smtClean="0">
+              <a:rPr lang="en-US" altLang="zh-TW" sz="2000" dirty="0">
                 <a:solidFill>
                   <a:schemeClr val="tx1"/>
                 </a:solidFill>
@@ -7076,7 +7090,7 @@
               <a:t>(2)</a:t>
             </a:r>
             <a:r>
-              <a:rPr lang="zh-TW" altLang="en-US" sz="2000" dirty="0" smtClean="0">
+              <a:rPr lang="zh-TW" altLang="en-US" sz="2000" dirty="0">
                 <a:solidFill>
                   <a:schemeClr val="tx1"/>
                 </a:solidFill>
@@ -7092,7 +7106,7 @@
               <a:t>_</a:t>
             </a:r>
             <a:r>
-              <a:rPr lang="en-US" altLang="zh-TW" sz="2000" dirty="0" err="1" smtClean="0">
+              <a:rPr lang="en-US" altLang="zh-TW" sz="2000" dirty="0" err="1">
                 <a:solidFill>
                   <a:schemeClr val="tx1"/>
                 </a:solidFill>
@@ -7100,7 +7114,7 @@
               <a:t>Depth.raw</a:t>
             </a:r>
             <a:r>
-              <a:rPr lang="en-US" altLang="zh-TW" sz="2000" dirty="0" smtClean="0">
+              <a:rPr lang="en-US" altLang="zh-TW" sz="2000" dirty="0">
                 <a:solidFill>
                   <a:schemeClr val="tx1"/>
                 </a:solidFill>
@@ -7126,7 +7140,7 @@
               <a:buNone/>
             </a:pPr>
             <a:r>
-              <a:rPr lang="en-US" altLang="zh-TW" sz="2000" dirty="0" smtClean="0">
+              <a:rPr lang="en-US" altLang="zh-TW" sz="2000" dirty="0">
                 <a:solidFill>
                   <a:schemeClr val="tx1"/>
                 </a:solidFill>
@@ -7134,7 +7148,7 @@
               <a:t>(3)</a:t>
             </a:r>
             <a:r>
-              <a:rPr lang="zh-TW" altLang="en-US" sz="2000" dirty="0" smtClean="0">
+              <a:rPr lang="zh-TW" altLang="en-US" sz="2000" dirty="0">
                 <a:solidFill>
                   <a:schemeClr val="tx1"/>
                 </a:solidFill>
@@ -7147,23 +7161,7 @@
                   <a:schemeClr val="tx1"/>
                 </a:solidFill>
               </a:rPr>
-              <a:t>_</a:t>
-            </a:r>
-            <a:r>
-              <a:rPr lang="en-US" altLang="zh-TW" sz="2000" dirty="0" smtClean="0">
-                <a:solidFill>
-                  <a:schemeClr val="tx1"/>
-                </a:solidFill>
-              </a:rPr>
-              <a:t>Depth_metadata.csv:</a:t>
-            </a:r>
-            <a:r>
-              <a:rPr lang="zh-TW" altLang="en-US" sz="2000" dirty="0" smtClean="0">
-                <a:solidFill>
-                  <a:schemeClr val="tx1"/>
-                </a:solidFill>
-              </a:rPr>
-              <a:t>紀錄該</a:t>
+              <a:t>_Depth_metadata.csv:</a:t>
             </a:r>
             <a:r>
               <a:rPr lang="zh-TW" altLang="en-US" sz="2000" dirty="0">
@@ -7171,33 +7169,9 @@
                   <a:schemeClr val="tx1"/>
                 </a:solidFill>
               </a:rPr>
-              <a:t>深度影像對應</a:t>
-            </a:r>
-            <a:r>
-              <a:rPr lang="zh-TW" altLang="en-US" sz="2000" dirty="0" smtClean="0">
-                <a:solidFill>
-                  <a:schemeClr val="tx1"/>
-                </a:solidFill>
-              </a:rPr>
-              <a:t>的</a:t>
-            </a:r>
-            <a:r>
-              <a:rPr lang="zh-TW" altLang="en-US" sz="2000" dirty="0">
-                <a:solidFill>
-                  <a:schemeClr val="tx1"/>
-                </a:solidFill>
-              </a:rPr>
-              <a:t>影格</a:t>
-            </a:r>
-            <a:r>
-              <a:rPr lang="zh-TW" altLang="en-US" sz="2000" dirty="0" smtClean="0">
-                <a:solidFill>
-                  <a:schemeClr val="tx1"/>
-                </a:solidFill>
-              </a:rPr>
-              <a:t>資訊與相機的內參數</a:t>
-            </a:r>
-            <a:endParaRPr lang="en-US" altLang="zh-TW" sz="2000" dirty="0" smtClean="0">
+              <a:t>紀錄該深度影像對應的影格資訊與相機的內參數</a:t>
+            </a:r>
+            <a:endParaRPr lang="en-US" altLang="zh-TW" sz="2000" dirty="0">
               <a:solidFill>
                 <a:schemeClr val="tx1"/>
               </a:solidFill>
@@ -7207,7 +7181,7 @@
             <a:pPr marL="0" indent="0">
               <a:buNone/>
             </a:pPr>
-            <a:endParaRPr lang="en-US" altLang="zh-TW" dirty="0" smtClean="0">
+            <a:endParaRPr lang="en-US" altLang="zh-TW" dirty="0">
               <a:latin typeface="Century Gothic" panose="020B0502020202020204" pitchFamily="34" charset="0"/>
             </a:endParaRPr>
           </a:p>
@@ -7215,7 +7189,7 @@
             <a:pPr marL="0" indent="0">
               <a:buNone/>
             </a:pPr>
-            <a:endParaRPr lang="en-US" altLang="zh-TW" dirty="0" smtClean="0"/>
+            <a:endParaRPr lang="en-US" altLang="zh-TW" dirty="0"/>
           </a:p>
         </p:txBody>
       </p:sp>
@@ -7253,13 +7227,6 @@
   <p:clrMapOvr>
     <a:masterClrMapping/>
   </p:clrMapOvr>
-  <p:timing>
-    <p:tnLst>
-      <p:par>
-        <p:cTn id="1" dur="indefinite" restart="never" nodeType="tmRoot"/>
-      </p:par>
-    </p:tnLst>
-  </p:timing>
 </p:sld>
 </file>
 
@@ -7309,12 +7276,8 @@
           <a:lstStyle/>
           <a:p>
             <a:r>
-              <a:rPr lang="zh-TW" altLang="en-US" sz="4000" dirty="0" smtClean="0"/>
-              <a:t>影像相關資料</a:t>
-            </a:r>
-            <a:r>
               <a:rPr lang="zh-TW" altLang="en-US" sz="4000" dirty="0"/>
-              <a:t>說明</a:t>
+              <a:t>影像相關資料說明</a:t>
             </a:r>
           </a:p>
         </p:txBody>
@@ -7508,23 +7471,7 @@
                   <a:schemeClr val="tx1"/>
                 </a:solidFill>
               </a:rPr>
-              <a:t>(3) Resolution </a:t>
-            </a:r>
-            <a:r>
-              <a:rPr lang="en-US" altLang="zh-TW" sz="2000" dirty="0" smtClean="0">
-                <a:solidFill>
-                  <a:schemeClr val="tx1"/>
-                </a:solidFill>
-              </a:rPr>
-              <a:t>x/Resolution </a:t>
-            </a:r>
-            <a:r>
-              <a:rPr lang="en-US" altLang="zh-TW" sz="2000" dirty="0">
-                <a:solidFill>
-                  <a:schemeClr val="tx1"/>
-                </a:solidFill>
-              </a:rPr>
-              <a:t>y:</a:t>
+              <a:t>(3) Resolution x/Resolution y:</a:t>
             </a:r>
             <a:r>
               <a:rPr lang="zh-TW" altLang="en-US" sz="2000" dirty="0">
@@ -7532,17 +7479,9 @@
                   <a:schemeClr val="tx1"/>
                 </a:solidFill>
               </a:rPr>
-              <a:t>影像解析度，也就是深度</a:t>
-            </a:r>
-            <a:r>
-              <a:rPr lang="zh-TW" altLang="en-US" sz="2000" dirty="0" smtClean="0">
-                <a:solidFill>
-                  <a:schemeClr val="tx1"/>
-                </a:solidFill>
-              </a:rPr>
-              <a:t>圖</a:t>
-            </a:r>
-            <a:endParaRPr lang="en-US" altLang="zh-TW" sz="2000" dirty="0" smtClean="0">
+              <a:t>影像解析度，也就是深度圖</a:t>
+            </a:r>
+            <a:endParaRPr lang="en-US" altLang="zh-TW" sz="2000" dirty="0">
               <a:solidFill>
                 <a:schemeClr val="tx1"/>
               </a:solidFill>
@@ -7558,28 +7497,12 @@
               <a:buNone/>
             </a:pPr>
             <a:r>
-              <a:rPr lang="zh-TW" altLang="en-US" sz="2000" dirty="0" smtClean="0">
-                <a:solidFill>
-                  <a:schemeClr val="tx1"/>
-                </a:solidFill>
-              </a:rPr>
-              <a:t>的尺寸</a:t>
-            </a:r>
-            <a:r>
               <a:rPr lang="zh-TW" altLang="en-US" sz="2000" dirty="0">
                 <a:solidFill>
                   <a:schemeClr val="tx1"/>
                 </a:solidFill>
               </a:rPr>
-              <a:t>為</a:t>
-            </a:r>
-            <a:r>
-              <a:rPr lang="en-US" altLang="zh-TW" sz="2000" dirty="0" smtClean="0">
-                <a:solidFill>
-                  <a:schemeClr val="tx1"/>
-                </a:solidFill>
-              </a:rPr>
-              <a:t>640</a:t>
+              <a:t>的尺寸為</a:t>
             </a:r>
             <a:r>
               <a:rPr lang="en-US" altLang="zh-TW" sz="2000" dirty="0">
@@ -7587,7 +7510,7 @@
                   <a:schemeClr val="tx1"/>
                 </a:solidFill>
               </a:rPr>
-              <a:t>(</a:t>
+              <a:t>640(</a:t>
             </a:r>
             <a:r>
               <a:rPr lang="zh-TW" altLang="en-US" sz="2000" dirty="0">
@@ -7603,15 +7526,7 @@
                   <a:schemeClr val="tx1"/>
                 </a:solidFill>
               </a:rPr>
-              <a:t>)×</a:t>
-            </a:r>
-            <a:r>
-              <a:rPr lang="en-US" altLang="zh-TW" sz="2000" dirty="0" smtClean="0">
-                <a:solidFill>
-                  <a:schemeClr val="tx1"/>
-                </a:solidFill>
-              </a:rPr>
-              <a:t>480(</a:t>
+              <a:t>)×480(</a:t>
             </a:r>
             <a:r>
               <a:rPr lang="zh-TW" altLang="en-US" sz="2000" dirty="0">
@@ -7622,7 +7537,7 @@
               <a:t>高</a:t>
             </a:r>
             <a:r>
-              <a:rPr lang="en-US" altLang="zh-TW" sz="2000" dirty="0" smtClean="0">
+              <a:rPr lang="en-US" altLang="zh-TW" sz="2000" dirty="0">
                 <a:solidFill>
                   <a:schemeClr val="tx1"/>
                 </a:solidFill>
@@ -7640,7 +7555,7 @@
               <a:buNone/>
             </a:pPr>
             <a:r>
-              <a:rPr lang="en-US" altLang="zh-TW" sz="2000" dirty="0" smtClean="0">
+              <a:rPr lang="en-US" altLang="zh-TW" sz="2000" dirty="0">
                 <a:solidFill>
                   <a:schemeClr val="tx1"/>
                 </a:solidFill>
@@ -7648,7 +7563,7 @@
               <a:t>(4)</a:t>
             </a:r>
             <a:r>
-              <a:rPr lang="zh-TW" altLang="en-US" sz="2000" dirty="0" smtClean="0">
+              <a:rPr lang="zh-TW" altLang="en-US" sz="2000" dirty="0">
                 <a:solidFill>
                   <a:schemeClr val="tx1"/>
                 </a:solidFill>
@@ -7656,7 +7571,7 @@
               <a:t> </a:t>
             </a:r>
             <a:r>
-              <a:rPr lang="en-US" altLang="zh-TW" sz="2000" dirty="0" err="1" smtClean="0">
+              <a:rPr lang="en-US" altLang="zh-TW" sz="2000" dirty="0" err="1">
                 <a:solidFill>
                   <a:schemeClr val="tx1"/>
                 </a:solidFill>
@@ -7664,7 +7579,7 @@
               <a:t>Fx</a:t>
             </a:r>
             <a:r>
-              <a:rPr lang="en-US" altLang="zh-TW" sz="2000" dirty="0" smtClean="0">
+              <a:rPr lang="en-US" altLang="zh-TW" sz="2000" dirty="0">
                 <a:solidFill>
                   <a:schemeClr val="tx1"/>
                 </a:solidFill>
@@ -7672,7 +7587,7 @@
               <a:t>/</a:t>
             </a:r>
             <a:r>
-              <a:rPr lang="en-US" altLang="zh-TW" sz="2000" dirty="0" err="1" smtClean="0">
+              <a:rPr lang="en-US" altLang="zh-TW" sz="2000" dirty="0" err="1">
                 <a:solidFill>
                   <a:schemeClr val="tx1"/>
                 </a:solidFill>
@@ -7680,7 +7595,7 @@
               <a:t>Fy</a:t>
             </a:r>
             <a:r>
-              <a:rPr lang="en-US" altLang="zh-TW" sz="2000" dirty="0" smtClean="0">
+              <a:rPr lang="en-US" altLang="zh-TW" sz="2000" dirty="0">
                 <a:solidFill>
                   <a:schemeClr val="tx1"/>
                 </a:solidFill>
@@ -7709,15 +7624,7 @@
                   <a:schemeClr val="tx1"/>
                 </a:solidFill>
               </a:rPr>
-              <a:t>方向的</a:t>
-            </a:r>
-            <a:r>
-              <a:rPr lang="zh-TW" altLang="en-US" sz="2000" dirty="0" smtClean="0">
-                <a:solidFill>
-                  <a:schemeClr val="tx1"/>
-                </a:solidFill>
-              </a:rPr>
-              <a:t>焦距，即放大能力</a:t>
+              <a:t>方向的焦距，即放大能力</a:t>
             </a:r>
             <a:r>
               <a:rPr lang="en-US" altLang="zh-TW" sz="2000" dirty="0">
@@ -7752,7 +7659,7 @@
               <a:t>像素</a:t>
             </a:r>
             <a:r>
-              <a:rPr lang="en-US" altLang="zh-TW" sz="2000" dirty="0" smtClean="0">
+              <a:rPr lang="en-US" altLang="zh-TW" sz="2000" dirty="0">
                 <a:solidFill>
                   <a:schemeClr val="tx1"/>
                 </a:solidFill>
@@ -7770,7 +7677,7 @@
               <a:buNone/>
             </a:pPr>
             <a:r>
-              <a:rPr lang="en-US" altLang="zh-TW" sz="2000" dirty="0" smtClean="0">
+              <a:rPr lang="en-US" altLang="zh-TW" sz="2000" dirty="0">
                 <a:solidFill>
                   <a:schemeClr val="tx1"/>
                 </a:solidFill>
@@ -7778,7 +7685,7 @@
               <a:t>(5)</a:t>
             </a:r>
             <a:r>
-              <a:rPr lang="zh-TW" altLang="en-US" sz="2000" dirty="0" smtClean="0">
+              <a:rPr lang="zh-TW" altLang="en-US" sz="2000" dirty="0">
                 <a:solidFill>
                   <a:schemeClr val="tx1"/>
                 </a:solidFill>
@@ -7786,7 +7693,7 @@
               <a:t> </a:t>
             </a:r>
             <a:r>
-              <a:rPr lang="en-US" altLang="zh-TW" sz="2000" dirty="0" err="1" smtClean="0">
+              <a:rPr lang="en-US" altLang="zh-TW" sz="2000" dirty="0" err="1">
                 <a:solidFill>
                   <a:schemeClr val="tx1"/>
                 </a:solidFill>
@@ -7794,7 +7701,7 @@
               <a:t>PPx</a:t>
             </a:r>
             <a:r>
-              <a:rPr lang="en-US" altLang="zh-TW" sz="2000" dirty="0" smtClean="0">
+              <a:rPr lang="en-US" altLang="zh-TW" sz="2000" dirty="0">
                 <a:solidFill>
                   <a:schemeClr val="tx1"/>
                 </a:solidFill>
@@ -7802,7 +7709,7 @@
               <a:t>/</a:t>
             </a:r>
             <a:r>
-              <a:rPr lang="en-US" altLang="zh-TW" sz="2000" dirty="0" err="1" smtClean="0">
+              <a:rPr lang="en-US" altLang="zh-TW" sz="2000" dirty="0" err="1">
                 <a:solidFill>
                   <a:schemeClr val="tx1"/>
                 </a:solidFill>
@@ -7810,7 +7717,7 @@
               <a:t>PPy</a:t>
             </a:r>
             <a:r>
-              <a:rPr lang="en-US" altLang="zh-TW" sz="2000" dirty="0" smtClean="0">
+              <a:rPr lang="en-US" altLang="zh-TW" sz="2000" dirty="0">
                 <a:solidFill>
                   <a:schemeClr val="tx1"/>
                 </a:solidFill>
@@ -7818,31 +7725,15 @@
               <a:t>:</a:t>
             </a:r>
             <a:r>
-              <a:rPr lang="zh-TW" altLang="en-US" sz="2000" dirty="0" smtClean="0">
-                <a:solidFill>
-                  <a:schemeClr val="tx1"/>
-                </a:solidFill>
-              </a:rPr>
-              <a:t>相機</a:t>
-            </a:r>
-            <a:r>
               <a:rPr lang="zh-TW" altLang="en-US" sz="2000" dirty="0">
                 <a:solidFill>
                   <a:schemeClr val="tx1"/>
                 </a:solidFill>
               </a:rPr>
-              <a:t>鏡頭在影像裡的中心</a:t>
-            </a:r>
-            <a:r>
-              <a:rPr lang="zh-TW" altLang="en-US" sz="2000" dirty="0" smtClean="0">
-                <a:solidFill>
-                  <a:schemeClr val="tx1"/>
-                </a:solidFill>
-              </a:rPr>
-              <a:t>位置</a:t>
-            </a:r>
-            <a:r>
-              <a:rPr lang="en-US" altLang="zh-TW" sz="2000" dirty="0" smtClean="0">
+              <a:t>相機鏡頭在影像裡的中心位置</a:t>
+            </a:r>
+            <a:r>
+              <a:rPr lang="en-US" altLang="zh-TW" sz="2000" dirty="0">
                 <a:solidFill>
                   <a:schemeClr val="tx1"/>
                 </a:solidFill>
@@ -7850,7 +7741,7 @@
               <a:t>(</a:t>
             </a:r>
             <a:r>
-              <a:rPr lang="zh-TW" altLang="en-US" sz="2000" dirty="0" smtClean="0">
+              <a:rPr lang="zh-TW" altLang="en-US" sz="2000" dirty="0">
                 <a:solidFill>
                   <a:schemeClr val="tx1"/>
                 </a:solidFill>
@@ -7858,7 +7749,7 @@
               <a:t>單位</a:t>
             </a:r>
             <a:r>
-              <a:rPr lang="en-US" altLang="zh-TW" sz="2000" dirty="0" smtClean="0">
+              <a:rPr lang="en-US" altLang="zh-TW" sz="2000" dirty="0">
                 <a:solidFill>
                   <a:schemeClr val="tx1"/>
                 </a:solidFill>
@@ -7866,7 +7757,7 @@
               <a:t>:</a:t>
             </a:r>
             <a:r>
-              <a:rPr lang="zh-TW" altLang="en-US" sz="2000" dirty="0" smtClean="0">
+              <a:rPr lang="zh-TW" altLang="en-US" sz="2000" dirty="0">
                 <a:solidFill>
                   <a:schemeClr val="tx1"/>
                 </a:solidFill>
@@ -7874,18 +7765,13 @@
               <a:t>像素</a:t>
             </a:r>
             <a:r>
-              <a:rPr lang="en-US" altLang="zh-TW" sz="2000" dirty="0" smtClean="0">
+              <a:rPr lang="en-US" altLang="zh-TW" sz="2000" dirty="0">
                 <a:solidFill>
                   <a:schemeClr val="tx1"/>
                 </a:solidFill>
               </a:rPr>
               <a:t>)</a:t>
             </a:r>
-            <a:endParaRPr lang="en-US" altLang="zh-TW" sz="2000" dirty="0">
-              <a:solidFill>
-                <a:schemeClr val="tx1"/>
-              </a:solidFill>
-            </a:endParaRPr>
           </a:p>
           <a:p>
             <a:pPr marL="0" lvl="0" indent="0">
@@ -7897,7 +7783,7 @@
               <a:buNone/>
             </a:pPr>
             <a:r>
-              <a:rPr lang="en-US" altLang="zh-TW" sz="2000" dirty="0" smtClean="0">
+              <a:rPr lang="en-US" altLang="zh-TW" sz="2000" dirty="0">
                 <a:solidFill>
                   <a:schemeClr val="tx1"/>
                 </a:solidFill>
@@ -7931,31 +7817,15 @@
               <a:buNone/>
             </a:pPr>
             <a:r>
-              <a:rPr lang="zh-TW" altLang="en-US" sz="2000" dirty="0" smtClean="0">
-                <a:solidFill>
-                  <a:schemeClr val="tx1"/>
-                </a:solidFill>
-              </a:rPr>
-              <a:t>●</a:t>
-            </a:r>
-            <a:r>
               <a:rPr lang="zh-TW" altLang="en-US" sz="2000" dirty="0">
                 <a:solidFill>
                   <a:schemeClr val="tx1"/>
                 </a:solidFill>
               </a:rPr>
-              <a:t>參數</a:t>
-            </a:r>
-            <a:r>
-              <a:rPr lang="zh-TW" altLang="en-US" sz="2000" dirty="0" smtClean="0">
-                <a:solidFill>
-                  <a:schemeClr val="tx1"/>
-                </a:solidFill>
-              </a:rPr>
-              <a:t>用途</a:t>
-            </a:r>
-            <a:r>
-              <a:rPr lang="en-US" altLang="zh-TW" sz="2000" dirty="0" smtClean="0">
+              <a:t>●參數用途</a:t>
+            </a:r>
+            <a:r>
+              <a:rPr lang="en-US" altLang="zh-TW" sz="2000" dirty="0">
                 <a:solidFill>
                   <a:schemeClr val="tx1"/>
                 </a:solidFill>
@@ -7963,7 +7833,7 @@
               <a:t>:</a:t>
             </a:r>
             <a:r>
-              <a:rPr lang="zh-TW" altLang="en-US" sz="2000" dirty="0" smtClean="0">
+              <a:rPr lang="zh-TW" altLang="en-US" sz="2000" dirty="0">
                 <a:solidFill>
                   <a:schemeClr val="tx1"/>
                 </a:solidFill>
@@ -7971,7 +7841,7 @@
               <a:t>深度圖</a:t>
             </a:r>
             <a:r>
-              <a:rPr lang="en-US" altLang="zh-TW" sz="2000" dirty="0" smtClean="0">
+              <a:rPr lang="en-US" altLang="zh-TW" sz="2000" dirty="0">
                 <a:solidFill>
                   <a:schemeClr val="tx1"/>
                 </a:solidFill>
@@ -7979,23 +7849,15 @@
               <a:t>(depth image)</a:t>
             </a:r>
             <a:r>
-              <a:rPr lang="zh-TW" altLang="en-US" sz="2000" dirty="0" smtClean="0">
-                <a:solidFill>
-                  <a:schemeClr val="tx1"/>
-                </a:solidFill>
-              </a:rPr>
-              <a:t> </a:t>
-            </a:r>
-            <a:r>
               <a:rPr lang="zh-TW" altLang="en-US" sz="2000" dirty="0">
                 <a:solidFill>
                   <a:schemeClr val="tx1"/>
                 </a:solidFill>
               </a:rPr>
-              <a:t>→ </a:t>
-            </a:r>
-            <a:r>
-              <a:rPr lang="en-US" altLang="zh-TW" sz="2000" dirty="0" smtClean="0">
+              <a:t> → </a:t>
+            </a:r>
+            <a:r>
+              <a:rPr lang="en-US" altLang="zh-TW" sz="2000" dirty="0">
                 <a:solidFill>
                   <a:schemeClr val="tx1"/>
                 </a:solidFill>
@@ -8003,7 +7865,7 @@
               <a:t>3D</a:t>
             </a:r>
             <a:r>
-              <a:rPr lang="zh-TW" altLang="en-US" sz="2000" dirty="0" smtClean="0">
+              <a:rPr lang="zh-TW" altLang="en-US" sz="2000" dirty="0">
                 <a:solidFill>
                   <a:schemeClr val="tx1"/>
                 </a:solidFill>
@@ -8011,7 +7873,7 @@
               <a:t>點雲圖</a:t>
             </a:r>
             <a:r>
-              <a:rPr lang="en-US" altLang="zh-TW" sz="2000" dirty="0" smtClean="0">
+              <a:rPr lang="en-US" altLang="zh-TW" sz="2000" dirty="0">
                 <a:solidFill>
                   <a:schemeClr val="tx1"/>
                 </a:solidFill>
@@ -8019,7 +7881,7 @@
               <a:t>(point cloud)</a:t>
             </a:r>
             <a:r>
-              <a:rPr lang="zh-TW" altLang="en-US" sz="2000" dirty="0" smtClean="0">
+              <a:rPr lang="zh-TW" altLang="en-US" sz="2000" dirty="0">
                 <a:solidFill>
                   <a:schemeClr val="tx1"/>
                 </a:solidFill>
@@ -8038,7 +7900,7 @@
               <a:buNone/>
             </a:pPr>
             <a:r>
-              <a:rPr lang="en-US" altLang="zh-TW" sz="2000" dirty="0" smtClean="0">
+              <a:rPr lang="en-US" altLang="zh-TW" sz="2000" dirty="0">
                 <a:solidFill>
                   <a:schemeClr val="tx1"/>
                 </a:solidFill>
@@ -8046,28 +7908,12 @@
               <a:t>(1)</a:t>
             </a:r>
             <a:r>
-              <a:rPr lang="zh-TW" altLang="en-US" sz="2000" dirty="0" smtClean="0">
-                <a:solidFill>
-                  <a:schemeClr val="tx1"/>
-                </a:solidFill>
-              </a:rPr>
-              <a:t>以</a:t>
-            </a:r>
-            <a:r>
               <a:rPr lang="zh-TW" altLang="en-US" sz="2000" dirty="0">
                 <a:solidFill>
                   <a:schemeClr val="tx1"/>
                 </a:solidFill>
               </a:rPr>
-              <a:t>光達所在位置為</a:t>
-            </a:r>
-            <a:r>
-              <a:rPr lang="zh-TW" altLang="en-US" sz="2000" dirty="0" smtClean="0">
-                <a:solidFill>
-                  <a:schemeClr val="tx1"/>
-                </a:solidFill>
-              </a:rPr>
-              <a:t>原點，座標</a:t>
+              <a:t>以光達所在位置為原點，座標</a:t>
             </a:r>
             <a:r>
               <a:rPr lang="en-US" altLang="zh-TW" sz="2000" dirty="0">
@@ -8086,7 +7932,7 @@
               <a:t>u,v</a:t>
             </a:r>
             <a:r>
-              <a:rPr lang="en-US" altLang="zh-TW" sz="2000" dirty="0" smtClean="0">
+              <a:rPr lang="en-US" altLang="zh-TW" sz="2000" dirty="0">
                 <a:solidFill>
                   <a:schemeClr val="tx1"/>
                 </a:solidFill>
@@ -8094,7 +7940,7 @@
               <a:t>)</a:t>
             </a:r>
             <a:r>
-              <a:rPr lang="zh-TW" altLang="en-US" sz="2000" dirty="0" smtClean="0">
+              <a:rPr lang="zh-TW" altLang="en-US" sz="2000" dirty="0">
                 <a:solidFill>
                   <a:schemeClr val="tx1"/>
                 </a:solidFill>
@@ -8102,7 +7948,7 @@
               <a:t>，深度</a:t>
             </a:r>
             <a:r>
-              <a:rPr lang="en-US" altLang="zh-TW" sz="2000" dirty="0" smtClean="0">
+              <a:rPr lang="en-US" altLang="zh-TW" sz="2000" dirty="0">
                 <a:solidFill>
                   <a:schemeClr val="tx1"/>
                 </a:solidFill>
@@ -8110,20 +7956,12 @@
               <a:t>Z</a:t>
             </a:r>
             <a:r>
-              <a:rPr lang="zh-TW" altLang="en-US" sz="2000" dirty="0" smtClean="0">
-                <a:solidFill>
-                  <a:schemeClr val="tx1"/>
-                </a:solidFill>
-              </a:rPr>
-              <a:t>，轉換</a:t>
-            </a:r>
-            <a:r>
               <a:rPr lang="zh-TW" altLang="en-US" sz="2000" dirty="0">
                 <a:solidFill>
                   <a:schemeClr val="tx1"/>
                 </a:solidFill>
               </a:rPr>
-              <a:t>成在空間中座標</a:t>
+              <a:t>，轉換成在空間中座標</a:t>
             </a:r>
             <a:r>
               <a:rPr lang="en-US" altLang="zh-TW" sz="2000" dirty="0">
@@ -8139,20 +7977,12 @@
               <a:buNone/>
             </a:pPr>
             <a:r>
-              <a:rPr lang="en-US" altLang="zh-TW" sz="2000" dirty="0" smtClean="0">
-                <a:solidFill>
-                  <a:schemeClr val="tx1"/>
-                </a:solidFill>
-              </a:rPr>
-              <a:t>(2) X</a:t>
-            </a:r>
-            <a:r>
               <a:rPr lang="en-US" altLang="zh-TW" sz="2000" dirty="0">
                 <a:solidFill>
                   <a:schemeClr val="tx1"/>
                 </a:solidFill>
               </a:rPr>
-              <a:t>=(u-</a:t>
+              <a:t>(2) X=(u-</a:t>
             </a:r>
             <a:r>
               <a:rPr lang="en-US" altLang="zh-TW" sz="2000" dirty="0" err="1">
@@ -8168,18 +7998,10 @@
                   <a:schemeClr val="tx1"/>
                 </a:solidFill>
               </a:rPr>
-              <a:t>)*</a:t>
-            </a:r>
-            <a:r>
-              <a:rPr lang="en-US" altLang="zh-TW" sz="2000" dirty="0" smtClean="0">
-                <a:solidFill>
-                  <a:schemeClr val="tx1"/>
-                </a:solidFill>
-              </a:rPr>
-              <a:t>Z/</a:t>
-            </a:r>
-            <a:r>
-              <a:rPr lang="en-US" altLang="zh-TW" sz="2000" dirty="0" err="1" smtClean="0">
+              <a:t>)*Z/</a:t>
+            </a:r>
+            <a:r>
+              <a:rPr lang="en-US" altLang="zh-TW" sz="2000" dirty="0" err="1">
                 <a:solidFill>
                   <a:schemeClr val="tx1"/>
                 </a:solidFill>
@@ -8187,20 +8009,12 @@
               <a:t>Fx</a:t>
             </a:r>
             <a:r>
-              <a:rPr lang="en-US" altLang="zh-TW" sz="2000" dirty="0" smtClean="0">
-                <a:solidFill>
-                  <a:schemeClr val="tx1"/>
-                </a:solidFill>
-              </a:rPr>
-              <a:t>, Y</a:t>
-            </a:r>
-            <a:r>
               <a:rPr lang="en-US" altLang="zh-TW" sz="2000" dirty="0">
                 <a:solidFill>
                   <a:schemeClr val="tx1"/>
                 </a:solidFill>
               </a:rPr>
-              <a:t>=(v-</a:t>
+              <a:t>, Y=(v-</a:t>
             </a:r>
             <a:r>
               <a:rPr lang="en-US" altLang="zh-TW" sz="2000" dirty="0" err="1">
@@ -8268,13 +8082,6 @@
   <p:clrMapOvr>
     <a:masterClrMapping/>
   </p:clrMapOvr>
-  <p:timing>
-    <p:tnLst>
-      <p:par>
-        <p:cTn id="1" dur="indefinite" restart="never" nodeType="tmRoot"/>
-      </p:par>
-    </p:tnLst>
-  </p:timing>
 </p:sld>
 </file>
 
@@ -8314,11 +8121,7 @@
           <a:p>
             <a:r>
               <a:rPr lang="en-US" altLang="zh-TW" sz="4400" b="1" dirty="0"/>
-              <a:t>Part 3</a:t>
-            </a:r>
-            <a:r>
-              <a:rPr lang="en-US" altLang="zh-TW" sz="4400" b="1" dirty="0" smtClean="0"/>
-              <a:t>:</a:t>
+              <a:t>Part 3:</a:t>
             </a:r>
             <a:r>
               <a:rPr lang="zh-TW" altLang="en-US" sz="4400" b="1" dirty="0"/>
@@ -8337,13 +8140,6 @@
   <p:clrMapOvr>
     <a:masterClrMapping/>
   </p:clrMapOvr>
-  <p:timing>
-    <p:tnLst>
-      <p:par>
-        <p:cTn id="1" dur="indefinite" restart="never" nodeType="tmRoot"/>
-      </p:par>
-    </p:tnLst>
-  </p:timing>
 </p:sld>
 </file>
 
@@ -8456,7 +8252,7 @@
               <a:buNone/>
             </a:pPr>
             <a:r>
-              <a:rPr lang="zh-TW" altLang="en-US" sz="2000" dirty="0" smtClean="0">
+              <a:rPr lang="zh-TW" altLang="en-US" sz="2000" dirty="0">
                 <a:solidFill>
                   <a:schemeClr val="tx1"/>
                 </a:solidFill>
@@ -8465,31 +8261,15 @@
               <a:t>●</a:t>
             </a:r>
             <a:r>
-              <a:rPr lang="zh-TW" altLang="en-US" sz="2000" dirty="0" smtClean="0">
-                <a:solidFill>
-                  <a:schemeClr val="tx1"/>
-                </a:solidFill>
-              </a:rPr>
-              <a:t>深度圖</a:t>
-            </a:r>
-            <a:r>
               <a:rPr lang="zh-TW" altLang="en-US" sz="2000" dirty="0">
                 <a:solidFill>
                   <a:schemeClr val="tx1"/>
                 </a:solidFill>
               </a:rPr>
-              <a:t> </a:t>
-            </a:r>
-            <a:r>
-              <a:rPr lang="zh-TW" altLang="en-US" sz="2000" dirty="0" smtClean="0">
-                <a:solidFill>
-                  <a:schemeClr val="tx1"/>
-                </a:solidFill>
-              </a:rPr>
-              <a:t>                                                  </a:t>
-            </a:r>
-            <a:r>
-              <a:rPr lang="zh-TW" altLang="en-US" sz="2000" dirty="0" smtClean="0">
+              <a:t>深度圖                                                   </a:t>
+            </a:r>
+            <a:r>
+              <a:rPr lang="zh-TW" altLang="en-US" sz="2000" dirty="0">
                 <a:solidFill>
                   <a:schemeClr val="tx1"/>
                 </a:solidFill>
@@ -8498,7 +8278,7 @@
               <a:t>●</a:t>
             </a:r>
             <a:r>
-              <a:rPr lang="zh-TW" altLang="en-US" sz="2000" dirty="0" smtClean="0">
+              <a:rPr lang="zh-TW" altLang="en-US" sz="2000" dirty="0">
                 <a:solidFill>
                   <a:schemeClr val="tx1"/>
                 </a:solidFill>
@@ -8506,7 +8286,7 @@
               <a:t>邊緣圖</a:t>
             </a:r>
             <a:r>
-              <a:rPr lang="en-US" altLang="zh-TW" sz="2000" dirty="0" smtClean="0">
+              <a:rPr lang="en-US" altLang="zh-TW" sz="2000" dirty="0">
                 <a:solidFill>
                   <a:schemeClr val="tx1"/>
                 </a:solidFill>
@@ -8514,31 +8294,15 @@
               <a:t>(</a:t>
             </a:r>
             <a:r>
-              <a:rPr lang="zh-TW" altLang="en-US" sz="2000" dirty="0" smtClean="0">
-                <a:solidFill>
-                  <a:schemeClr val="tx1"/>
-                </a:solidFill>
-              </a:rPr>
-              <a:t>白色</a:t>
-            </a:r>
-            <a:r>
               <a:rPr lang="zh-TW" altLang="en-US" sz="2000" dirty="0">
                 <a:solidFill>
                   <a:schemeClr val="tx1"/>
                 </a:solidFill>
               </a:rPr>
-              <a:t>代表有</a:t>
-            </a:r>
-            <a:r>
-              <a:rPr lang="zh-TW" altLang="en-US" sz="2000" dirty="0" smtClean="0">
-                <a:solidFill>
-                  <a:schemeClr val="tx1"/>
-                </a:solidFill>
-              </a:rPr>
-              <a:t>起伏</a:t>
-            </a:r>
-            <a:r>
-              <a:rPr lang="en-US" altLang="zh-TW" sz="2000" dirty="0" smtClean="0">
+              <a:t>白色代表有起伏</a:t>
+            </a:r>
+            <a:r>
+              <a:rPr lang="en-US" altLang="zh-TW" sz="2000" dirty="0">
                 <a:solidFill>
                   <a:schemeClr val="tx1"/>
                 </a:solidFill>
@@ -8623,21 +8387,8 @@
                   <a:schemeClr val="bg1"/>
                 </a:solidFill>
               </a:rPr>
-              <a:t>床</a:t>
-            </a:r>
-            <a:r>
-              <a:rPr lang="zh-TW" altLang="en-US" dirty="0" smtClean="0">
-                <a:solidFill>
-                  <a:schemeClr val="bg1"/>
-                </a:solidFill>
-              </a:rPr>
-              <a:t>角與邊緣</a:t>
-            </a:r>
-            <a:endParaRPr lang="zh-TW" altLang="en-US" dirty="0">
-              <a:solidFill>
-                <a:schemeClr val="bg1"/>
-              </a:solidFill>
-            </a:endParaRPr>
+              <a:t>床角與邊緣</a:t>
+            </a:r>
           </a:p>
         </p:txBody>
       </p:sp>
@@ -8720,13 +8471,6 @@
   <p:clrMapOvr>
     <a:masterClrMapping/>
   </p:clrMapOvr>
-  <p:timing>
-    <p:tnLst>
-      <p:par>
-        <p:cTn id="1" dur="indefinite" restart="never" nodeType="tmRoot"/>
-      </p:par>
-    </p:tnLst>
-  </p:timing>
 </p:sld>
 </file>
 
@@ -8776,18 +8520,9 @@
           <a:lstStyle/>
           <a:p>
             <a:r>
-              <a:rPr lang="zh-TW" altLang="en-US" sz="4000" dirty="0" smtClean="0"/>
-              <a:t>參考</a:t>
-            </a:r>
-            <a:r>
               <a:rPr lang="zh-TW" altLang="en-US" sz="4000" dirty="0"/>
-              <a:t>做</a:t>
-            </a:r>
-            <a:r>
-              <a:rPr lang="zh-TW" altLang="en-US" sz="4000" dirty="0" smtClean="0"/>
-              <a:t>法</a:t>
-            </a:r>
-            <a:endParaRPr lang="zh-TW" altLang="en-US" sz="4000" dirty="0"/>
+              <a:t>參考做法</a:t>
+            </a:r>
           </a:p>
         </p:txBody>
       </p:sp>
@@ -8821,7 +8556,7 @@
               <a:buNone/>
             </a:pPr>
             <a:r>
-              <a:rPr lang="zh-TW" altLang="en-US" sz="2000" dirty="0" smtClean="0">
+              <a:rPr lang="zh-TW" altLang="en-US" sz="2000" dirty="0">
                 <a:solidFill>
                   <a:schemeClr val="tx1"/>
                 </a:solidFill>
@@ -8830,7 +8565,7 @@
               <a:t>●</a:t>
             </a:r>
             <a:r>
-              <a:rPr lang="en-US" altLang="zh-TW" sz="2000" dirty="0" smtClean="0">
+              <a:rPr lang="en-US" altLang="zh-TW" sz="2000" dirty="0">
                 <a:solidFill>
                   <a:schemeClr val="tx1"/>
                 </a:solidFill>
@@ -8843,18 +8578,10 @@
                   <a:schemeClr val="tx1"/>
                 </a:solidFill>
               </a:rPr>
-              <a:t>利</a:t>
-            </a:r>
-            <a:r>
-              <a:rPr lang="zh-TW" altLang="en-US" sz="2000" dirty="0" smtClean="0">
-                <a:solidFill>
-                  <a:schemeClr val="tx1"/>
-                </a:solidFill>
-              </a:rPr>
-              <a:t>用</a:t>
-            </a:r>
-            <a:r>
-              <a:rPr lang="en-US" altLang="zh-TW" sz="2000" dirty="0" smtClean="0">
+              <a:t>利用</a:t>
+            </a:r>
+            <a:r>
+              <a:rPr lang="en-US" altLang="zh-TW" sz="2000" dirty="0">
                 <a:solidFill>
                   <a:schemeClr val="tx1"/>
                 </a:solidFill>
@@ -8862,20 +8589,12 @@
               <a:t>Kernel</a:t>
             </a:r>
             <a:r>
-              <a:rPr lang="zh-TW" altLang="en-US" sz="2000" dirty="0" smtClean="0">
-                <a:solidFill>
-                  <a:schemeClr val="tx1"/>
-                </a:solidFill>
-              </a:rPr>
-              <a:t>對</a:t>
-            </a:r>
-            <a:r>
               <a:rPr lang="zh-TW" altLang="en-US" sz="2000" dirty="0">
                 <a:solidFill>
                   <a:schemeClr val="tx1"/>
                 </a:solidFill>
               </a:rPr>
-              <a:t>深度圖做捲積檢測平面</a:t>
+              <a:t>對深度圖做捲積檢測平面</a:t>
             </a:r>
             <a:endParaRPr lang="en-US" altLang="zh-TW" sz="2000" dirty="0">
               <a:solidFill>
@@ -8902,7 +8621,7 @@
               <a:buNone/>
             </a:pPr>
             <a:r>
-              <a:rPr lang="zh-TW" altLang="en-US" sz="2000" dirty="0" smtClean="0">
+              <a:rPr lang="zh-TW" altLang="en-US" sz="2000" dirty="0">
                 <a:solidFill>
                   <a:schemeClr val="tx1"/>
                 </a:solidFill>
@@ -8911,7 +8630,7 @@
               <a:t>●</a:t>
             </a:r>
             <a:r>
-              <a:rPr lang="en-US" altLang="zh-TW" sz="2000" dirty="0" smtClean="0">
+              <a:rPr lang="en-US" altLang="zh-TW" sz="2000" dirty="0">
                 <a:solidFill>
                   <a:schemeClr val="tx1"/>
                 </a:solidFill>
@@ -8927,7 +8646,7 @@
               <a:t>利用水平與垂直方向梯度 </a:t>
             </a:r>
             <a:r>
-              <a:rPr lang="en-US" altLang="zh-TW" sz="2000" dirty="0" err="1" smtClean="0">
+              <a:rPr lang="en-US" altLang="zh-TW" sz="2000" dirty="0" err="1">
                 <a:solidFill>
                   <a:schemeClr val="tx1"/>
                 </a:solidFill>
@@ -8935,20 +8654,12 @@
               <a:t>Gx,Gy</a:t>
             </a:r>
             <a:r>
-              <a:rPr lang="zh-TW" altLang="en-US" sz="2000" dirty="0" smtClean="0">
-                <a:solidFill>
-                  <a:schemeClr val="tx1"/>
-                </a:solidFill>
-              </a:rPr>
-              <a:t>，取得</a:t>
-            </a:r>
-            <a:r>
               <a:rPr lang="zh-TW" altLang="en-US" sz="2000" dirty="0">
                 <a:solidFill>
                   <a:schemeClr val="tx1"/>
                 </a:solidFill>
               </a:rPr>
-              <a:t>邊緣方向與強度</a:t>
+              <a:t>，取得邊緣方向與強度</a:t>
             </a:r>
             <a:endParaRPr lang="en-US" altLang="zh-TW" sz="2000" dirty="0">
               <a:solidFill>
@@ -8965,16 +8676,6 @@
           </a:p>
           <a:p>
             <a:endParaRPr lang="en-US" altLang="zh-TW" sz="2000" dirty="0">
-              <a:solidFill>
-                <a:schemeClr val="tx1"/>
-              </a:solidFill>
-            </a:endParaRPr>
-          </a:p>
-          <a:p>
-            <a:pPr marL="0" indent="0">
-              <a:buNone/>
-            </a:pPr>
-            <a:endParaRPr lang="en-US" altLang="zh-TW" sz="2000" dirty="0" smtClean="0">
               <a:solidFill>
                 <a:schemeClr val="tx1"/>
               </a:solidFill>
@@ -8994,8 +8695,18 @@
             <a:pPr marL="0" indent="0">
               <a:buNone/>
             </a:pPr>
-            <a:r>
-              <a:rPr lang="zh-TW" altLang="en-US" sz="2000" dirty="0" smtClean="0">
+            <a:endParaRPr lang="en-US" altLang="zh-TW" sz="2000" dirty="0">
+              <a:solidFill>
+                <a:schemeClr val="tx1"/>
+              </a:solidFill>
+            </a:endParaRPr>
+          </a:p>
+          <a:p>
+            <a:pPr marL="0" indent="0">
+              <a:buNone/>
+            </a:pPr>
+            <a:r>
+              <a:rPr lang="zh-TW" altLang="en-US" sz="2000" dirty="0">
                 <a:solidFill>
                   <a:schemeClr val="tx1"/>
                 </a:solidFill>
@@ -9004,7 +8715,7 @@
               <a:t>●</a:t>
             </a:r>
             <a:r>
-              <a:rPr lang="zh-TW" altLang="en-US" sz="2000" dirty="0" smtClean="0">
+              <a:rPr lang="zh-TW" altLang="en-US" sz="2000" dirty="0">
                 <a:solidFill>
                   <a:schemeClr val="tx1"/>
                 </a:solidFill>
@@ -9146,13 +8857,6 @@
   <p:clrMapOvr>
     <a:masterClrMapping/>
   </p:clrMapOvr>
-  <p:timing>
-    <p:tnLst>
-      <p:par>
-        <p:cTn id="1" dur="indefinite" restart="never" nodeType="tmRoot"/>
-      </p:par>
-    </p:tnLst>
-  </p:timing>
 </p:sld>
 </file>
 
@@ -9192,17 +8896,12 @@
           <a:p>
             <a:r>
               <a:rPr lang="en-US" altLang="zh-TW" sz="4400" b="1" dirty="0"/>
-              <a:t>Part </a:t>
-            </a:r>
-            <a:r>
-              <a:rPr lang="en-US" altLang="zh-TW" sz="4400" b="1" dirty="0" smtClean="0"/>
-              <a:t>4:</a:t>
-            </a:r>
-            <a:r>
-              <a:rPr lang="zh-TW" altLang="en-US" sz="4400" b="1" dirty="0" smtClean="0"/>
+              <a:t>Part 4:</a:t>
+            </a:r>
+            <a:r>
+              <a:rPr lang="zh-TW" altLang="en-US" sz="4400" b="1" dirty="0"/>
               <a:t>圖片合併</a:t>
             </a:r>
-            <a:endParaRPr lang="zh-TW" altLang="en-US" sz="4400" b="1" dirty="0"/>
           </a:p>
         </p:txBody>
       </p:sp>
@@ -9216,13 +8915,6 @@
   <p:clrMapOvr>
     <a:masterClrMapping/>
   </p:clrMapOvr>
-  <p:timing>
-    <p:tnLst>
-      <p:par>
-        <p:cTn id="1" dur="indefinite" restart="never" nodeType="tmRoot"/>
-      </p:par>
-    </p:tnLst>
-  </p:timing>
 </p:sld>
 </file>
 
@@ -9308,53 +9000,53 @@
               <a:buNone/>
             </a:pPr>
             <a:r>
-              <a:rPr lang="zh-TW" altLang="en-US" sz="2000" dirty="0" smtClean="0">
+              <a:rPr lang="zh-TW" altLang="en-US" sz="2000" dirty="0">
                 <a:latin typeface="Century Gothic" panose="020B0502020202020204" pitchFamily="34" charset="0"/>
               </a:rPr>
               <a:t>●</a:t>
             </a:r>
             <a:r>
-              <a:rPr lang="zh-TW" altLang="en-US" sz="2000" dirty="0" smtClean="0"/>
+              <a:rPr lang="zh-TW" altLang="en-US" sz="2000" dirty="0"/>
               <a:t>圖</a:t>
             </a:r>
             <a:r>
-              <a:rPr lang="en-US" altLang="zh-TW" sz="2000" dirty="0" smtClean="0"/>
+              <a:rPr lang="en-US" altLang="zh-TW" sz="2000" dirty="0"/>
               <a:t>1</a:t>
             </a:r>
             <a:r>
-              <a:rPr lang="zh-TW" altLang="en-US" sz="2000" dirty="0" smtClean="0"/>
+              <a:rPr lang="zh-TW" altLang="en-US" sz="2000" dirty="0"/>
               <a:t>                                </a:t>
             </a:r>
             <a:r>
-              <a:rPr lang="zh-TW" altLang="en-US" sz="2000" dirty="0" smtClean="0">
+              <a:rPr lang="zh-TW" altLang="en-US" sz="2000" dirty="0">
                 <a:latin typeface="Century Gothic" panose="020B0502020202020204" pitchFamily="34" charset="0"/>
               </a:rPr>
               <a:t>●</a:t>
             </a:r>
             <a:r>
-              <a:rPr lang="zh-TW" altLang="en-US" sz="2000" dirty="0" smtClean="0"/>
+              <a:rPr lang="zh-TW" altLang="en-US" sz="2000" dirty="0"/>
               <a:t>圖</a:t>
             </a:r>
             <a:r>
-              <a:rPr lang="en-US" altLang="zh-TW" sz="2000" dirty="0" smtClean="0"/>
+              <a:rPr lang="en-US" altLang="zh-TW" sz="2000" dirty="0"/>
               <a:t>2</a:t>
             </a:r>
             <a:r>
-              <a:rPr lang="zh-TW" altLang="en-US" sz="2000" dirty="0" smtClean="0"/>
+              <a:rPr lang="zh-TW" altLang="en-US" sz="2000" dirty="0"/>
               <a:t>                                   </a:t>
             </a:r>
             <a:r>
-              <a:rPr lang="zh-TW" altLang="en-US" sz="2000" dirty="0" smtClean="0">
+              <a:rPr lang="zh-TW" altLang="en-US" sz="2000" dirty="0">
                 <a:latin typeface="Century Gothic" panose="020B0502020202020204" pitchFamily="34" charset="0"/>
               </a:rPr>
               <a:t>●</a:t>
             </a:r>
             <a:r>
-              <a:rPr lang="zh-TW" altLang="en-US" sz="2000" dirty="0" smtClean="0"/>
+              <a:rPr lang="zh-TW" altLang="en-US" sz="2000" dirty="0"/>
               <a:t>圖</a:t>
             </a:r>
             <a:r>
-              <a:rPr lang="en-US" altLang="zh-TW" sz="2000" dirty="0" smtClean="0"/>
+              <a:rPr lang="en-US" altLang="zh-TW" sz="2000" dirty="0"/>
               <a:t>3</a:t>
             </a:r>
           </a:p>
@@ -9368,7 +9060,7 @@
             <a:pPr marL="0" indent="0">
               <a:buNone/>
             </a:pPr>
-            <a:endParaRPr lang="en-US" altLang="zh-TW" dirty="0" smtClean="0"/>
+            <a:endParaRPr lang="en-US" altLang="zh-TW" dirty="0"/>
           </a:p>
           <a:p>
             <a:pPr marL="0" indent="0">
@@ -9380,7 +9072,7 @@
             <a:pPr marL="0" indent="0">
               <a:buNone/>
             </a:pPr>
-            <a:endParaRPr lang="en-US" altLang="zh-TW" dirty="0" smtClean="0"/>
+            <a:endParaRPr lang="en-US" altLang="zh-TW" dirty="0"/>
           </a:p>
           <a:p>
             <a:pPr marL="0" indent="0">
@@ -9399,25 +9091,7 @@
               <a:t>●</a:t>
             </a:r>
             <a:r>
-              <a:rPr lang="zh-TW" altLang="en-US" dirty="0" smtClean="0"/>
-              <a:t>合併圖</a:t>
-            </a:r>
-            <a:r>
-              <a:rPr lang="en-US" altLang="zh-TW" dirty="0" smtClean="0"/>
-              <a:t>1+2+3</a:t>
-            </a:r>
-            <a:r>
-              <a:rPr lang="zh-TW" altLang="en-US" dirty="0" smtClean="0"/>
-              <a:t>                       </a:t>
-            </a:r>
-            <a:r>
-              <a:rPr lang="zh-TW" altLang="en-US" dirty="0" smtClean="0">
-                <a:latin typeface="Century Gothic" panose="020B0502020202020204" pitchFamily="34" charset="0"/>
-              </a:rPr>
-              <a:t>●</a:t>
-            </a:r>
-            <a:r>
-              <a:rPr lang="zh-TW" altLang="en-US" dirty="0" smtClean="0"/>
+              <a:rPr lang="zh-TW" altLang="en-US" dirty="0"/>
               <a:t>合併圖</a:t>
             </a:r>
             <a:r>
@@ -9426,11 +9100,7 @@
             </a:r>
             <a:r>
               <a:rPr lang="zh-TW" altLang="en-US" dirty="0"/>
-              <a:t> 轉換</a:t>
-            </a:r>
-            <a:r>
-              <a:rPr lang="zh-TW" altLang="en-US" dirty="0" smtClean="0"/>
-              <a:t>視角           </a:t>
+              <a:t>                       </a:t>
             </a:r>
             <a:r>
               <a:rPr lang="zh-TW" altLang="en-US" dirty="0">
@@ -9439,10 +9109,27 @@
               <a:t>●</a:t>
             </a:r>
             <a:r>
-              <a:rPr lang="zh-TW" altLang="en-US" dirty="0" smtClean="0"/>
+              <a:rPr lang="zh-TW" altLang="en-US" dirty="0"/>
+              <a:t>合併圖</a:t>
+            </a:r>
+            <a:r>
+              <a:rPr lang="en-US" altLang="zh-TW" dirty="0"/>
+              <a:t>1+2+3</a:t>
+            </a:r>
+            <a:r>
+              <a:rPr lang="zh-TW" altLang="en-US" dirty="0"/>
+              <a:t> 轉換視角           </a:t>
+            </a:r>
+            <a:r>
+              <a:rPr lang="zh-TW" altLang="en-US" dirty="0">
+                <a:latin typeface="Century Gothic" panose="020B0502020202020204" pitchFamily="34" charset="0"/>
+              </a:rPr>
+              <a:t>●</a:t>
+            </a:r>
+            <a:r>
+              <a:rPr lang="zh-TW" altLang="en-US" dirty="0"/>
               <a:t>合併圖輪廓</a:t>
             </a:r>
-            <a:endParaRPr lang="zh-TW" altLang="en-US" dirty="0"/>
           </a:p>
         </p:txBody>
       </p:sp>
@@ -9624,13 +9311,6 @@
   <p:clrMapOvr>
     <a:masterClrMapping/>
   </p:clrMapOvr>
-  <p:timing>
-    <p:tnLst>
-      <p:par>
-        <p:cTn id="1" dur="indefinite" restart="never" nodeType="tmRoot"/>
-      </p:par>
-    </p:tnLst>
-  </p:timing>
 </p:sld>
 </file>
 
@@ -9679,7 +9359,7 @@
               <a:t>實驗</a:t>
             </a:r>
             <a:r>
-              <a:rPr lang="zh-TW" altLang="en-US" sz="4000" dirty="0" smtClean="0">
+              <a:rPr lang="zh-TW" altLang="en-US" sz="4000" dirty="0">
                 <a:solidFill>
                   <a:srgbClr val="2E75B6"/>
                 </a:solidFill>
@@ -9720,72 +9400,44 @@
               <a:buNone/>
             </a:pPr>
             <a:r>
-              <a:rPr lang="zh-TW" altLang="en-US" dirty="0" smtClean="0">
+              <a:rPr lang="zh-TW" altLang="en-US" dirty="0">
                 <a:latin typeface="Century Gothic" panose="020B0502020202020204" pitchFamily="34" charset="0"/>
               </a:rPr>
               <a:t>●</a:t>
             </a:r>
             <a:r>
-              <a:rPr lang="zh-TW" altLang="en-US" dirty="0" smtClean="0"/>
+              <a:rPr lang="zh-TW" altLang="en-US" dirty="0"/>
               <a:t>了解</a:t>
             </a:r>
             <a:r>
-              <a:rPr lang="en-US" altLang="zh-TW" dirty="0" smtClean="0">
+              <a:rPr lang="en-US" altLang="zh-TW" dirty="0">
                 <a:latin typeface="+mn-ea"/>
               </a:rPr>
               <a:t>LiDAR</a:t>
-            </a:r>
-            <a:r>
-              <a:rPr lang="zh-TW" altLang="en-US" dirty="0" smtClean="0">
-                <a:latin typeface="+mn-ea"/>
-              </a:rPr>
-              <a:t>的測</a:t>
             </a:r>
             <a:r>
               <a:rPr lang="zh-TW" altLang="en-US" dirty="0">
                 <a:latin typeface="+mn-ea"/>
               </a:rPr>
-              <a:t>距</a:t>
-            </a:r>
-            <a:r>
-              <a:rPr lang="zh-TW" altLang="en-US" dirty="0" smtClean="0">
+              <a:t>的測距原理，並能正確處理與解讀</a:t>
+            </a:r>
+            <a:r>
+              <a:rPr lang="en-US" altLang="zh-TW" dirty="0">
                 <a:latin typeface="+mn-ea"/>
               </a:rPr>
-              <a:t>原理，</a:t>
+              <a:t>LiDAR</a:t>
+            </a:r>
+            <a:r>
+              <a:rPr lang="zh-TW" altLang="en-US" dirty="0"/>
+              <a:t>得到的資訊</a:t>
             </a:r>
             <a:r>
               <a:rPr lang="zh-TW" altLang="en-US" dirty="0">
                 <a:latin typeface="+mn-ea"/>
               </a:rPr>
-              <a:t>並能正確處理與解</a:t>
-            </a:r>
-            <a:r>
-              <a:rPr lang="zh-TW" altLang="en-US" dirty="0" smtClean="0">
-                <a:latin typeface="+mn-ea"/>
-              </a:rPr>
-              <a:t>讀</a:t>
-            </a:r>
-            <a:r>
-              <a:rPr lang="en-US" altLang="zh-TW" dirty="0">
-                <a:latin typeface="+mn-ea"/>
-              </a:rPr>
-              <a:t>LiDAR</a:t>
-            </a:r>
-            <a:r>
-              <a:rPr lang="zh-TW" altLang="en-US" dirty="0" smtClean="0"/>
-              <a:t>得到</a:t>
-            </a:r>
-            <a:r>
-              <a:rPr lang="zh-TW" altLang="en-US" dirty="0"/>
-              <a:t>的資訊</a:t>
-            </a:r>
-            <a:r>
-              <a:rPr lang="zh-TW" altLang="en-US" dirty="0" smtClean="0">
-                <a:latin typeface="+mn-ea"/>
-              </a:rPr>
               <a:t>。</a:t>
             </a:r>
-            <a:endParaRPr lang="en-US" altLang="zh-TW" sz="1800" dirty="0" smtClean="0">
+            <a:endParaRPr lang="en-US" altLang="zh-TW" sz="1800" dirty="0">
               <a:latin typeface="+mn-ea"/>
             </a:endParaRPr>
           </a:p>
@@ -9794,58 +9446,30 @@
               <a:buNone/>
             </a:pPr>
             <a:r>
-              <a:rPr lang="zh-TW" altLang="en-US" dirty="0" smtClean="0">
-                <a:latin typeface="Century Gothic" panose="020B0502020202020204" pitchFamily="34" charset="0"/>
-              </a:rPr>
-              <a:t>●使用</a:t>
-            </a:r>
-            <a:r>
-              <a:rPr lang="zh-TW" altLang="en-US" dirty="0" smtClean="0"/>
-              <a:t>不同估測方法，學習</a:t>
-            </a:r>
-            <a:r>
-              <a:rPr lang="zh-TW" altLang="en-US" dirty="0"/>
-              <a:t>在雜訊存在時如何提升估測準確度與穩定性</a:t>
-            </a:r>
-            <a:r>
-              <a:rPr lang="zh-TW" altLang="en-US" dirty="0" smtClean="0"/>
-              <a:t>。</a:t>
-            </a:r>
-            <a:endParaRPr lang="en-US" altLang="zh-TW" sz="1800" dirty="0"/>
-          </a:p>
-          <a:p>
-            <a:pPr marL="0" indent="0">
-              <a:buNone/>
-            </a:pPr>
-            <a:r>
               <a:rPr lang="zh-TW" altLang="en-US" dirty="0">
                 <a:latin typeface="Century Gothic" panose="020B0502020202020204" pitchFamily="34" charset="0"/>
               </a:rPr>
+              <a:t>●使用</a:t>
+            </a:r>
+            <a:r>
+              <a:rPr lang="zh-TW" altLang="en-US" dirty="0"/>
+              <a:t>不同估測方法，學習在雜訊存在時如何提升估測準確度與穩定性。</a:t>
+            </a:r>
+            <a:endParaRPr lang="en-US" altLang="zh-TW" sz="1800" dirty="0"/>
+          </a:p>
+          <a:p>
+            <a:pPr marL="0" indent="0">
+              <a:buNone/>
+            </a:pPr>
+            <a:r>
+              <a:rPr lang="zh-TW" altLang="en-US" dirty="0">
+                <a:latin typeface="Century Gothic" panose="020B0502020202020204" pitchFamily="34" charset="0"/>
+              </a:rPr>
               <a:t>●</a:t>
             </a:r>
             <a:r>
-              <a:rPr lang="zh-TW" altLang="en-US" dirty="0" smtClean="0"/>
-              <a:t>實</a:t>
-            </a:r>
-            <a:r>
-              <a:rPr lang="zh-TW" altLang="en-US" dirty="0" smtClean="0"/>
-              <a:t>作深度圖形的</a:t>
-            </a:r>
-            <a:r>
-              <a:rPr lang="zh-TW" altLang="en-US" dirty="0" smtClean="0"/>
-              <a:t>處理</a:t>
-            </a:r>
-            <a:r>
               <a:rPr lang="zh-TW" altLang="en-US" dirty="0"/>
-              <a:t>與</a:t>
-            </a:r>
-            <a:r>
-              <a:rPr lang="zh-TW" altLang="en-US" dirty="0" smtClean="0"/>
-              <a:t>視覺化應用</a:t>
-            </a:r>
-            <a:r>
-              <a:rPr lang="zh-TW" altLang="en-US" dirty="0" smtClean="0"/>
-              <a:t>。</a:t>
+              <a:t>實作深度圖形的處理與視覺化應用。</a:t>
             </a:r>
             <a:endParaRPr lang="zh-TW" altLang="en-US" sz="1800" dirty="0"/>
           </a:p>
@@ -9864,13 +9488,6 @@
   <p:clrMapOvr>
     <a:masterClrMapping/>
   </p:clrMapOvr>
-  <p:timing>
-    <p:tnLst>
-      <p:par>
-        <p:cTn id="1" dur="indefinite" restart="never" nodeType="tmRoot"/>
-      </p:par>
-    </p:tnLst>
-  </p:timing>
 </p:sld>
 </file>
 
@@ -9920,10 +9537,9 @@
           <a:lstStyle/>
           <a:p>
             <a:r>
-              <a:rPr lang="zh-TW" altLang="en-US" sz="4000" dirty="0" smtClean="0"/>
+              <a:rPr lang="zh-TW" altLang="en-US" sz="4000" dirty="0"/>
               <a:t>參考做法</a:t>
             </a:r>
-            <a:endParaRPr lang="zh-TW" altLang="en-US" sz="4000" dirty="0"/>
           </a:p>
         </p:txBody>
       </p:sp>
@@ -9965,30 +9581,14 @@
               <a:t>●</a:t>
             </a:r>
             <a:r>
-              <a:rPr lang="zh-TW" altLang="en-US" sz="2000" dirty="0" smtClean="0">
-                <a:solidFill>
-                  <a:schemeClr val="tx1"/>
-                </a:solidFill>
-              </a:rPr>
-              <a:t>拍攝</a:t>
-            </a:r>
-            <a:r>
               <a:rPr lang="zh-TW" altLang="en-US" sz="2000" dirty="0">
                 <a:solidFill>
                   <a:schemeClr val="tx1"/>
                 </a:solidFill>
               </a:rPr>
-              <a:t>時可精確控制旋轉角度，使每張圖有一定的重疊區域。後續根據旋轉角度或位移量</a:t>
-            </a:r>
-            <a:r>
-              <a:rPr lang="zh-TW" altLang="en-US" sz="2000" dirty="0" smtClean="0">
-                <a:solidFill>
-                  <a:schemeClr val="tx1"/>
-                </a:solidFill>
-              </a:rPr>
-              <a:t>進行轉換</a:t>
-            </a:r>
-            <a:endParaRPr lang="en-US" altLang="zh-TW" sz="2000" dirty="0" smtClean="0">
+              <a:t>拍攝時可精確控制旋轉角度，使每張圖有一定的重疊區域。後續根據旋轉角度或位移量進行轉換</a:t>
+            </a:r>
+            <a:endParaRPr lang="en-US" altLang="zh-TW" sz="2000" dirty="0">
               <a:latin typeface="Century Gothic" panose="020B0502020202020204" pitchFamily="34" charset="0"/>
             </a:endParaRPr>
           </a:p>
@@ -10005,26 +9605,18 @@
               <a:buNone/>
             </a:pPr>
             <a:r>
-              <a:rPr lang="zh-TW" altLang="en-US" sz="2000" dirty="0" smtClean="0">
+              <a:rPr lang="zh-TW" altLang="en-US" sz="2000" dirty="0">
                 <a:latin typeface="Century Gothic" panose="020B0502020202020204" pitchFamily="34" charset="0"/>
               </a:rPr>
               <a:t>●</a:t>
             </a:r>
             <a:r>
-              <a:rPr lang="zh-TW" altLang="en-US" sz="2000" dirty="0" smtClean="0">
-                <a:solidFill>
-                  <a:schemeClr val="tx1"/>
-                </a:solidFill>
-              </a:rPr>
-              <a:t>手動特徵</a:t>
-            </a:r>
-            <a:r>
               <a:rPr lang="zh-TW" altLang="en-US" sz="2000" dirty="0">
                 <a:solidFill>
                   <a:schemeClr val="tx1"/>
                 </a:solidFill>
               </a:rPr>
-              <a:t>提取</a:t>
+              <a:t>手動特徵提取</a:t>
             </a:r>
             <a:r>
               <a:rPr lang="zh-TW" altLang="en-US" sz="2000" b="1" dirty="0">
@@ -10035,62 +9627,14 @@
               <a:t>，</a:t>
             </a:r>
             <a:r>
-              <a:rPr lang="zh-TW" altLang="en-US" sz="2000" dirty="0" smtClean="0">
-                <a:solidFill>
-                  <a:schemeClr val="tx1"/>
-                </a:solidFill>
-              </a:rPr>
-              <a:t>例如</a:t>
-            </a:r>
-            <a:r>
               <a:rPr lang="zh-TW" altLang="en-US" sz="2000" dirty="0">
                 <a:solidFill>
                   <a:schemeClr val="tx1"/>
                 </a:solidFill>
               </a:rPr>
-              <a:t>取物體邊緣、角落等特徵點，或在拍照時放置一些參考</a:t>
-            </a:r>
-            <a:r>
-              <a:rPr lang="zh-TW" altLang="en-US" sz="2000" dirty="0" smtClean="0">
-                <a:solidFill>
-                  <a:schemeClr val="tx1"/>
-                </a:solidFill>
-              </a:rPr>
-              <a:t>物</a:t>
-            </a:r>
-            <a:r>
-              <a:rPr lang="zh-TW" altLang="en-US" sz="2000" dirty="0">
-                <a:solidFill>
-                  <a:schemeClr val="tx1"/>
-                </a:solidFill>
-              </a:rPr>
-              <a:t>體</a:t>
-            </a:r>
-            <a:r>
-              <a:rPr lang="zh-TW" altLang="en-US" sz="2000" dirty="0" smtClean="0">
-                <a:solidFill>
-                  <a:schemeClr val="tx1"/>
-                </a:solidFill>
-              </a:rPr>
-              <a:t>，</a:t>
-            </a:r>
-            <a:r>
-              <a:rPr lang="zh-TW" altLang="en-US" sz="2000" dirty="0">
-                <a:solidFill>
-                  <a:schemeClr val="tx1"/>
-                </a:solidFill>
-              </a:rPr>
-              <a:t>根據每張圖特徵所在</a:t>
-            </a:r>
-            <a:r>
-              <a:rPr lang="zh-TW" altLang="en-US" sz="2000" dirty="0" smtClean="0">
-                <a:solidFill>
-                  <a:schemeClr val="tx1"/>
-                </a:solidFill>
-              </a:rPr>
-              <a:t>位置計算轉換</a:t>
-            </a:r>
-            <a:endParaRPr lang="en-US" altLang="zh-TW" sz="2000" dirty="0" smtClean="0">
+              <a:t>例如取物體邊緣、角落等特徵點，或在拍照時放置一些參考物體，根據每張圖特徵所在位置計算轉換</a:t>
+            </a:r>
+            <a:endParaRPr lang="en-US" altLang="zh-TW" sz="2000" dirty="0">
               <a:solidFill>
                 <a:schemeClr val="tx1"/>
               </a:solidFill>
@@ -10100,7 +9644,7 @@
             <a:pPr marL="0" indent="0">
               <a:buNone/>
             </a:pPr>
-            <a:endParaRPr lang="en-US" altLang="zh-TW" sz="2000" dirty="0" smtClean="0">
+            <a:endParaRPr lang="en-US" altLang="zh-TW" sz="2000" dirty="0">
               <a:solidFill>
                 <a:schemeClr val="tx1"/>
               </a:solidFill>
@@ -10117,7 +9661,7 @@
               <a:t>● </a:t>
             </a:r>
             <a:r>
-              <a:rPr lang="en-US" altLang="zh-TW" sz="2000" dirty="0" smtClean="0">
+              <a:rPr lang="en-US" altLang="zh-TW" sz="2000" dirty="0">
                 <a:solidFill>
                   <a:schemeClr val="tx1"/>
                 </a:solidFill>
@@ -10125,14 +9669,14 @@
               <a:t>ICP</a:t>
             </a:r>
             <a:r>
-              <a:rPr lang="zh-TW" altLang="en-US" sz="2000" dirty="0" smtClean="0">
+              <a:rPr lang="zh-TW" altLang="en-US" sz="2000" dirty="0">
                 <a:solidFill>
                   <a:schemeClr val="tx1"/>
                 </a:solidFill>
               </a:rPr>
               <a:t>演算法</a:t>
             </a:r>
-            <a:endParaRPr lang="en-US" altLang="zh-TW" sz="2000" dirty="0" smtClean="0">
+            <a:endParaRPr lang="en-US" altLang="zh-TW" sz="2000" dirty="0">
               <a:solidFill>
                 <a:schemeClr val="tx1"/>
               </a:solidFill>
@@ -10142,7 +9686,7 @@
             <a:pPr marL="0" indent="0">
               <a:buNone/>
             </a:pPr>
-            <a:endParaRPr lang="en-US" altLang="zh-TW" sz="2000" dirty="0" smtClean="0">
+            <a:endParaRPr lang="en-US" altLang="zh-TW" sz="2000" dirty="0">
               <a:latin typeface="Century Gothic" panose="020B0502020202020204" pitchFamily="34" charset="0"/>
             </a:endParaRPr>
           </a:p>
@@ -10151,7 +9695,7 @@
               <a:buNone/>
             </a:pPr>
             <a:r>
-              <a:rPr lang="zh-TW" altLang="en-US" sz="2000" dirty="0" smtClean="0">
+              <a:rPr lang="zh-TW" altLang="en-US" sz="2000" dirty="0">
                 <a:latin typeface="Century Gothic" panose="020B0502020202020204" pitchFamily="34" charset="0"/>
               </a:rPr>
               <a:t>●</a:t>
@@ -10192,13 +9736,6 @@
   <p:clrMapOvr>
     <a:masterClrMapping/>
   </p:clrMapOvr>
-  <p:timing>
-    <p:tnLst>
-      <p:par>
-        <p:cTn id="1" dur="indefinite" restart="never" nodeType="tmRoot"/>
-      </p:par>
-    </p:tnLst>
-  </p:timing>
 </p:sld>
 </file>
 
@@ -10248,26 +9785,17 @@
           <a:lstStyle/>
           <a:p>
             <a:r>
-              <a:rPr lang="en-US" altLang="zh-TW" sz="4000" dirty="0" smtClean="0"/>
+              <a:rPr lang="en-US" altLang="zh-TW" sz="4000" dirty="0"/>
               <a:t>ICP(</a:t>
             </a:r>
             <a:r>
-              <a:rPr lang="en-US" altLang="zh-TW" dirty="0" smtClean="0"/>
-              <a:t>Iterative </a:t>
-            </a:r>
-            <a:r>
               <a:rPr lang="en-US" altLang="zh-TW" dirty="0"/>
-              <a:t>closest </a:t>
-            </a:r>
-            <a:r>
-              <a:rPr lang="en-US" altLang="zh-TW" dirty="0" smtClean="0"/>
-              <a:t>point)</a:t>
-            </a:r>
-            <a:r>
-              <a:rPr lang="zh-TW" altLang="en-US" sz="4000" dirty="0" smtClean="0"/>
+              <a:t>Iterative closest point)</a:t>
+            </a:r>
+            <a:r>
+              <a:rPr lang="zh-TW" altLang="en-US" sz="4000" dirty="0"/>
               <a:t>簡介</a:t>
             </a:r>
-            <a:endParaRPr lang="zh-TW" altLang="en-US" sz="4000" dirty="0"/>
           </a:p>
         </p:txBody>
       </p:sp>
@@ -10301,18 +9829,14 @@
               <a:buNone/>
             </a:pPr>
             <a:r>
-              <a:rPr lang="zh-TW" altLang="en-US" sz="2000" dirty="0" smtClean="0">
+              <a:rPr lang="zh-TW" altLang="en-US" sz="2000" dirty="0">
                 <a:latin typeface="Century Gothic" panose="020B0502020202020204" pitchFamily="34" charset="0"/>
               </a:rPr>
               <a:t>●</a:t>
             </a:r>
             <a:r>
-              <a:rPr lang="zh-TW" altLang="en-US" sz="2000" dirty="0" smtClean="0"/>
-              <a:t>用於</a:t>
-            </a:r>
-            <a:r>
               <a:rPr lang="zh-TW" altLang="en-US" sz="2000" dirty="0"/>
-              <a:t>把兩個或多個二維或三維點雲對齊的方法 </a:t>
+              <a:t>用於把兩個或多個二維或三維點雲對齊的方法 </a:t>
             </a:r>
             <a:endParaRPr lang="en-US" altLang="zh-TW" sz="2000" dirty="0"/>
           </a:p>
@@ -10321,164 +9845,112 @@
               <a:buNone/>
             </a:pPr>
             <a:r>
-              <a:rPr lang="zh-TW" altLang="en-US" sz="2000" dirty="0" smtClean="0">
+              <a:rPr lang="zh-TW" altLang="en-US" sz="2000" dirty="0">
                 <a:latin typeface="Century Gothic" panose="020B0502020202020204" pitchFamily="34" charset="0"/>
               </a:rPr>
               <a:t>●</a:t>
             </a:r>
             <a:r>
-              <a:rPr lang="zh-TW" altLang="en-US" sz="2000" dirty="0" smtClean="0"/>
-              <a:t>旁邊</a:t>
-            </a:r>
-            <a:r>
               <a:rPr lang="zh-TW" altLang="en-US" sz="2000" dirty="0"/>
-              <a:t>是兩張模擬的點經旋轉與加入雜訊後</a:t>
-            </a:r>
-            <a:r>
-              <a:rPr lang="zh-TW" altLang="en-US" sz="2000" dirty="0" smtClean="0"/>
-              <a:t>，透過</a:t>
-            </a:r>
-            <a:r>
-              <a:rPr lang="en-US" altLang="zh-TW" sz="2000" dirty="0" smtClean="0"/>
+              <a:t>旁邊是兩張模擬的點經旋轉與加入雜訊後，透過</a:t>
+            </a:r>
+            <a:r>
+              <a:rPr lang="en-US" altLang="zh-TW" sz="2000" dirty="0"/>
               <a:t>ICP</a:t>
             </a:r>
             <a:r>
-              <a:rPr lang="zh-TW" altLang="en-US" sz="2000" dirty="0" smtClean="0"/>
-              <a:t>進行</a:t>
-            </a:r>
-            <a:r>
               <a:rPr lang="zh-TW" altLang="en-US" sz="2000" dirty="0"/>
-              <a:t>配準</a:t>
-            </a:r>
-            <a:endParaRPr lang="en-US" altLang="zh-TW" sz="2000" dirty="0" smtClean="0"/>
+              <a:t>進行配準</a:t>
+            </a:r>
+            <a:endParaRPr lang="en-US" altLang="zh-TW" sz="2000" dirty="0"/>
           </a:p>
           <a:p>
             <a:pPr marL="0" indent="0">
               <a:buNone/>
             </a:pPr>
             <a:r>
-              <a:rPr lang="zh-TW" altLang="en-US" sz="2000" dirty="0" smtClean="0">
+              <a:rPr lang="zh-TW" altLang="en-US" sz="2000" dirty="0">
                 <a:latin typeface="Century Gothic" panose="020B0502020202020204" pitchFamily="34" charset="0"/>
               </a:rPr>
               <a:t>●</a:t>
             </a:r>
             <a:r>
               <a:rPr lang="zh-TW" altLang="en-US" sz="2000" dirty="0"/>
-              <a:t>紅色點</a:t>
-            </a:r>
-            <a:r>
-              <a:rPr lang="zh-TW" altLang="en-US" sz="2000" dirty="0" smtClean="0"/>
-              <a:t>雲</a:t>
-            </a:r>
-            <a:r>
-              <a:rPr lang="en-US" altLang="zh-TW" sz="2000" dirty="0" smtClean="0"/>
+              <a:t>紅色點雲</a:t>
+            </a:r>
+            <a:r>
+              <a:rPr lang="en-US" altLang="zh-TW" sz="2000" dirty="0"/>
               <a:t>:</a:t>
             </a:r>
             <a:r>
-              <a:rPr lang="zh-TW" altLang="en-US" sz="2000" dirty="0" smtClean="0"/>
-              <a:t>起始</a:t>
-            </a:r>
-            <a:r>
               <a:rPr lang="zh-TW" altLang="en-US" sz="2000" dirty="0"/>
-              <a:t>資料，需對齊至藍色點</a:t>
-            </a:r>
-            <a:r>
-              <a:rPr lang="zh-TW" altLang="en-US" sz="2000" dirty="0" smtClean="0"/>
-              <a:t>雲</a:t>
-            </a:r>
-            <a:endParaRPr lang="en-US" altLang="zh-TW" sz="2000" dirty="0" smtClean="0"/>
+              <a:t>起始資料，需對齊至藍色點雲</a:t>
+            </a:r>
+            <a:endParaRPr lang="en-US" altLang="zh-TW" sz="2000" dirty="0"/>
           </a:p>
           <a:p>
             <a:pPr marL="0" indent="0">
               <a:buNone/>
             </a:pPr>
             <a:r>
-              <a:rPr lang="zh-TW" altLang="en-US" sz="2000" dirty="0" smtClean="0">
+              <a:rPr lang="zh-TW" altLang="en-US" sz="2000" dirty="0">
                 <a:latin typeface="Century Gothic" panose="020B0502020202020204" pitchFamily="34" charset="0"/>
               </a:rPr>
               <a:t>●</a:t>
             </a:r>
             <a:r>
               <a:rPr lang="zh-TW" altLang="en-US" sz="2000" dirty="0"/>
-              <a:t>藍色點</a:t>
-            </a:r>
-            <a:r>
-              <a:rPr lang="zh-TW" altLang="en-US" sz="2000" dirty="0" smtClean="0"/>
-              <a:t>雲</a:t>
-            </a:r>
-            <a:r>
-              <a:rPr lang="en-US" altLang="zh-TW" sz="2000" dirty="0" smtClean="0"/>
+              <a:t>藍色點雲</a:t>
+            </a:r>
+            <a:r>
+              <a:rPr lang="en-US" altLang="zh-TW" sz="2000" dirty="0"/>
               <a:t>:</a:t>
             </a:r>
             <a:r>
               <a:rPr lang="zh-TW" altLang="en-US" sz="2000" dirty="0"/>
-              <a:t>作為目標資料，保持固定不</a:t>
-            </a:r>
-            <a:r>
-              <a:rPr lang="zh-TW" altLang="en-US" sz="2000" dirty="0" smtClean="0"/>
-              <a:t>動</a:t>
-            </a:r>
-            <a:endParaRPr lang="en-US" altLang="zh-TW" sz="2000" dirty="0" smtClean="0"/>
+              <a:t>作為目標資料，保持固定不動</a:t>
+            </a:r>
+            <a:endParaRPr lang="en-US" altLang="zh-TW" sz="2000" dirty="0"/>
           </a:p>
           <a:p>
             <a:pPr marL="0" indent="0">
               <a:buNone/>
             </a:pPr>
             <a:r>
-              <a:rPr lang="zh-TW" altLang="en-US" sz="2000" dirty="0" smtClean="0">
+              <a:rPr lang="zh-TW" altLang="en-US" sz="2000" dirty="0">
                 <a:latin typeface="Century Gothic" panose="020B0502020202020204" pitchFamily="34" charset="0"/>
               </a:rPr>
               <a:t>●</a:t>
             </a:r>
             <a:r>
               <a:rPr lang="zh-TW" altLang="en-US" sz="2000" dirty="0"/>
-              <a:t>綠色點</a:t>
-            </a:r>
-            <a:r>
-              <a:rPr lang="zh-TW" altLang="en-US" sz="2000" dirty="0" smtClean="0"/>
-              <a:t>雲</a:t>
-            </a:r>
-            <a:r>
-              <a:rPr lang="en-US" altLang="zh-TW" sz="2000" dirty="0" smtClean="0"/>
+              <a:t>綠色點雲</a:t>
+            </a:r>
+            <a:r>
+              <a:rPr lang="en-US" altLang="zh-TW" sz="2000" dirty="0"/>
               <a:t>:</a:t>
             </a:r>
             <a:r>
               <a:rPr lang="zh-TW" altLang="en-US" sz="2000" dirty="0"/>
-              <a:t>每次迭代後轉換的紅色點雲，逐步逼近藍色點</a:t>
-            </a:r>
-            <a:r>
-              <a:rPr lang="zh-TW" altLang="en-US" sz="2000" dirty="0" smtClean="0"/>
-              <a:t>雲 </a:t>
-            </a:r>
-            <a:endParaRPr lang="en-US" altLang="zh-TW" sz="2000" dirty="0" smtClean="0"/>
+              <a:t>每次迭代後轉換的紅色點雲，逐步逼近藍色點雲 </a:t>
+            </a:r>
+            <a:endParaRPr lang="en-US" altLang="zh-TW" sz="2000" dirty="0"/>
           </a:p>
           <a:p>
             <a:pPr marL="0" indent="0">
               <a:buNone/>
             </a:pPr>
             <a:r>
-              <a:rPr lang="zh-TW" altLang="en-US" sz="2000" dirty="0" smtClean="0">
+              <a:rPr lang="zh-TW" altLang="en-US" sz="2000" dirty="0">
                 <a:latin typeface="Century Gothic" panose="020B0502020202020204" pitchFamily="34" charset="0"/>
               </a:rPr>
               <a:t>●</a:t>
             </a:r>
             <a:r>
               <a:rPr lang="zh-TW" altLang="en-US" sz="2000" dirty="0"/>
-              <a:t>實際應用中可能存在雜訊與遮擋，因此結果</a:t>
-            </a:r>
-            <a:r>
-              <a:rPr lang="zh-TW" altLang="en-US" sz="2000" dirty="0" smtClean="0"/>
-              <a:t>不一定</a:t>
-            </a:r>
-            <a:r>
-              <a:rPr lang="zh-TW" altLang="en-US" sz="2000" dirty="0"/>
-              <a:t>幾乎</a:t>
-            </a:r>
-            <a:r>
-              <a:rPr lang="zh-TW" altLang="en-US" sz="2000" dirty="0" smtClean="0"/>
-              <a:t>貼合</a:t>
-            </a:r>
-            <a:endParaRPr lang="en-US" altLang="zh-TW" sz="2000" dirty="0" smtClean="0"/>
+              <a:t>實際應用中可能存在雜訊與遮擋，因此結果不一定幾乎貼合</a:t>
+            </a:r>
+            <a:endParaRPr lang="en-US" altLang="zh-TW" sz="2000" dirty="0"/>
           </a:p>
           <a:p>
             <a:pPr marL="0" indent="0">
@@ -10648,13 +10120,6 @@
   <p:clrMapOvr>
     <a:masterClrMapping/>
   </p:clrMapOvr>
-  <p:timing>
-    <p:tnLst>
-      <p:par>
-        <p:cTn id="1" dur="indefinite" restart="never" nodeType="tmRoot"/>
-      </p:par>
-    </p:tnLst>
-  </p:timing>
 </p:sld>
 </file>
 
@@ -10741,7 +10206,7 @@
               <a:buNone/>
             </a:pPr>
             <a:r>
-              <a:rPr lang="en-US" altLang="zh-TW" sz="2000" dirty="0" smtClean="0">
+              <a:rPr lang="en-US" altLang="zh-TW" sz="2000" dirty="0">
                 <a:solidFill>
                   <a:schemeClr val="tx1"/>
                 </a:solidFill>
@@ -10749,7 +10214,7 @@
               <a:t>(1)</a:t>
             </a:r>
             <a:r>
-              <a:rPr lang="zh-TW" altLang="en-US" sz="2000" dirty="0" smtClean="0">
+              <a:rPr lang="zh-TW" altLang="en-US" sz="2000" dirty="0">
                 <a:solidFill>
                   <a:schemeClr val="tx1"/>
                 </a:solidFill>
@@ -10757,7 +10222,7 @@
               <a:t>初始化</a:t>
             </a:r>
             <a:r>
-              <a:rPr lang="en-US" altLang="zh-TW" sz="2000" dirty="0" smtClean="0">
+              <a:rPr lang="en-US" altLang="zh-TW" sz="2000" dirty="0">
                 <a:solidFill>
                   <a:schemeClr val="tx1"/>
                 </a:solidFill>
@@ -10765,28 +10230,20 @@
               <a:t>:</a:t>
             </a:r>
             <a:r>
-              <a:rPr lang="zh-TW" altLang="en-US" sz="2000" dirty="0" smtClean="0">
-                <a:solidFill>
-                  <a:schemeClr val="tx1"/>
-                </a:solidFill>
-              </a:rPr>
-              <a:t>設定</a:t>
-            </a:r>
-            <a:r>
               <a:rPr lang="zh-TW" altLang="en-US" sz="2000" dirty="0">
                 <a:solidFill>
                   <a:schemeClr val="tx1"/>
                 </a:solidFill>
               </a:rPr>
-              <a:t>初始轉換</a:t>
-            </a:r>
-            <a:r>
-              <a:rPr lang="zh-TW" altLang="en-US" sz="2000" dirty="0" smtClean="0">
-                <a:solidFill>
-                  <a:schemeClr val="tx1"/>
-                </a:solidFill>
-              </a:rPr>
-              <a:t>矩陣，可以照大概方向自己設定或</a:t>
+              <a:t>設定初始轉換矩陣，可以照大概方向自己設定或隨意設一個</a:t>
+            </a:r>
+            <a:r>
+              <a:rPr lang="en-US" altLang="zh-TW" sz="2000" dirty="0">
+                <a:solidFill>
+                  <a:schemeClr val="tx1"/>
+                </a:solidFill>
+              </a:rPr>
+              <a:t>(</a:t>
             </a:r>
             <a:r>
               <a:rPr lang="zh-TW" altLang="en-US" sz="2000" dirty="0">
@@ -10794,15 +10251,28 @@
                   <a:schemeClr val="tx1"/>
                 </a:solidFill>
               </a:rPr>
-              <a:t>隨意設一個</a:t>
-            </a:r>
-            <a:r>
-              <a:rPr lang="en-US" altLang="zh-TW" sz="2000" dirty="0" smtClean="0">
-                <a:solidFill>
-                  <a:schemeClr val="tx1"/>
-                </a:solidFill>
-              </a:rPr>
-              <a:t>(</a:t>
+              <a:t>如單位矩陣</a:t>
+            </a:r>
+            <a:r>
+              <a:rPr lang="en-US" altLang="zh-TW" sz="2000" dirty="0">
+                <a:solidFill>
+                  <a:schemeClr val="tx1"/>
+                </a:solidFill>
+              </a:rPr>
+              <a:t>I)</a:t>
+            </a:r>
+          </a:p>
+          <a:p>
+            <a:pPr marL="0" indent="0">
+              <a:buNone/>
+            </a:pPr>
+            <a:r>
+              <a:rPr lang="en-US" altLang="zh-TW" sz="2000" dirty="0">
+                <a:solidFill>
+                  <a:schemeClr val="tx1"/>
+                </a:solidFill>
+              </a:rPr>
+              <a:t>(2)</a:t>
             </a:r>
             <a:r>
               <a:rPr lang="zh-TW" altLang="en-US" sz="2000" dirty="0">
@@ -10810,15 +10280,15 @@
                   <a:schemeClr val="tx1"/>
                 </a:solidFill>
               </a:rPr>
-              <a:t>如</a:t>
-            </a:r>
-            <a:r>
-              <a:rPr lang="zh-TW" altLang="en-US" sz="2000" dirty="0" smtClean="0">
-                <a:solidFill>
-                  <a:schemeClr val="tx1"/>
-                </a:solidFill>
-              </a:rPr>
-              <a:t>單位</a:t>
+              <a:t>最近點搜尋</a:t>
+            </a:r>
+            <a:r>
+              <a:rPr lang="en-US" altLang="zh-TW" sz="2000" dirty="0">
+                <a:solidFill>
+                  <a:schemeClr val="tx1"/>
+                </a:solidFill>
+              </a:rPr>
+              <a:t>:</a:t>
             </a:r>
             <a:r>
               <a:rPr lang="zh-TW" altLang="en-US" sz="2000" dirty="0">
@@ -10826,86 +10296,9 @@
                   <a:schemeClr val="tx1"/>
                 </a:solidFill>
               </a:rPr>
-              <a:t>矩陣</a:t>
-            </a:r>
-            <a:r>
-              <a:rPr lang="en-US" altLang="zh-TW" sz="2000" dirty="0" smtClean="0">
-                <a:solidFill>
-                  <a:schemeClr val="tx1"/>
-                </a:solidFill>
-              </a:rPr>
-              <a:t>I)</a:t>
-            </a:r>
-          </a:p>
-          <a:p>
-            <a:pPr marL="0" indent="0">
-              <a:buNone/>
-            </a:pPr>
-            <a:r>
-              <a:rPr lang="en-US" altLang="zh-TW" sz="2000" dirty="0" smtClean="0">
-                <a:solidFill>
-                  <a:schemeClr val="tx1"/>
-                </a:solidFill>
-              </a:rPr>
-              <a:t>(2)</a:t>
-            </a:r>
-            <a:r>
-              <a:rPr lang="zh-TW" altLang="en-US" sz="2000" dirty="0" smtClean="0">
-                <a:solidFill>
-                  <a:schemeClr val="tx1"/>
-                </a:solidFill>
-              </a:rPr>
-              <a:t>最近</a:t>
-            </a:r>
-            <a:r>
-              <a:rPr lang="zh-TW" altLang="en-US" sz="2000" dirty="0">
-                <a:solidFill>
-                  <a:schemeClr val="tx1"/>
-                </a:solidFill>
-              </a:rPr>
-              <a:t>點</a:t>
-            </a:r>
-            <a:r>
-              <a:rPr lang="zh-TW" altLang="en-US" sz="2000" dirty="0" smtClean="0">
-                <a:solidFill>
-                  <a:schemeClr val="tx1"/>
-                </a:solidFill>
-              </a:rPr>
-              <a:t>搜尋</a:t>
-            </a:r>
-            <a:r>
-              <a:rPr lang="en-US" altLang="zh-TW" sz="2000" dirty="0" smtClean="0">
-                <a:solidFill>
-                  <a:schemeClr val="tx1"/>
-                </a:solidFill>
-              </a:rPr>
-              <a:t>:</a:t>
-            </a:r>
-            <a:r>
-              <a:rPr lang="zh-TW" altLang="en-US" sz="2000" dirty="0" smtClean="0">
-                <a:solidFill>
-                  <a:schemeClr val="tx1"/>
-                </a:solidFill>
-              </a:rPr>
-              <a:t>對於</a:t>
-            </a:r>
-            <a:r>
-              <a:rPr lang="zh-TW" altLang="en-US" sz="2000" dirty="0">
-                <a:solidFill>
-                  <a:schemeClr val="tx1"/>
-                </a:solidFill>
-              </a:rPr>
-              <a:t>源點雲中的每個點，找出目標點雲中距離最近的</a:t>
-            </a:r>
-            <a:r>
-              <a:rPr lang="zh-TW" altLang="en-US" sz="2000" dirty="0" smtClean="0">
-                <a:solidFill>
-                  <a:schemeClr val="tx1"/>
-                </a:solidFill>
-              </a:rPr>
-              <a:t>點</a:t>
-            </a:r>
-            <a:endParaRPr lang="en-US" altLang="zh-TW" sz="2000" dirty="0" smtClean="0">
+              <a:t>對於源點雲中的每個點，找出目標點雲中距離最近的點</a:t>
+            </a:r>
+            <a:endParaRPr lang="en-US" altLang="zh-TW" sz="2000" dirty="0">
               <a:solidFill>
                 <a:schemeClr val="tx1"/>
               </a:solidFill>
@@ -10916,7 +10309,7 @@
               <a:buNone/>
             </a:pPr>
             <a:r>
-              <a:rPr lang="en-US" altLang="zh-TW" sz="2000" dirty="0" smtClean="0">
+              <a:rPr lang="en-US" altLang="zh-TW" sz="2000" dirty="0">
                 <a:solidFill>
                   <a:schemeClr val="tx1"/>
                 </a:solidFill>
@@ -10924,15 +10317,15 @@
               <a:t>(3)</a:t>
             </a:r>
             <a:r>
-              <a:rPr lang="zh-TW" altLang="en-US" sz="2000" dirty="0" smtClean="0"/>
+              <a:rPr lang="zh-TW" altLang="en-US" sz="2000" dirty="0"/>
               <a:t>估算變換</a:t>
             </a:r>
             <a:r>
-              <a:rPr lang="en-US" altLang="zh-TW" sz="2000" dirty="0" smtClean="0"/>
+              <a:rPr lang="en-US" altLang="zh-TW" sz="2000" dirty="0"/>
               <a:t>:</a:t>
             </a:r>
             <a:r>
-              <a:rPr lang="zh-TW" altLang="en-US" sz="2000" dirty="0" smtClean="0">
+              <a:rPr lang="zh-TW" altLang="en-US" sz="2000" dirty="0">
                 <a:solidFill>
                   <a:schemeClr val="tx1"/>
                 </a:solidFill>
@@ -10940,19 +10333,11 @@
               <a:t> </a:t>
             </a:r>
             <a:r>
-              <a:rPr lang="zh-TW" altLang="en-US" sz="2000" dirty="0" smtClean="0"/>
-              <a:t>最小</a:t>
-            </a:r>
-            <a:r>
               <a:rPr lang="zh-TW" altLang="en-US" sz="2000" dirty="0"/>
-              <a:t>化對應點間距離平方和，求得最佳</a:t>
-            </a:r>
-            <a:r>
-              <a:rPr lang="zh-TW" altLang="en-US" sz="2000" dirty="0" smtClean="0"/>
-              <a:t>旋轉</a:t>
-            </a:r>
-            <a:r>
-              <a:rPr lang="zh-TW" altLang="en-US" sz="2000" dirty="0" smtClean="0">
+              <a:t>最小化對應點間距離平方和，求得最佳旋轉</a:t>
+            </a:r>
+            <a:r>
+              <a:rPr lang="zh-TW" altLang="en-US" sz="2000" dirty="0">
                 <a:solidFill>
                   <a:schemeClr val="tx1"/>
                 </a:solidFill>
@@ -10960,7 +10345,7 @@
               <a:t>矩陣</a:t>
             </a:r>
             <a:r>
-              <a:rPr lang="zh-TW" altLang="en-US" sz="2000" dirty="0" smtClean="0"/>
+              <a:rPr lang="zh-TW" altLang="en-US" sz="2000" dirty="0"/>
               <a:t> </a:t>
             </a:r>
             <a:r>
@@ -10969,17 +10354,13 @@
             </a:r>
             <a:r>
               <a:rPr lang="zh-TW" altLang="en-US" sz="2000" dirty="0"/>
-              <a:t>與</a:t>
-            </a:r>
-            <a:r>
-              <a:rPr lang="zh-TW" altLang="en-US" sz="2000" dirty="0" smtClean="0"/>
-              <a:t>平移向量 </a:t>
+              <a:t>與平移向量 </a:t>
             </a:r>
             <a:r>
               <a:rPr lang="en-US" altLang="zh-TW" sz="2000" dirty="0"/>
               <a:t>t</a:t>
             </a:r>
-            <a:endParaRPr lang="en-US" altLang="zh-TW" sz="2000" dirty="0" smtClean="0">
+            <a:endParaRPr lang="en-US" altLang="zh-TW" sz="2000" dirty="0">
               <a:solidFill>
                 <a:schemeClr val="tx1"/>
               </a:solidFill>
@@ -10990,7 +10371,7 @@
               <a:buNone/>
             </a:pPr>
             <a:r>
-              <a:rPr lang="en-US" altLang="zh-TW" sz="2000" dirty="0" smtClean="0">
+              <a:rPr lang="en-US" altLang="zh-TW" sz="2000" dirty="0">
                 <a:solidFill>
                   <a:schemeClr val="tx1"/>
                 </a:solidFill>
@@ -10998,33 +10379,25 @@
               <a:t>(4)</a:t>
             </a:r>
             <a:r>
-              <a:rPr lang="zh-TW" altLang="en-US" sz="2000" dirty="0" smtClean="0"/>
+              <a:rPr lang="zh-TW" altLang="en-US" sz="2000" dirty="0"/>
               <a:t>套用轉換</a:t>
             </a:r>
             <a:r>
-              <a:rPr lang="en-US" altLang="zh-TW" sz="2000" dirty="0" smtClean="0"/>
+              <a:rPr lang="en-US" altLang="zh-TW" sz="2000" dirty="0"/>
               <a:t>:</a:t>
             </a:r>
             <a:r>
-              <a:rPr lang="zh-TW" altLang="en-US" sz="2000" dirty="0" smtClean="0"/>
-              <a:t>更新</a:t>
-            </a:r>
-            <a:r>
               <a:rPr lang="zh-TW" altLang="en-US" sz="2000" dirty="0"/>
-              <a:t>源點雲的位置，使其更接近目標點</a:t>
-            </a:r>
-            <a:r>
-              <a:rPr lang="zh-TW" altLang="en-US" sz="2000" dirty="0" smtClean="0"/>
-              <a:t>雲</a:t>
-            </a:r>
-            <a:endParaRPr lang="en-US" altLang="zh-TW" sz="2000" dirty="0" smtClean="0"/>
+              <a:t>更新源點雲的位置，使其更接近目標點雲</a:t>
+            </a:r>
+            <a:endParaRPr lang="en-US" altLang="zh-TW" sz="2000" dirty="0"/>
           </a:p>
           <a:p>
             <a:pPr marL="0" indent="0">
               <a:buNone/>
             </a:pPr>
             <a:r>
-              <a:rPr lang="en-US" altLang="zh-TW" sz="2000" dirty="0" smtClean="0">
+              <a:rPr lang="en-US" altLang="zh-TW" sz="2000" dirty="0">
                 <a:solidFill>
                   <a:schemeClr val="tx1"/>
                 </a:solidFill>
@@ -11036,22 +10409,14 @@
               <a:t>重複步驟 </a:t>
             </a:r>
             <a:r>
-              <a:rPr lang="en-US" altLang="zh-TW" sz="2000" dirty="0" smtClean="0"/>
+              <a:rPr lang="en-US" altLang="zh-TW" sz="2000" dirty="0"/>
               <a:t>(2)–(4)</a:t>
             </a:r>
             <a:r>
-              <a:rPr lang="zh-TW" altLang="en-US" sz="2000" dirty="0" smtClean="0"/>
-              <a:t>：</a:t>
-            </a:r>
-            <a:r>
               <a:rPr lang="zh-TW" altLang="en-US" sz="2000" dirty="0"/>
-              <a:t>直到誤差變化小於設定閾值，或達到最大迭代</a:t>
-            </a:r>
-            <a:r>
-              <a:rPr lang="zh-TW" altLang="en-US" sz="2000" dirty="0" smtClean="0"/>
-              <a:t>次數</a:t>
-            </a:r>
-            <a:endParaRPr lang="en-US" altLang="zh-TW" sz="2000" dirty="0" smtClean="0">
+              <a:t>：直到誤差變化小於設定閾值，或達到最大迭代次數</a:t>
+            </a:r>
+            <a:endParaRPr lang="en-US" altLang="zh-TW" sz="2000" dirty="0">
               <a:solidFill>
                 <a:schemeClr val="tx1"/>
               </a:solidFill>
@@ -11069,13 +10434,6 @@
   <p:clrMapOvr>
     <a:masterClrMapping/>
   </p:clrMapOvr>
-  <p:timing>
-    <p:tnLst>
-      <p:par>
-        <p:cTn id="1" dur="indefinite" restart="never" nodeType="tmRoot"/>
-      </p:par>
-    </p:tnLst>
-  </p:timing>
 </p:sld>
 </file>
 
@@ -11163,62 +10521,30 @@
               <a:buNone/>
             </a:pPr>
             <a:r>
-              <a:rPr lang="zh-TW" altLang="en-US" sz="2000" dirty="0" smtClean="0">
-                <a:latin typeface="Century Gothic" panose="020B0502020202020204" pitchFamily="34" charset="0"/>
-              </a:rPr>
-              <a:t>●</a:t>
-            </a:r>
-            <a:r>
-              <a:rPr lang="zh-TW" altLang="en-US" sz="2000" dirty="0" smtClean="0"/>
-              <a:t>挑選適當拍攝位置，透明材質</a:t>
-            </a:r>
-            <a:r>
-              <a:rPr lang="en-US" altLang="zh-TW" sz="2000" dirty="0" smtClean="0"/>
-              <a:t>(</a:t>
-            </a:r>
-            <a:r>
-              <a:rPr lang="zh-TW" altLang="en-US" sz="2000" dirty="0" smtClean="0"/>
-              <a:t>如玻璃</a:t>
-            </a:r>
-            <a:r>
-              <a:rPr lang="en-US" altLang="zh-TW" sz="2000" dirty="0" smtClean="0"/>
-              <a:t>)</a:t>
-            </a:r>
-            <a:r>
-              <a:rPr lang="zh-TW" altLang="en-US" sz="2000" dirty="0" smtClean="0"/>
-              <a:t>可</a:t>
-            </a:r>
-            <a:r>
-              <a:rPr lang="zh-TW" altLang="en-US" sz="2000" dirty="0"/>
-              <a:t>能量</a:t>
-            </a:r>
-            <a:r>
-              <a:rPr lang="zh-TW" altLang="en-US" sz="2000" dirty="0" smtClean="0"/>
-              <a:t>不到</a:t>
-            </a:r>
-            <a:endParaRPr lang="en-US" altLang="zh-TW" sz="2000" dirty="0" smtClean="0"/>
-          </a:p>
-          <a:p>
-            <a:pPr marL="0" indent="0">
-              <a:buNone/>
-            </a:pPr>
-            <a:r>
               <a:rPr lang="zh-TW" altLang="en-US" sz="2000" dirty="0">
                 <a:latin typeface="Century Gothic" panose="020B0502020202020204" pitchFamily="34" charset="0"/>
               </a:rPr>
               <a:t>●</a:t>
             </a:r>
             <a:r>
-              <a:rPr lang="zh-TW" altLang="en-US" sz="2000" dirty="0" smtClean="0"/>
-              <a:t>光</a:t>
-            </a:r>
-            <a:r>
               <a:rPr lang="zh-TW" altLang="en-US" sz="2000" dirty="0"/>
-              <a:t>達有距離方面的使用限制 太近的東西看</a:t>
-            </a:r>
-            <a:r>
-              <a:rPr lang="zh-TW" altLang="en-US" sz="2000" dirty="0" smtClean="0"/>
-              <a:t>不到</a:t>
+              <a:t>挑選適當拍攝位置，透明材質</a:t>
+            </a:r>
+            <a:r>
+              <a:rPr lang="en-US" altLang="zh-TW" sz="2000" dirty="0"/>
+              <a:t>(</a:t>
+            </a:r>
+            <a:r>
+              <a:rPr lang="zh-TW" altLang="en-US" sz="2000" dirty="0"/>
+              <a:t>如玻璃</a:t>
+            </a:r>
+            <a:r>
+              <a:rPr lang="en-US" altLang="zh-TW" sz="2000" dirty="0"/>
+              <a:t>)</a:t>
+            </a:r>
+            <a:r>
+              <a:rPr lang="zh-TW" altLang="en-US" sz="2000" dirty="0"/>
+              <a:t>可能量不到</a:t>
             </a:r>
             <a:endParaRPr lang="en-US" altLang="zh-TW" sz="2000" dirty="0"/>
           </a:p>
@@ -11233,12 +10559,24 @@
               <a:t>●</a:t>
             </a:r>
             <a:r>
-              <a:rPr lang="zh-TW" altLang="en-US" sz="2000" dirty="0" smtClean="0"/>
-              <a:t>在</a:t>
-            </a:r>
-            <a:r>
               <a:rPr lang="zh-TW" altLang="en-US" sz="2000" dirty="0"/>
-              <a:t>需要做</a:t>
+              <a:t>光達有距離方面的使用限制 太近的東西看不到</a:t>
+            </a:r>
+            <a:endParaRPr lang="en-US" altLang="zh-TW" sz="2000" dirty="0"/>
+          </a:p>
+          <a:p>
+            <a:pPr marL="0" indent="0">
+              <a:buNone/>
+            </a:pPr>
+            <a:r>
+              <a:rPr lang="zh-TW" altLang="en-US" sz="2000" dirty="0">
+                <a:latin typeface="Century Gothic" panose="020B0502020202020204" pitchFamily="34" charset="0"/>
+              </a:rPr>
+              <a:t>●</a:t>
+            </a:r>
+            <a:r>
+              <a:rPr lang="zh-TW" altLang="en-US" sz="2000" dirty="0"/>
+              <a:t>在需要做</a:t>
             </a:r>
             <a:r>
               <a:rPr lang="en-US" altLang="zh-TW" sz="2000" dirty="0"/>
@@ -11261,36 +10599,20 @@
               <a:t>●</a:t>
             </a:r>
             <a:r>
-              <a:rPr lang="zh-TW" altLang="en-US" sz="2000" dirty="0" smtClean="0"/>
-              <a:t>圖片</a:t>
-            </a:r>
-            <a:r>
               <a:rPr lang="zh-TW" altLang="en-US" sz="2000" dirty="0"/>
-              <a:t>合併不完美 或圖片有漏洞 可以用一些方法</a:t>
-            </a:r>
-            <a:r>
-              <a:rPr lang="zh-TW" altLang="en-US" sz="2000" dirty="0" smtClean="0"/>
-              <a:t>調整</a:t>
-            </a:r>
-            <a:r>
-              <a:rPr lang="en-US" altLang="zh-TW" sz="2000" dirty="0" smtClean="0"/>
+              <a:t>圖片合併不完美 或圖片有漏洞 可以用一些方法調整</a:t>
+            </a:r>
+            <a:r>
+              <a:rPr lang="en-US" altLang="zh-TW" sz="2000" dirty="0"/>
               <a:t>(</a:t>
             </a:r>
             <a:r>
-              <a:rPr lang="zh-TW" altLang="en-US" sz="2000" dirty="0" smtClean="0"/>
-              <a:t>如內插</a:t>
-            </a:r>
-            <a:r>
               <a:rPr lang="zh-TW" altLang="en-US" sz="2000" dirty="0"/>
-              <a:t>等</a:t>
+              <a:t>如內插等</a:t>
             </a:r>
             <a:r>
               <a:rPr lang="en-US" altLang="zh-TW" sz="2000" dirty="0"/>
-              <a:t>)</a:t>
-            </a:r>
-            <a:r>
-              <a:rPr lang="en-US" altLang="zh-TW" sz="2000" dirty="0" smtClean="0"/>
-              <a:t> </a:t>
+              <a:t>) </a:t>
             </a:r>
           </a:p>
           <a:p>
@@ -11298,34 +10620,22 @@
               <a:buNone/>
             </a:pPr>
             <a:r>
-              <a:rPr lang="zh-TW" altLang="en-US" sz="2000" dirty="0" smtClean="0">
+              <a:rPr lang="zh-TW" altLang="en-US" sz="2000" dirty="0">
                 <a:latin typeface="Century Gothic" panose="020B0502020202020204" pitchFamily="34" charset="0"/>
               </a:rPr>
               <a:t>●</a:t>
             </a:r>
             <a:r>
-              <a:rPr lang="zh-TW" altLang="en-US" sz="2000" dirty="0" smtClean="0"/>
-              <a:t>使用</a:t>
-            </a:r>
-            <a:r>
               <a:rPr lang="zh-TW" altLang="en-US" sz="2000" dirty="0"/>
-              <a:t>工具不</a:t>
-            </a:r>
-            <a:r>
-              <a:rPr lang="zh-TW" altLang="en-US" sz="2000" dirty="0" smtClean="0"/>
-              <a:t>限，</a:t>
-            </a:r>
-            <a:r>
-              <a:rPr lang="en-US" altLang="zh-TW" sz="2000" dirty="0" err="1" smtClean="0"/>
+              <a:t>使用工具不限，</a:t>
+            </a:r>
+            <a:r>
+              <a:rPr lang="en-US" altLang="zh-TW" sz="2000" dirty="0" err="1"/>
               <a:t>matlab</a:t>
             </a:r>
             <a:r>
-              <a:rPr lang="en-US" altLang="zh-TW" sz="2000" dirty="0" smtClean="0"/>
-              <a:t> </a:t>
-            </a:r>
-            <a:r>
               <a:rPr lang="en-US" altLang="zh-TW" sz="2000" dirty="0"/>
-              <a:t>c/</a:t>
+              <a:t> c/</a:t>
             </a:r>
             <a:r>
               <a:rPr lang="en-US" altLang="zh-TW" sz="2000" dirty="0" err="1"/>
@@ -11360,13 +10670,6 @@
   <p:clrMapOvr>
     <a:masterClrMapping/>
   </p:clrMapOvr>
-  <p:timing>
-    <p:tnLst>
-      <p:par>
-        <p:cTn id="1" dur="indefinite" restart="never" nodeType="tmRoot"/>
-      </p:par>
-    </p:tnLst>
-  </p:timing>
 </p:sld>
 </file>
 
@@ -11416,10 +10719,9 @@
           <a:lstStyle/>
           <a:p>
             <a:r>
-              <a:rPr lang="zh-TW" altLang="en-US" sz="4000" dirty="0" smtClean="0"/>
+              <a:rPr lang="zh-TW" altLang="en-US" sz="4000" dirty="0"/>
               <a:t>作業要求</a:t>
             </a:r>
-            <a:endParaRPr lang="zh-TW" altLang="en-US" sz="4000" dirty="0"/>
           </a:p>
         </p:txBody>
       </p:sp>
@@ -11453,37 +10755,37 @@
               <a:buNone/>
             </a:pPr>
             <a:r>
-              <a:rPr lang="zh-TW" altLang="en-US" dirty="0" smtClean="0">
+              <a:rPr lang="zh-TW" altLang="en-US" dirty="0">
                 <a:latin typeface="Century Gothic" panose="020B0502020202020204" pitchFamily="34" charset="0"/>
               </a:rPr>
               <a:t>●</a:t>
             </a:r>
             <a:r>
-              <a:rPr lang="en-US" altLang="zh-TW" dirty="0" smtClean="0"/>
+              <a:rPr lang="en-US" altLang="zh-TW" dirty="0"/>
               <a:t>Part</a:t>
             </a:r>
             <a:r>
-              <a:rPr lang="zh-TW" altLang="en-US" dirty="0" smtClean="0"/>
+              <a:rPr lang="zh-TW" altLang="en-US" dirty="0"/>
               <a:t> </a:t>
             </a:r>
             <a:r>
-              <a:rPr lang="en-US" altLang="zh-TW" dirty="0" smtClean="0"/>
+              <a:rPr lang="en-US" altLang="zh-TW" dirty="0"/>
               <a:t>1</a:t>
             </a:r>
             <a:r>
-              <a:rPr lang="zh-TW" altLang="en-US" dirty="0" smtClean="0"/>
+              <a:rPr lang="zh-TW" altLang="en-US" dirty="0"/>
               <a:t>  </a:t>
             </a:r>
             <a:r>
-              <a:rPr lang="en-US" altLang="zh-TW" dirty="0" smtClean="0"/>
+              <a:rPr lang="en-US" altLang="zh-TW" dirty="0"/>
               <a:t>Part</a:t>
             </a:r>
             <a:r>
-              <a:rPr lang="zh-TW" altLang="en-US" dirty="0" smtClean="0"/>
+              <a:rPr lang="zh-TW" altLang="en-US" dirty="0"/>
               <a:t> </a:t>
             </a:r>
             <a:r>
-              <a:rPr lang="en-US" altLang="zh-TW" dirty="0" smtClean="0"/>
+              <a:rPr lang="en-US" altLang="zh-TW" dirty="0"/>
               <a:t>2:</a:t>
             </a:r>
             <a:r>
@@ -11491,11 +10793,11 @@
               <a:t>完成</a:t>
             </a:r>
             <a:r>
-              <a:rPr lang="en-US" altLang="zh-TW" dirty="0" smtClean="0"/>
+              <a:rPr lang="en-US" altLang="zh-TW" dirty="0"/>
               <a:t>histogram</a:t>
             </a:r>
             <a:r>
-              <a:rPr lang="zh-TW" altLang="en-US" dirty="0" smtClean="0"/>
+              <a:rPr lang="zh-TW" altLang="en-US" dirty="0"/>
               <a:t>與求出位置估計值</a:t>
             </a:r>
             <a:endParaRPr lang="en-US" altLang="zh-TW" dirty="0"/>
@@ -11505,274 +10807,220 @@
               <a:buNone/>
             </a:pPr>
             <a:r>
-              <a:rPr lang="zh-TW" altLang="en-US" dirty="0" smtClean="0">
+              <a:rPr lang="zh-TW" altLang="en-US" dirty="0">
                 <a:latin typeface="Century Gothic" panose="020B0502020202020204" pitchFamily="34" charset="0"/>
               </a:rPr>
               <a:t>●</a:t>
             </a:r>
             <a:r>
-              <a:rPr lang="en-US" altLang="zh-TW" dirty="0" smtClean="0"/>
+              <a:rPr lang="en-US" altLang="zh-TW" dirty="0"/>
               <a:t>Part</a:t>
             </a:r>
             <a:r>
-              <a:rPr lang="zh-TW" altLang="en-US" dirty="0" smtClean="0"/>
+              <a:rPr lang="zh-TW" altLang="en-US" dirty="0"/>
               <a:t> </a:t>
             </a:r>
             <a:r>
-              <a:rPr lang="en-US" altLang="zh-TW" dirty="0" smtClean="0"/>
-              <a:t>3</a:t>
+              <a:rPr lang="en-US" altLang="zh-TW" dirty="0"/>
+              <a:t>3:</a:t>
+            </a:r>
+            <a:r>
+              <a:rPr lang="zh-TW" altLang="en-US" dirty="0"/>
+              <a:t>完成一張影像的</a:t>
+            </a:r>
+            <a:r>
+              <a:rPr lang="en-US" altLang="zh-TW" dirty="0"/>
+              <a:t>(1)</a:t>
+            </a:r>
+            <a:r>
+              <a:rPr lang="zh-TW" altLang="en-US" dirty="0"/>
+              <a:t>原深度圖 </a:t>
+            </a:r>
+            <a:r>
+              <a:rPr lang="en-US" altLang="zh-TW" dirty="0"/>
+              <a:t>(2)</a:t>
+            </a:r>
+            <a:r>
+              <a:rPr lang="zh-TW" altLang="en-US" dirty="0"/>
+              <a:t>邊緣圖</a:t>
+            </a:r>
+            <a:r>
+              <a:rPr lang="en-US" altLang="zh-TW" dirty="0"/>
+              <a:t>(</a:t>
+            </a:r>
+            <a:r>
+              <a:rPr lang="zh-TW" altLang="en-US" dirty="0"/>
+              <a:t>黑底白邊</a:t>
+            </a:r>
+            <a:r>
+              <a:rPr lang="en-US" altLang="zh-TW" dirty="0"/>
+              <a:t>)</a:t>
+            </a:r>
+          </a:p>
+          <a:p>
+            <a:pPr marL="0" indent="0">
+              <a:buNone/>
+            </a:pPr>
+            <a:r>
+              <a:rPr lang="zh-TW" altLang="en-US" dirty="0">
+                <a:latin typeface="Century Gothic" panose="020B0502020202020204" pitchFamily="34" charset="0"/>
+              </a:rPr>
+              <a:t>●</a:t>
+            </a:r>
+            <a:r>
+              <a:rPr lang="en-US" altLang="zh-TW" dirty="0"/>
+              <a:t>Part</a:t>
+            </a:r>
+            <a:r>
+              <a:rPr lang="zh-TW" altLang="en-US" dirty="0"/>
+              <a:t> </a:t>
+            </a:r>
+            <a:r>
+              <a:rPr lang="en-US" altLang="zh-TW" dirty="0"/>
+              <a:t>4:</a:t>
+            </a:r>
+            <a:r>
+              <a:rPr lang="zh-TW" altLang="en-US" dirty="0"/>
+              <a:t>完成</a:t>
+            </a:r>
+            <a:r>
+              <a:rPr lang="en-US" altLang="zh-TW" dirty="0"/>
+              <a:t>(1)</a:t>
+            </a:r>
+            <a:r>
+              <a:rPr lang="zh-TW" altLang="en-US" dirty="0"/>
+              <a:t>合併前的圖片 </a:t>
+            </a:r>
+            <a:r>
+              <a:rPr lang="en-US" altLang="zh-TW" dirty="0"/>
+              <a:t>(2)</a:t>
+            </a:r>
+            <a:r>
+              <a:rPr lang="zh-TW" altLang="en-US" dirty="0"/>
+              <a:t>合併後的深度圖</a:t>
+            </a:r>
+            <a:r>
+              <a:rPr lang="en-US" altLang="zh-TW" dirty="0"/>
+              <a:t>(</a:t>
+            </a:r>
+            <a:r>
+              <a:rPr lang="zh-TW" altLang="en-US" dirty="0"/>
+              <a:t>彩色</a:t>
+            </a:r>
+            <a:r>
+              <a:rPr lang="en-US" altLang="zh-TW" dirty="0"/>
+              <a:t>/</a:t>
+            </a:r>
+            <a:r>
+              <a:rPr lang="zh-TW" altLang="en-US" dirty="0"/>
+              <a:t>灰階都可</a:t>
+            </a:r>
+            <a:r>
+              <a:rPr lang="en-US" altLang="zh-TW" dirty="0"/>
+              <a:t>)</a:t>
+            </a:r>
+            <a:r>
+              <a:rPr lang="zh-TW" altLang="en-US" dirty="0"/>
+              <a:t> </a:t>
+            </a:r>
+            <a:endParaRPr lang="en-US" altLang="zh-TW" dirty="0"/>
+          </a:p>
+          <a:p>
+            <a:pPr marL="0" indent="0">
+              <a:buNone/>
+            </a:pPr>
+            <a:r>
+              <a:rPr lang="en-US" altLang="zh-TW" dirty="0"/>
+              <a:t>(3)</a:t>
+            </a:r>
+            <a:r>
+              <a:rPr lang="zh-TW" altLang="en-US" dirty="0"/>
+              <a:t>合併後並轉視角深度圖</a:t>
+            </a:r>
+            <a:r>
+              <a:rPr lang="en-US" altLang="zh-TW" dirty="0"/>
+              <a:t>(</a:t>
+            </a:r>
+            <a:r>
+              <a:rPr lang="zh-TW" altLang="en-US" dirty="0"/>
+              <a:t>彩色</a:t>
+            </a:r>
+            <a:r>
+              <a:rPr lang="en-US" altLang="zh-TW" dirty="0"/>
+              <a:t>/</a:t>
+            </a:r>
+            <a:r>
+              <a:rPr lang="zh-TW" altLang="en-US" dirty="0"/>
+              <a:t>灰階都可</a:t>
+            </a:r>
+            <a:r>
+              <a:rPr lang="en-US" altLang="zh-TW" dirty="0"/>
+              <a:t>)</a:t>
+            </a:r>
+            <a:r>
+              <a:rPr lang="zh-TW" altLang="en-US" dirty="0"/>
+              <a:t> </a:t>
+            </a:r>
+            <a:endParaRPr lang="en-US" altLang="zh-TW" dirty="0"/>
+          </a:p>
+          <a:p>
+            <a:pPr marL="0" indent="0">
+              <a:buNone/>
+            </a:pPr>
+            <a:r>
+              <a:rPr lang="en-US" altLang="zh-TW" dirty="0"/>
+              <a:t>(4)</a:t>
+            </a:r>
+            <a:r>
+              <a:rPr lang="zh-TW" altLang="en-US" dirty="0"/>
+              <a:t>合併後的邊緣圖</a:t>
+            </a:r>
+            <a:endParaRPr lang="en-US" altLang="zh-TW" dirty="0">
+              <a:latin typeface="Century Gothic" panose="020B0502020202020204" pitchFamily="34" charset="0"/>
+            </a:endParaRPr>
+          </a:p>
+          <a:p>
+            <a:pPr marL="0" indent="0">
+              <a:buNone/>
+            </a:pPr>
+            <a:endParaRPr lang="en-US" altLang="zh-TW" dirty="0">
+              <a:latin typeface="Century Gothic" panose="020B0502020202020204" pitchFamily="34" charset="0"/>
+            </a:endParaRPr>
+          </a:p>
+          <a:p>
+            <a:pPr marL="0" indent="0">
+              <a:buNone/>
+            </a:pPr>
+            <a:r>
+              <a:rPr lang="zh-TW" altLang="en-US" dirty="0">
+                <a:latin typeface="Century Gothic" panose="020B0502020202020204" pitchFamily="34" charset="0"/>
+              </a:rPr>
+              <a:t>●</a:t>
+            </a:r>
+            <a:r>
+              <a:rPr lang="zh-TW" altLang="en-US" dirty="0"/>
+              <a:t>問題與討論</a:t>
             </a:r>
             <a:r>
               <a:rPr lang="en-US" altLang="zh-TW" dirty="0"/>
               <a:t>:</a:t>
             </a:r>
-            <a:r>
-              <a:rPr lang="zh-TW" altLang="en-US" dirty="0" smtClean="0"/>
-              <a:t>完成一張影像的</a:t>
-            </a:r>
-            <a:r>
-              <a:rPr lang="en-US" altLang="zh-TW" dirty="0" smtClean="0"/>
+          </a:p>
+          <a:p>
+            <a:pPr marL="0" indent="0">
+              <a:buNone/>
+            </a:pPr>
+            <a:r>
+              <a:rPr lang="en-US" altLang="zh-TW" dirty="0">
+                <a:cs typeface="Arial" panose="020B0604020202020204" pitchFamily="34" charset="0"/>
+              </a:rPr>
               <a:t>(1)</a:t>
-            </a:r>
-            <a:r>
-              <a:rPr lang="zh-TW" altLang="en-US" dirty="0"/>
-              <a:t>原深度</a:t>
-            </a:r>
-            <a:r>
-              <a:rPr lang="zh-TW" altLang="en-US" dirty="0" smtClean="0"/>
-              <a:t>圖 </a:t>
-            </a:r>
-            <a:r>
-              <a:rPr lang="en-US" altLang="zh-TW" dirty="0" smtClean="0"/>
-              <a:t>(2)</a:t>
-            </a:r>
-            <a:r>
-              <a:rPr lang="zh-TW" altLang="en-US" dirty="0" smtClean="0"/>
-              <a:t>邊緣圖</a:t>
-            </a:r>
-            <a:r>
-              <a:rPr lang="en-US" altLang="zh-TW" dirty="0" smtClean="0"/>
-              <a:t>(</a:t>
-            </a:r>
-            <a:r>
-              <a:rPr lang="zh-TW" altLang="en-US" dirty="0" smtClean="0"/>
-              <a:t>黑</a:t>
-            </a:r>
-            <a:r>
-              <a:rPr lang="zh-TW" altLang="en-US" dirty="0"/>
-              <a:t>底</a:t>
-            </a:r>
-            <a:r>
-              <a:rPr lang="zh-TW" altLang="en-US" dirty="0" smtClean="0"/>
-              <a:t>白邊</a:t>
-            </a:r>
-            <a:r>
-              <a:rPr lang="en-US" altLang="zh-TW" dirty="0" smtClean="0"/>
-              <a:t>)</a:t>
-            </a:r>
-          </a:p>
-          <a:p>
-            <a:pPr marL="0" indent="0">
-              <a:buNone/>
-            </a:pPr>
-            <a:r>
-              <a:rPr lang="zh-TW" altLang="en-US" dirty="0" smtClean="0">
-                <a:latin typeface="Century Gothic" panose="020B0502020202020204" pitchFamily="34" charset="0"/>
-              </a:rPr>
-              <a:t>●</a:t>
-            </a:r>
-            <a:r>
-              <a:rPr lang="en-US" altLang="zh-TW" dirty="0" smtClean="0"/>
-              <a:t>Part</a:t>
-            </a:r>
-            <a:r>
-              <a:rPr lang="zh-TW" altLang="en-US" dirty="0" smtClean="0"/>
-              <a:t> </a:t>
-            </a:r>
-            <a:r>
-              <a:rPr lang="en-US" altLang="zh-TW" dirty="0" smtClean="0"/>
-              <a:t>4:</a:t>
-            </a:r>
-            <a:r>
-              <a:rPr lang="zh-TW" altLang="en-US" dirty="0" smtClean="0"/>
-              <a:t>完成</a:t>
-            </a:r>
-            <a:r>
-              <a:rPr lang="en-US" altLang="zh-TW" dirty="0" smtClean="0"/>
-              <a:t>(1)</a:t>
-            </a:r>
-            <a:r>
-              <a:rPr lang="zh-TW" altLang="en-US" dirty="0" smtClean="0"/>
-              <a:t>合併前的圖片</a:t>
-            </a:r>
-            <a:r>
-              <a:rPr lang="zh-TW" altLang="en-US" dirty="0"/>
-              <a:t> </a:t>
-            </a:r>
-            <a:r>
-              <a:rPr lang="en-US" altLang="zh-TW" dirty="0" smtClean="0"/>
-              <a:t>(2)</a:t>
-            </a:r>
-            <a:r>
-              <a:rPr lang="zh-TW" altLang="en-US" dirty="0" smtClean="0"/>
-              <a:t>合併</a:t>
-            </a:r>
-            <a:r>
-              <a:rPr lang="zh-TW" altLang="en-US" dirty="0"/>
-              <a:t>後的深度圖</a:t>
-            </a:r>
-            <a:r>
-              <a:rPr lang="en-US" altLang="zh-TW" dirty="0"/>
-              <a:t>(</a:t>
-            </a:r>
-            <a:r>
-              <a:rPr lang="zh-TW" altLang="en-US" dirty="0" smtClean="0"/>
-              <a:t>彩色</a:t>
-            </a:r>
-            <a:r>
-              <a:rPr lang="en-US" altLang="zh-TW" dirty="0" smtClean="0"/>
-              <a:t>/</a:t>
-            </a:r>
-            <a:r>
-              <a:rPr lang="zh-TW" altLang="en-US" dirty="0" smtClean="0"/>
-              <a:t>灰階</a:t>
-            </a:r>
-            <a:r>
-              <a:rPr lang="zh-TW" altLang="en-US" dirty="0"/>
-              <a:t>都可</a:t>
-            </a:r>
-            <a:r>
-              <a:rPr lang="en-US" altLang="zh-TW" dirty="0"/>
-              <a:t>)</a:t>
-            </a:r>
-            <a:r>
-              <a:rPr lang="zh-TW" altLang="en-US" dirty="0"/>
-              <a:t> </a:t>
-            </a:r>
-            <a:endParaRPr lang="en-US" altLang="zh-TW" dirty="0" smtClean="0"/>
-          </a:p>
-          <a:p>
-            <a:pPr marL="0" indent="0">
-              <a:buNone/>
-            </a:pPr>
-            <a:r>
-              <a:rPr lang="en-US" altLang="zh-TW" dirty="0" smtClean="0"/>
-              <a:t>(</a:t>
-            </a:r>
-            <a:r>
-              <a:rPr lang="en-US" altLang="zh-TW" dirty="0"/>
-              <a:t>3)</a:t>
-            </a:r>
-            <a:r>
-              <a:rPr lang="zh-TW" altLang="en-US" dirty="0"/>
-              <a:t>合併後並轉視角深度圖</a:t>
-            </a:r>
-            <a:r>
-              <a:rPr lang="en-US" altLang="zh-TW" dirty="0"/>
-              <a:t>(</a:t>
-            </a:r>
-            <a:r>
-              <a:rPr lang="zh-TW" altLang="en-US" dirty="0"/>
-              <a:t>彩色</a:t>
-            </a:r>
-            <a:r>
-              <a:rPr lang="en-US" altLang="zh-TW" dirty="0"/>
-              <a:t>/</a:t>
-            </a:r>
-            <a:r>
-              <a:rPr lang="zh-TW" altLang="en-US" dirty="0"/>
-              <a:t>灰階都可</a:t>
-            </a:r>
-            <a:r>
-              <a:rPr lang="en-US" altLang="zh-TW" dirty="0"/>
-              <a:t>)</a:t>
-            </a:r>
-            <a:r>
-              <a:rPr lang="zh-TW" altLang="en-US" dirty="0"/>
-              <a:t> </a:t>
-            </a:r>
-            <a:endParaRPr lang="en-US" altLang="zh-TW" dirty="0"/>
-          </a:p>
-          <a:p>
-            <a:pPr marL="0" indent="0">
-              <a:buNone/>
-            </a:pPr>
-            <a:r>
-              <a:rPr lang="en-US" altLang="zh-TW" dirty="0" smtClean="0"/>
-              <a:t>(4)</a:t>
-            </a:r>
-            <a:r>
-              <a:rPr lang="zh-TW" altLang="en-US" dirty="0" smtClean="0"/>
-              <a:t>合併</a:t>
-            </a:r>
-            <a:r>
-              <a:rPr lang="zh-TW" altLang="en-US" dirty="0"/>
-              <a:t>後的邊緣</a:t>
-            </a:r>
-            <a:r>
-              <a:rPr lang="zh-TW" altLang="en-US" dirty="0" smtClean="0"/>
-              <a:t>圖</a:t>
-            </a:r>
-            <a:endParaRPr lang="en-US" altLang="zh-TW" dirty="0" smtClean="0">
-              <a:latin typeface="Century Gothic" panose="020B0502020202020204" pitchFamily="34" charset="0"/>
-            </a:endParaRPr>
-          </a:p>
-          <a:p>
-            <a:pPr marL="0" indent="0">
-              <a:buNone/>
-            </a:pPr>
-            <a:endParaRPr lang="en-US" altLang="zh-TW" dirty="0" smtClean="0">
-              <a:latin typeface="Century Gothic" panose="020B0502020202020204" pitchFamily="34" charset="0"/>
-            </a:endParaRPr>
-          </a:p>
-          <a:p>
-            <a:pPr marL="0" indent="0">
-              <a:buNone/>
-            </a:pPr>
-            <a:r>
-              <a:rPr lang="zh-TW" altLang="en-US" dirty="0" smtClean="0">
-                <a:latin typeface="Century Gothic" panose="020B0502020202020204" pitchFamily="34" charset="0"/>
-              </a:rPr>
-              <a:t>●</a:t>
-            </a:r>
-            <a:r>
-              <a:rPr lang="zh-TW" altLang="en-US" dirty="0" smtClean="0"/>
-              <a:t>問題</a:t>
-            </a:r>
-            <a:r>
-              <a:rPr lang="zh-TW" altLang="en-US" dirty="0"/>
-              <a:t>與</a:t>
-            </a:r>
-            <a:r>
-              <a:rPr lang="zh-TW" altLang="en-US" dirty="0" smtClean="0"/>
-              <a:t>討論</a:t>
-            </a:r>
-            <a:r>
-              <a:rPr lang="en-US" altLang="zh-TW" dirty="0" smtClean="0"/>
-              <a:t>:</a:t>
-            </a:r>
-          </a:p>
-          <a:p>
-            <a:pPr marL="0" indent="0">
-              <a:buNone/>
-            </a:pPr>
-            <a:r>
-              <a:rPr lang="en-US" altLang="zh-TW" dirty="0" smtClean="0">
-                <a:cs typeface="Arial" panose="020B0604020202020204" pitchFamily="34" charset="0"/>
-              </a:rPr>
-              <a:t>(1)</a:t>
-            </a:r>
-            <a:r>
-              <a:rPr lang="zh-TW" altLang="en-US" dirty="0" smtClean="0">
-                <a:cs typeface="Arial" panose="020B0604020202020204" pitchFamily="34" charset="0"/>
-              </a:rPr>
-              <a:t>接收</a:t>
             </a:r>
             <a:r>
               <a:rPr lang="zh-TW" altLang="en-US" dirty="0">
                 <a:cs typeface="Arial" panose="020B0604020202020204" pitchFamily="34" charset="0"/>
               </a:rPr>
-              <a:t>到複數光子只取第一個是否合理 或什麼條件下適合或不適合使用這個方法</a:t>
+              <a:t>接收到複數光子只取第一個是否合理 或什麼條件下適合或不適合使用這個方法</a:t>
             </a:r>
             <a:endParaRPr lang="en-US" altLang="zh-TW" dirty="0">
               <a:cs typeface="Arial" panose="020B0604020202020204" pitchFamily="34" charset="0"/>
@@ -11783,45 +11031,39 @@
               <a:buNone/>
             </a:pPr>
             <a:r>
-              <a:rPr lang="en-US" altLang="zh-TW" dirty="0" smtClean="0">
+              <a:rPr lang="en-US" altLang="zh-TW" dirty="0">
                 <a:cs typeface="Arial" panose="020B0604020202020204" pitchFamily="34" charset="0"/>
               </a:rPr>
               <a:t>(2)</a:t>
-            </a:r>
-            <a:r>
-              <a:rPr lang="zh-TW" altLang="en-US" dirty="0" smtClean="0">
-                <a:cs typeface="Arial" panose="020B0604020202020204" pitchFamily="34" charset="0"/>
-              </a:rPr>
-              <a:t>解釋</a:t>
-            </a:r>
-            <a:r>
-              <a:rPr lang="en-US" altLang="zh-TW" dirty="0" smtClean="0">
-                <a:cs typeface="Arial" panose="020B0604020202020204" pitchFamily="34" charset="0"/>
-              </a:rPr>
-              <a:t>Part 2</a:t>
-            </a:r>
-            <a:r>
-              <a:rPr lang="zh-TW" altLang="en-US" dirty="0" smtClean="0">
-                <a:cs typeface="Arial" panose="020B0604020202020204" pitchFamily="34" charset="0"/>
-              </a:rPr>
-              <a:t> </a:t>
             </a:r>
             <a:r>
               <a:rPr lang="zh-TW" altLang="en-US" dirty="0">
                 <a:cs typeface="Arial" panose="020B0604020202020204" pitchFamily="34" charset="0"/>
               </a:rPr>
-              <a:t>挑選</a:t>
+              <a:t>解釋</a:t>
             </a:r>
             <a:r>
               <a:rPr lang="en-US" altLang="zh-TW" dirty="0">
                 <a:cs typeface="Arial" panose="020B0604020202020204" pitchFamily="34" charset="0"/>
               </a:rPr>
-              <a:t>window</a:t>
+              <a:t>Part 2</a:t>
             </a:r>
             <a:r>
               <a:rPr lang="zh-TW" altLang="en-US" dirty="0">
                 <a:cs typeface="Arial" panose="020B0604020202020204" pitchFamily="34" charset="0"/>
               </a:rPr>
+              <a:t> 挑選</a:t>
+            </a:r>
+            <a:r>
+              <a:rPr lang="en-US" altLang="zh-TW" dirty="0">
+                <a:cs typeface="Arial" panose="020B0604020202020204" pitchFamily="34" charset="0"/>
+              </a:rPr>
+              <a:t>window</a:t>
+            </a:r>
+            <a:r>
+              <a:rPr lang="zh-TW" altLang="en-US" dirty="0">
+                <a:cs typeface="Arial" panose="020B0604020202020204" pitchFamily="34" charset="0"/>
+              </a:rPr>
               <a:t>的大小及理由</a:t>
             </a:r>
             <a:endParaRPr lang="en-US" altLang="zh-TW" dirty="0"/>
@@ -11831,53 +11073,13 @@
               <a:buNone/>
             </a:pPr>
             <a:r>
-              <a:rPr lang="en-US" altLang="zh-TW" dirty="0" smtClean="0">
+              <a:rPr lang="en-US" altLang="zh-TW" dirty="0">
                 <a:cs typeface="Arial" panose="020B0604020202020204" pitchFamily="34" charset="0"/>
               </a:rPr>
               <a:t>(3)</a:t>
             </a:r>
             <a:r>
-              <a:rPr lang="zh-TW" altLang="en-US" dirty="0" smtClean="0"/>
-              <a:t>簡單解釋</a:t>
-            </a:r>
-            <a:r>
-              <a:rPr lang="en-US" altLang="zh-TW" dirty="0" smtClean="0"/>
-              <a:t>Part</a:t>
-            </a:r>
-            <a:r>
-              <a:rPr lang="zh-TW" altLang="en-US" dirty="0" smtClean="0"/>
-              <a:t> </a:t>
-            </a:r>
-            <a:r>
-              <a:rPr lang="en-US" altLang="zh-TW" dirty="0" smtClean="0"/>
-              <a:t>3</a:t>
-            </a:r>
-            <a:r>
               <a:rPr lang="zh-TW" altLang="en-US" dirty="0"/>
-              <a:t>選</a:t>
-            </a:r>
-            <a:r>
-              <a:rPr lang="zh-TW" altLang="en-US" dirty="0" smtClean="0"/>
-              <a:t>用</a:t>
-            </a:r>
-            <a:r>
-              <a:rPr lang="zh-TW" altLang="en-US" dirty="0"/>
-              <a:t>的方法 並評估這個方法的優勢與缺點</a:t>
-            </a:r>
-            <a:endParaRPr lang="en-US" altLang="zh-TW" dirty="0"/>
-          </a:p>
-          <a:p>
-            <a:pPr marL="0" indent="0">
-              <a:buNone/>
-            </a:pPr>
-            <a:r>
-              <a:rPr lang="en-US" altLang="zh-TW" dirty="0" smtClean="0">
-                <a:cs typeface="Arial" panose="020B0604020202020204" pitchFamily="34" charset="0"/>
-              </a:rPr>
-              <a:t>(4)</a:t>
-            </a:r>
-            <a:r>
-              <a:rPr lang="zh-TW" altLang="en-US" dirty="0" smtClean="0"/>
               <a:t>簡單解釋</a:t>
             </a:r>
             <a:r>
@@ -11889,40 +11091,60 @@
               <a:t> </a:t>
             </a:r>
             <a:r>
-              <a:rPr lang="en-US" altLang="zh-TW" dirty="0" smtClean="0"/>
+              <a:rPr lang="en-US" altLang="zh-TW" dirty="0"/>
+              <a:t>3</a:t>
+            </a:r>
+            <a:r>
+              <a:rPr lang="zh-TW" altLang="en-US" dirty="0"/>
+              <a:t>選用的方法 並評估這個方法的優勢與缺點</a:t>
+            </a:r>
+            <a:endParaRPr lang="en-US" altLang="zh-TW" dirty="0"/>
+          </a:p>
+          <a:p>
+            <a:pPr marL="0" indent="0">
+              <a:buNone/>
+            </a:pPr>
+            <a:r>
+              <a:rPr lang="en-US" altLang="zh-TW" dirty="0">
+                <a:cs typeface="Arial" panose="020B0604020202020204" pitchFamily="34" charset="0"/>
+              </a:rPr>
+              <a:t>(4)</a:t>
+            </a:r>
+            <a:r>
+              <a:rPr lang="zh-TW" altLang="en-US" dirty="0"/>
+              <a:t>簡單解釋</a:t>
+            </a:r>
+            <a:r>
+              <a:rPr lang="en-US" altLang="zh-TW" dirty="0"/>
+              <a:t>Part</a:t>
+            </a:r>
+            <a:r>
+              <a:rPr lang="zh-TW" altLang="en-US" dirty="0"/>
+              <a:t> </a:t>
+            </a:r>
+            <a:r>
+              <a:rPr lang="en-US" altLang="zh-TW" dirty="0"/>
               <a:t>4</a:t>
             </a:r>
             <a:r>
               <a:rPr lang="zh-TW" altLang="en-US" dirty="0"/>
-              <a:t>選</a:t>
-            </a:r>
-            <a:r>
-              <a:rPr lang="zh-TW" altLang="en-US" dirty="0" smtClean="0"/>
-              <a:t>用</a:t>
+              <a:t>選用的方法 並評估這個方法的優勢與缺點</a:t>
+            </a:r>
+            <a:endParaRPr lang="en-US" altLang="zh-TW" dirty="0"/>
+          </a:p>
+          <a:p>
+            <a:pPr marL="0" indent="0">
+              <a:buNone/>
+            </a:pPr>
+            <a:r>
+              <a:rPr lang="en-US" altLang="zh-TW" dirty="0">
+                <a:cs typeface="Arial" panose="020B0604020202020204" pitchFamily="34" charset="0"/>
+              </a:rPr>
+              <a:t>(5)</a:t>
             </a:r>
             <a:r>
               <a:rPr lang="zh-TW" altLang="en-US" dirty="0"/>
-              <a:t>的方法 並評估這個方法的優勢與缺點</a:t>
-            </a:r>
-            <a:endParaRPr lang="en-US" altLang="zh-TW" dirty="0"/>
-          </a:p>
-          <a:p>
-            <a:pPr marL="0" indent="0">
-              <a:buNone/>
-            </a:pPr>
-            <a:r>
-              <a:rPr lang="en-US" altLang="zh-TW" dirty="0" smtClean="0">
-                <a:cs typeface="Arial" panose="020B0604020202020204" pitchFamily="34" charset="0"/>
-              </a:rPr>
-              <a:t>(5)</a:t>
-            </a:r>
-            <a:r>
-              <a:rPr lang="zh-TW" altLang="en-US" dirty="0" smtClean="0"/>
-              <a:t>對</a:t>
-            </a:r>
-            <a:r>
-              <a:rPr lang="zh-TW" altLang="en-US" dirty="0"/>
-              <a:t>這次實驗的建議 或拿光達做什麼樣的實驗</a:t>
+              <a:t>對這次實驗的建議 或拿光達做什麼樣的實驗</a:t>
             </a:r>
             <a:r>
               <a:rPr lang="en-US" altLang="zh-TW" dirty="0"/>
@@ -11961,13 +11183,6 @@
   <p:clrMapOvr>
     <a:masterClrMapping/>
   </p:clrMapOvr>
-  <p:timing>
-    <p:tnLst>
-      <p:par>
-        <p:cTn id="1" dur="indefinite" restart="never" nodeType="tmRoot"/>
-      </p:par>
-    </p:tnLst>
-  </p:timing>
 </p:sld>
 </file>
 
@@ -12055,24 +11270,20 @@
               <a:buNone/>
             </a:pPr>
             <a:r>
-              <a:rPr lang="en-US" altLang="zh-TW" sz="2000" dirty="0" smtClean="0"/>
+              <a:rPr lang="en-US" altLang="zh-TW" sz="2000" dirty="0"/>
               <a:t>Part</a:t>
             </a:r>
             <a:r>
-              <a:rPr lang="zh-TW" altLang="en-US" sz="2000" dirty="0" smtClean="0"/>
+              <a:rPr lang="zh-TW" altLang="en-US" sz="2000" dirty="0"/>
               <a:t> </a:t>
             </a:r>
             <a:r>
-              <a:rPr lang="en-US" altLang="zh-TW" sz="2000" dirty="0" smtClean="0"/>
+              <a:rPr lang="en-US" altLang="zh-TW" sz="2000" dirty="0"/>
               <a:t>1:</a:t>
             </a:r>
             <a:r>
-              <a:rPr lang="zh-TW" altLang="en-US" sz="2000" dirty="0" smtClean="0"/>
-              <a:t>用</a:t>
-            </a:r>
-            <a:r>
               <a:rPr lang="zh-TW" altLang="en-US" sz="2000" dirty="0"/>
-              <a:t>提供的資料製作</a:t>
+              <a:t>用提供的資料製作</a:t>
             </a:r>
             <a:r>
               <a:rPr lang="en-US" altLang="zh-TW" sz="2000" dirty="0"/>
@@ -12080,11 +11291,7 @@
             </a:r>
             <a:r>
               <a:rPr lang="zh-TW" altLang="en-US" sz="2000" dirty="0"/>
-              <a:t>，並且直接找出目標的</a:t>
-            </a:r>
-            <a:r>
-              <a:rPr lang="zh-TW" altLang="en-US" sz="2000" dirty="0" smtClean="0"/>
-              <a:t>距離</a:t>
+              <a:t>，並且直接找出目標的距離</a:t>
             </a:r>
             <a:endParaRPr lang="en-US" altLang="zh-TW" sz="2000" dirty="0"/>
           </a:p>
@@ -12093,24 +11300,20 @@
               <a:buNone/>
             </a:pPr>
             <a:r>
-              <a:rPr lang="en-US" altLang="zh-TW" sz="2000" dirty="0" smtClean="0"/>
+              <a:rPr lang="en-US" altLang="zh-TW" sz="2000" dirty="0"/>
               <a:t>Part</a:t>
             </a:r>
             <a:r>
-              <a:rPr lang="zh-TW" altLang="en-US" sz="2000" dirty="0" smtClean="0"/>
+              <a:rPr lang="zh-TW" altLang="en-US" sz="2000" dirty="0"/>
               <a:t> </a:t>
             </a:r>
             <a:r>
-              <a:rPr lang="en-US" altLang="zh-TW" sz="2000" dirty="0" smtClean="0"/>
+              <a:rPr lang="en-US" altLang="zh-TW" sz="2000" dirty="0"/>
               <a:t>2:</a:t>
             </a:r>
             <a:r>
-              <a:rPr lang="zh-TW" altLang="en-US" sz="2000" dirty="0" smtClean="0"/>
-              <a:t>用</a:t>
-            </a:r>
-            <a:r>
               <a:rPr lang="zh-TW" altLang="en-US" sz="2000" dirty="0"/>
-              <a:t>提供的資料來製作</a:t>
+              <a:t>用提供的資料來製作</a:t>
             </a:r>
             <a:r>
               <a:rPr lang="en-US" altLang="zh-TW" sz="2000" dirty="0"/>
@@ -12126,73 +11329,36 @@
             </a:r>
             <a:r>
               <a:rPr lang="zh-TW" altLang="en-US" sz="2000" dirty="0"/>
-              <a:t>加上取質心的方式來</a:t>
-            </a:r>
-            <a:r>
-              <a:rPr lang="zh-TW" altLang="en-US" sz="2000" dirty="0" smtClean="0"/>
-              <a:t>找</a:t>
+              <a:t>加上取質心的方式來找  目標的距離</a:t>
+            </a:r>
+            <a:endParaRPr lang="en-US" altLang="zh-TW" sz="2000" dirty="0"/>
+          </a:p>
+          <a:p>
+            <a:pPr marL="0" indent="0">
+              <a:buNone/>
+            </a:pPr>
+            <a:r>
+              <a:rPr lang="en-US" altLang="zh-TW" sz="2000" dirty="0"/>
+              <a:t>Part 3:</a:t>
             </a:r>
             <a:r>
               <a:rPr lang="zh-TW" altLang="en-US" sz="2000" dirty="0"/>
-              <a:t> </a:t>
-            </a:r>
-            <a:r>
-              <a:rPr lang="zh-TW" altLang="en-US" sz="2000" dirty="0" smtClean="0"/>
-              <a:t> 目標</a:t>
+              <a:t>製作邊緣圖，找出物體輪廓</a:t>
+            </a:r>
+            <a:endParaRPr lang="en-US" altLang="zh-TW" sz="2000" dirty="0"/>
+          </a:p>
+          <a:p>
+            <a:pPr marL="0" indent="0">
+              <a:buNone/>
+            </a:pPr>
+            <a:r>
+              <a:rPr lang="en-US" altLang="zh-TW" sz="2000" dirty="0"/>
+              <a:t>Part 4:</a:t>
             </a:r>
             <a:r>
               <a:rPr lang="zh-TW" altLang="en-US" sz="2000" dirty="0"/>
-              <a:t>的</a:t>
-            </a:r>
-            <a:r>
-              <a:rPr lang="zh-TW" altLang="en-US" sz="2000" dirty="0" smtClean="0"/>
-              <a:t>距離</a:t>
-            </a:r>
-            <a:endParaRPr lang="en-US" altLang="zh-TW" sz="2000" dirty="0"/>
-          </a:p>
-          <a:p>
-            <a:pPr marL="0" indent="0">
-              <a:buNone/>
-            </a:pPr>
-            <a:r>
-              <a:rPr lang="en-US" altLang="zh-TW" sz="2000" dirty="0" smtClean="0"/>
-              <a:t>Part 3:</a:t>
-            </a:r>
-            <a:r>
-              <a:rPr lang="zh-TW" altLang="en-US" sz="2000" dirty="0" smtClean="0"/>
-              <a:t>製作邊緣圖，找出</a:t>
-            </a:r>
-            <a:r>
-              <a:rPr lang="zh-TW" altLang="en-US" sz="2000" dirty="0"/>
-              <a:t>物體</a:t>
-            </a:r>
-            <a:r>
-              <a:rPr lang="zh-TW" altLang="en-US" sz="2000" dirty="0" smtClean="0"/>
-              <a:t>輪廓</a:t>
-            </a:r>
-            <a:endParaRPr lang="en-US" altLang="zh-TW" sz="2000" dirty="0"/>
-          </a:p>
-          <a:p>
-            <a:pPr marL="0" indent="0">
-              <a:buNone/>
-            </a:pPr>
-            <a:r>
-              <a:rPr lang="en-US" altLang="zh-TW" sz="2000" dirty="0" smtClean="0"/>
-              <a:t>Part 4:</a:t>
-            </a:r>
-            <a:r>
-              <a:rPr lang="zh-TW" altLang="en-US" sz="2000" dirty="0" smtClean="0"/>
-              <a:t>合併圖片，做出</a:t>
-            </a:r>
-            <a:r>
-              <a:rPr lang="zh-TW" altLang="en-US" sz="2000" dirty="0"/>
-              <a:t>不同角度看的</a:t>
-            </a:r>
-            <a:r>
-              <a:rPr lang="zh-TW" altLang="en-US" sz="2000" dirty="0" smtClean="0"/>
-              <a:t>效果</a:t>
-            </a:r>
-            <a:endParaRPr lang="zh-TW" altLang="en-US" sz="2000" dirty="0"/>
+              <a:t>合併圖片，做出不同角度看的效果</a:t>
+            </a:r>
           </a:p>
         </p:txBody>
       </p:sp>
@@ -12206,13 +11372,6 @@
   <p:clrMapOvr>
     <a:masterClrMapping/>
   </p:clrMapOvr>
-  <p:timing>
-    <p:tnLst>
-      <p:par>
-        <p:cTn id="1" dur="indefinite" restart="never" nodeType="tmRoot"/>
-      </p:par>
-    </p:tnLst>
-  </p:timing>
 </p:sld>
 </file>
 
@@ -12276,13 +11435,6 @@
   <p:clrMapOvr>
     <a:masterClrMapping/>
   </p:clrMapOvr>
-  <p:timing>
-    <p:tnLst>
-      <p:par>
-        <p:cTn id="1" dur="indefinite" restart="never" nodeType="tmRoot"/>
-      </p:par>
-    </p:tnLst>
-  </p:timing>
 </p:sld>
 </file>
 
@@ -12327,7 +11479,7 @@
           <a:lstStyle/>
           <a:p>
             <a:r>
-              <a:rPr lang="zh-TW" altLang="en-US" sz="4000" dirty="0" smtClean="0"/>
+              <a:rPr lang="zh-TW" altLang="en-US" sz="4000" dirty="0"/>
               <a:t>光達</a:t>
             </a:r>
             <a:r>
@@ -12335,10 +11487,9 @@
               <a:t>(LiDAR)</a:t>
             </a:r>
             <a:r>
-              <a:rPr lang="zh-TW" altLang="en-US" sz="4000" dirty="0" smtClean="0"/>
+              <a:rPr lang="zh-TW" altLang="en-US" sz="4000" dirty="0"/>
               <a:t>測距原理</a:t>
             </a:r>
-            <a:endParaRPr lang="zh-TW" altLang="en-US" sz="4000" dirty="0"/>
           </a:p>
         </p:txBody>
       </p:sp>
@@ -12372,17 +11523,17 @@
               <a:buNone/>
             </a:pPr>
             <a:r>
-              <a:rPr lang="zh-TW" altLang="en-US" sz="2000" dirty="0" smtClean="0">
+              <a:rPr lang="zh-TW" altLang="en-US" sz="2000" dirty="0">
                 <a:latin typeface="Century Gothic" panose="020B0502020202020204" pitchFamily="34" charset="0"/>
               </a:rPr>
               <a:t>●</a:t>
             </a:r>
             <a:r>
-              <a:rPr lang="zh-TW" altLang="en-US" sz="2000" dirty="0" smtClean="0"/>
+              <a:rPr lang="zh-TW" altLang="en-US" sz="2000" dirty="0"/>
               <a:t>資料說明</a:t>
             </a:r>
             <a:r>
-              <a:rPr lang="en-US" altLang="zh-TW" sz="2000" dirty="0" smtClean="0"/>
+              <a:rPr lang="en-US" altLang="zh-TW" sz="2000" dirty="0"/>
               <a:t>:</a:t>
             </a:r>
           </a:p>
@@ -12391,23 +11542,15 @@
               <a:buNone/>
             </a:pPr>
             <a:r>
-              <a:rPr lang="en-US" altLang="zh-TW" sz="2000" dirty="0" smtClean="0"/>
-              <a:t>(1)</a:t>
-            </a:r>
-            <a:r>
               <a:rPr lang="en-US" altLang="zh-TW" sz="2000" dirty="0"/>
-              <a:t> part1_emit_times_ps</a:t>
+              <a:t>(1) part1_emit_times_ps</a:t>
             </a:r>
             <a:r>
               <a:rPr lang="zh-TW" altLang="en-US" sz="2000" dirty="0"/>
-              <a:t> 發射</a:t>
-            </a:r>
-            <a:r>
-              <a:rPr lang="zh-TW" altLang="en-US" sz="2000" dirty="0" smtClean="0"/>
-              <a:t>時間</a:t>
-            </a:r>
-            <a:r>
-              <a:rPr lang="en-US" altLang="zh-TW" sz="2000" dirty="0" smtClean="0"/>
+              <a:t> 發射時間</a:t>
+            </a:r>
+            <a:r>
+              <a:rPr lang="en-US" altLang="zh-TW" sz="2000" dirty="0"/>
               <a:t>(</a:t>
             </a:r>
             <a:r>
@@ -12416,11 +11559,7 @@
             </a:r>
             <a:r>
               <a:rPr lang="en-US" altLang="zh-TW" sz="2000" dirty="0"/>
-              <a:t>:100ps</a:t>
-            </a:r>
-            <a:r>
-              <a:rPr lang="en-US" altLang="zh-TW" sz="2000" dirty="0" smtClean="0"/>
-              <a:t>)</a:t>
+              <a:t>:100ps)</a:t>
             </a:r>
           </a:p>
           <a:p>
@@ -12428,23 +11567,15 @@
               <a:buNone/>
             </a:pPr>
             <a:r>
-              <a:rPr lang="en-US" altLang="zh-TW" sz="2000" dirty="0" smtClean="0"/>
-              <a:t>(2)</a:t>
-            </a:r>
-            <a:r>
               <a:rPr lang="en-US" altLang="zh-TW" sz="2000" dirty="0"/>
-              <a:t> part1_receive_times_ps </a:t>
+              <a:t>(2) part1_receive_times_ps </a:t>
             </a:r>
             <a:r>
               <a:rPr lang="zh-TW" altLang="en-US" sz="2000" dirty="0"/>
-              <a:t>接收訊號</a:t>
-            </a:r>
-            <a:r>
-              <a:rPr lang="zh-TW" altLang="en-US" sz="2000" dirty="0" smtClean="0"/>
-              <a:t>時間</a:t>
-            </a:r>
-            <a:r>
-              <a:rPr lang="en-US" altLang="zh-TW" sz="2000" dirty="0" smtClean="0"/>
+              <a:t>接收訊號時間</a:t>
+            </a:r>
+            <a:r>
+              <a:rPr lang="en-US" altLang="zh-TW" sz="2000" dirty="0"/>
               <a:t>(</a:t>
             </a:r>
             <a:r>
@@ -12460,7 +11591,7 @@
             <a:pPr marL="0" indent="0">
               <a:buNone/>
             </a:pPr>
-            <a:endParaRPr lang="en-US" altLang="zh-TW" sz="2000" dirty="0" smtClean="0">
+            <a:endParaRPr lang="en-US" altLang="zh-TW" sz="2000" dirty="0">
               <a:latin typeface="Century Gothic" panose="020B0502020202020204" pitchFamily="34" charset="0"/>
             </a:endParaRPr>
           </a:p>
@@ -12469,38 +11600,20 @@
               <a:buNone/>
             </a:pPr>
             <a:r>
-              <a:rPr lang="zh-TW" altLang="en-US" sz="2000" dirty="0" smtClean="0">
-                <a:latin typeface="Century Gothic" panose="020B0502020202020204" pitchFamily="34" charset="0"/>
-              </a:rPr>
-              <a:t>●</a:t>
-            </a:r>
-            <a:r>
               <a:rPr lang="zh-TW" altLang="en-US" sz="2000" dirty="0">
                 <a:latin typeface="Century Gothic" panose="020B0502020202020204" pitchFamily="34" charset="0"/>
               </a:rPr>
-              <a:t>原理</a:t>
-            </a:r>
-            <a:r>
-              <a:rPr lang="en-US" altLang="zh-TW" sz="2000" dirty="0" smtClean="0">
+              <a:t>●原理</a:t>
+            </a:r>
+            <a:r>
+              <a:rPr lang="en-US" altLang="zh-TW" sz="2000" dirty="0">
                 <a:latin typeface="Century Gothic" panose="020B0502020202020204" pitchFamily="34" charset="0"/>
               </a:rPr>
               <a:t>:</a:t>
             </a:r>
             <a:r>
               <a:rPr lang="zh-TW" altLang="en-US" sz="2000" dirty="0"/>
-              <a:t>透過光</a:t>
-            </a:r>
-            <a:r>
-              <a:rPr lang="zh-TW" altLang="en-US" sz="2000" dirty="0" smtClean="0"/>
-              <a:t>達的</a:t>
-            </a:r>
-            <a:r>
-              <a:rPr lang="zh-TW" altLang="en-US" sz="2000" dirty="0"/>
-              <a:t>發射與接收時間</a:t>
-            </a:r>
-            <a:r>
-              <a:rPr lang="zh-TW" altLang="en-US" sz="2000" dirty="0" smtClean="0"/>
-              <a:t>差</a:t>
+              <a:t>透過光達的發射與接收時間差</a:t>
             </a:r>
             <a:r>
               <a:rPr lang="en-US" altLang="zh-TW" sz="2000" dirty="0" err="1"/>
@@ -12508,39 +11621,23 @@
             </a:r>
             <a:r>
               <a:rPr lang="en-US" altLang="zh-TW" sz="2000" dirty="0"/>
-              <a:t> </a:t>
-            </a:r>
-            <a:r>
-              <a:rPr lang="en-US" altLang="zh-TW" sz="2000" dirty="0" smtClean="0"/>
-              <a:t>(time difference)</a:t>
-            </a:r>
-            <a:r>
-              <a:rPr lang="zh-TW" altLang="en-US" sz="2000" dirty="0" smtClean="0"/>
+              <a:t> (time difference)</a:t>
+            </a:r>
+            <a:r>
+              <a:rPr lang="zh-TW" altLang="en-US" sz="2000" dirty="0"/>
               <a:t>與光速</a:t>
             </a:r>
             <a:r>
-              <a:rPr lang="en-US" altLang="zh-TW" sz="2000" dirty="0" smtClean="0"/>
+              <a:rPr lang="en-US" altLang="zh-TW" sz="2000" dirty="0"/>
               <a:t>c</a:t>
             </a:r>
             <a:r>
-              <a:rPr lang="zh-TW" altLang="en-US" sz="2000" dirty="0" smtClean="0"/>
-              <a:t>，</a:t>
-            </a:r>
-            <a:r>
               <a:rPr lang="zh-TW" altLang="en-US" sz="2000" dirty="0"/>
-              <a:t>推算</a:t>
-            </a:r>
-            <a:r>
-              <a:rPr lang="zh-TW" altLang="en-US" sz="2000" dirty="0" smtClean="0"/>
-              <a:t>出</a:t>
+              <a:t>，推算出</a:t>
             </a:r>
             <a:r>
               <a:rPr lang="en-US" altLang="zh-TW" sz="2000" dirty="0"/>
-              <a:t> </a:t>
-            </a:r>
-            <a:r>
-              <a:rPr lang="en-US" altLang="zh-TW" sz="2000" dirty="0" smtClean="0"/>
-              <a:t>        </a:t>
+              <a:t>         </a:t>
             </a:r>
           </a:p>
           <a:p>
@@ -12548,20 +11645,16 @@
               <a:buNone/>
             </a:pPr>
             <a:r>
-              <a:rPr lang="zh-TW" altLang="en-US" sz="2000" dirty="0" smtClean="0"/>
-              <a:t>物體</a:t>
-            </a:r>
-            <a:r>
               <a:rPr lang="zh-TW" altLang="en-US" sz="2000" dirty="0"/>
-              <a:t>的距離</a:t>
-            </a:r>
-            <a:endParaRPr lang="en-US" altLang="zh-TW" sz="2000" dirty="0" smtClean="0"/>
+              <a:t>物體的距離</a:t>
+            </a:r>
+            <a:endParaRPr lang="en-US" altLang="zh-TW" sz="2000" dirty="0"/>
           </a:p>
           <a:p>
             <a:pPr marL="0" indent="0">
               <a:buNone/>
             </a:pPr>
-            <a:endParaRPr lang="en-US" altLang="zh-TW" sz="2000" dirty="0" smtClean="0">
+            <a:endParaRPr lang="en-US" altLang="zh-TW" sz="2000" dirty="0">
               <a:latin typeface="Century Gothic" panose="020B0502020202020204" pitchFamily="34" charset="0"/>
             </a:endParaRPr>
           </a:p>
@@ -12569,7 +11662,7 @@
             <a:pPr marL="0" indent="0">
               <a:buNone/>
             </a:pPr>
-            <a:endParaRPr lang="en-US" altLang="zh-TW" dirty="0" smtClean="0"/>
+            <a:endParaRPr lang="en-US" altLang="zh-TW" dirty="0"/>
           </a:p>
           <a:p>
             <a:pPr marL="0" indent="0">
@@ -12618,13 +11711,6 @@
   <p:clrMapOvr>
     <a:masterClrMapping/>
   </p:clrMapOvr>
-  <p:timing>
-    <p:tnLst>
-      <p:par>
-        <p:cTn id="1" dur="indefinite" restart="never" nodeType="tmRoot"/>
-      </p:par>
-    </p:tnLst>
-  </p:timing>
 </p:sld>
 </file>
 
@@ -12710,16 +11796,12 @@
               <a:buNone/>
             </a:pPr>
             <a:r>
-              <a:rPr lang="en-US" altLang="zh-TW" sz="2000" dirty="0" smtClean="0"/>
+              <a:rPr lang="en-US" altLang="zh-TW" sz="2000" dirty="0"/>
               <a:t>(1)</a:t>
             </a:r>
             <a:r>
-              <a:rPr lang="zh-TW" altLang="en-US" sz="2000" dirty="0" smtClean="0"/>
-              <a:t>接收</a:t>
-            </a:r>
-            <a:r>
               <a:rPr lang="zh-TW" altLang="en-US" sz="2000" dirty="0"/>
-              <a:t>到</a:t>
+              <a:t>接收到</a:t>
             </a:r>
             <a:r>
               <a:rPr lang="en-US" altLang="zh-TW" sz="2000" dirty="0"/>
@@ -12727,23 +11809,15 @@
             </a:r>
             <a:r>
               <a:rPr lang="zh-TW" altLang="en-US" sz="2000" dirty="0"/>
-              <a:t>個</a:t>
-            </a:r>
-            <a:r>
-              <a:rPr lang="zh-TW" altLang="en-US" sz="2000" dirty="0" smtClean="0"/>
-              <a:t>光子</a:t>
-            </a:r>
-            <a:r>
-              <a:rPr lang="en-US" altLang="zh-TW" sz="2000" dirty="0" smtClean="0"/>
+              <a:t>個光子</a:t>
+            </a:r>
+            <a:r>
+              <a:rPr lang="en-US" altLang="zh-TW" sz="2000" dirty="0"/>
               <a:t>→</a:t>
             </a:r>
             <a:r>
-              <a:rPr lang="zh-TW" altLang="en-US" sz="2000" dirty="0" smtClean="0"/>
-              <a:t>直接</a:t>
-            </a:r>
-            <a:r>
               <a:rPr lang="zh-TW" altLang="en-US" sz="2000" dirty="0"/>
-              <a:t>計算時間差</a:t>
+              <a:t>直接計算時間差</a:t>
             </a:r>
             <a:endParaRPr lang="en-US" altLang="zh-TW" sz="2000" dirty="0"/>
           </a:p>
@@ -12752,90 +11826,53 @@
               <a:buNone/>
             </a:pPr>
             <a:r>
-              <a:rPr lang="en-US" altLang="zh-TW" sz="2000" dirty="0" smtClean="0"/>
+              <a:rPr lang="en-US" altLang="zh-TW" sz="2000" dirty="0"/>
               <a:t>(2)</a:t>
             </a:r>
             <a:r>
-              <a:rPr lang="zh-TW" altLang="en-US" sz="2000" dirty="0" smtClean="0"/>
-              <a:t>沒有</a:t>
-            </a:r>
-            <a:r>
               <a:rPr lang="zh-TW" altLang="en-US" sz="2000" dirty="0"/>
-              <a:t>接收到</a:t>
-            </a:r>
-            <a:r>
-              <a:rPr lang="zh-TW" altLang="en-US" sz="2000" dirty="0" smtClean="0"/>
-              <a:t>光子</a:t>
-            </a:r>
-            <a:r>
-              <a:rPr lang="en-US" altLang="zh-TW" sz="2000" dirty="0" smtClean="0"/>
+              <a:t>沒有接收到光子</a:t>
+            </a:r>
+            <a:r>
+              <a:rPr lang="en-US" altLang="zh-TW" sz="2000" dirty="0"/>
               <a:t>→</a:t>
             </a:r>
             <a:r>
               <a:rPr lang="zh-TW" altLang="en-US" sz="2000" dirty="0"/>
-              <a:t>結果</a:t>
-            </a:r>
-            <a:r>
-              <a:rPr lang="zh-TW" altLang="en-US" sz="2000" dirty="0" smtClean="0"/>
-              <a:t>無效</a:t>
-            </a:r>
-            <a:r>
-              <a:rPr lang="en-US" altLang="zh-TW" sz="2000" dirty="0" smtClean="0"/>
+              <a:t>結果無效</a:t>
+            </a:r>
+            <a:r>
+              <a:rPr lang="en-US" altLang="zh-TW" sz="2000" dirty="0"/>
               <a:t>(</a:t>
             </a:r>
             <a:r>
-              <a:rPr lang="zh-TW" altLang="en-US" sz="2000" dirty="0" smtClean="0"/>
-              <a:t>距離</a:t>
-            </a:r>
-            <a:r>
               <a:rPr lang="zh-TW" altLang="en-US" sz="2000" dirty="0"/>
-              <a:t>不可</a:t>
-            </a:r>
-            <a:r>
-              <a:rPr lang="zh-TW" altLang="en-US" sz="2000" dirty="0" smtClean="0"/>
-              <a:t>估</a:t>
-            </a:r>
-            <a:r>
-              <a:rPr lang="en-US" altLang="zh-TW" sz="2000" dirty="0" smtClean="0"/>
+              <a:t>距離不可估</a:t>
+            </a:r>
+            <a:r>
+              <a:rPr lang="en-US" altLang="zh-TW" sz="2000" dirty="0"/>
               <a:t>)</a:t>
             </a:r>
-            <a:endParaRPr lang="en-US" altLang="zh-TW" sz="2000" dirty="0"/>
           </a:p>
           <a:p>
             <a:pPr marL="0" indent="0">
               <a:buNone/>
             </a:pPr>
             <a:r>
-              <a:rPr lang="en-US" altLang="zh-TW" sz="2000" dirty="0" smtClean="0"/>
+              <a:rPr lang="en-US" altLang="zh-TW" sz="2000" dirty="0"/>
               <a:t>(3)</a:t>
             </a:r>
             <a:r>
-              <a:rPr lang="zh-TW" altLang="en-US" sz="2000" dirty="0" smtClean="0"/>
-              <a:t>接收</a:t>
-            </a:r>
-            <a:r>
               <a:rPr lang="zh-TW" altLang="en-US" sz="2000" dirty="0"/>
-              <a:t>到好幾個</a:t>
-            </a:r>
-            <a:r>
-              <a:rPr lang="zh-TW" altLang="en-US" sz="2000" dirty="0" smtClean="0"/>
-              <a:t>光子</a:t>
-            </a:r>
-            <a:r>
-              <a:rPr lang="en-US" altLang="zh-TW" sz="2000" dirty="0" smtClean="0"/>
+              <a:t>接收到好幾個光子</a:t>
+            </a:r>
+            <a:r>
+              <a:rPr lang="en-US" altLang="zh-TW" sz="2000" dirty="0"/>
               <a:t>→</a:t>
             </a:r>
             <a:r>
               <a:rPr lang="zh-TW" altLang="en-US" sz="2000" dirty="0"/>
-              <a:t>取最早抵達的</a:t>
-            </a:r>
-            <a:r>
-              <a:rPr lang="zh-TW" altLang="en-US" sz="2000" dirty="0" smtClean="0"/>
-              <a:t>光子</a:t>
-            </a:r>
-            <a:r>
-              <a:rPr lang="zh-TW" altLang="en-US" sz="2000" dirty="0"/>
-              <a:t>計算時間差</a:t>
+              <a:t>取最早抵達的光子計算時間差</a:t>
             </a:r>
             <a:endParaRPr lang="en-US" altLang="zh-TW" sz="2000" dirty="0"/>
           </a:p>
@@ -12881,13 +11918,6 @@
   <p:clrMapOvr>
     <a:masterClrMapping/>
   </p:clrMapOvr>
-  <p:timing>
-    <p:tnLst>
-      <p:par>
-        <p:cTn id="1" dur="indefinite" restart="never" nodeType="tmRoot"/>
-      </p:par>
-    </p:tnLst>
-  </p:timing>
 </p:sld>
 </file>
 
@@ -12937,22 +11967,17 @@
           <a:lstStyle/>
           <a:p>
             <a:r>
-              <a:rPr lang="zh-TW" altLang="en-US" sz="4000" dirty="0" smtClean="0"/>
+              <a:rPr lang="zh-TW" altLang="en-US" sz="4000" dirty="0"/>
               <a:t>建立</a:t>
             </a:r>
             <a:r>
               <a:rPr lang="en-US" altLang="zh-TW" sz="4000" dirty="0"/>
-              <a:t>h</a:t>
-            </a:r>
-            <a:r>
-              <a:rPr lang="en-US" altLang="zh-TW" sz="4000" dirty="0" smtClean="0"/>
-              <a:t>istogram</a:t>
-            </a:r>
-            <a:r>
-              <a:rPr lang="zh-TW" altLang="en-US" sz="4000" dirty="0" smtClean="0"/>
+              <a:t>histogram</a:t>
+            </a:r>
+            <a:r>
+              <a:rPr lang="zh-TW" altLang="en-US" sz="4000" dirty="0"/>
               <a:t>說明</a:t>
             </a:r>
-            <a:endParaRPr lang="zh-TW" altLang="en-US" sz="4000" dirty="0"/>
           </a:p>
         </p:txBody>
       </p:sp>
@@ -12978,13 +12003,13 @@
           <a:lstStyle/>
           <a:p>
             <a:r>
-              <a:rPr lang="zh-TW" altLang="en-US" sz="2000" dirty="0" smtClean="0">
+              <a:rPr lang="zh-TW" altLang="en-US" sz="2000" dirty="0">
                 <a:latin typeface="Century Gothic" panose="020B0502020202020204" pitchFamily="34" charset="0"/>
               </a:rPr>
               <a:t>● </a:t>
             </a:r>
             <a:r>
-              <a:rPr lang="en-US" altLang="zh-TW" sz="2000" dirty="0" smtClean="0"/>
+              <a:rPr lang="en-US" altLang="zh-TW" sz="2000" dirty="0"/>
               <a:t>histogram</a:t>
             </a:r>
             <a:r>
@@ -13005,38 +12030,10 @@
             </a:r>
             <a:r>
               <a:rPr lang="zh-TW" altLang="en-US" sz="2000" dirty="0"/>
-              <a:t>，</a:t>
-            </a:r>
-            <a:r>
-              <a:rPr lang="zh-TW" altLang="en-US" sz="2000" dirty="0" smtClean="0"/>
-              <a:t>把</a:t>
-            </a:r>
-            <a:r>
-              <a:rPr lang="zh-TW" altLang="en-US" sz="2000" dirty="0"/>
-              <a:t>發射與</a:t>
-            </a:r>
-            <a:r>
-              <a:rPr lang="zh-TW" altLang="en-US" sz="2000" dirty="0" smtClean="0"/>
-              <a:t>接收</a:t>
-            </a:r>
-            <a:r>
-              <a:rPr lang="zh-TW" altLang="en-US" sz="2000" dirty="0"/>
-              <a:t>的</a:t>
-            </a:r>
-            <a:r>
-              <a:rPr lang="zh-TW" altLang="en-US" sz="2000" dirty="0" smtClean="0"/>
-              <a:t>時間</a:t>
-            </a:r>
-            <a:r>
-              <a:rPr lang="zh-TW" altLang="en-US" sz="2000" dirty="0"/>
-              <a:t>差</a:t>
-            </a:r>
-            <a:r>
-              <a:rPr lang="zh-TW" altLang="en-US" sz="2000" dirty="0" smtClean="0"/>
-              <a:t>分佈在</a:t>
-            </a:r>
-            <a:r>
-              <a:rPr lang="en-US" altLang="zh-TW" sz="2000" dirty="0" smtClean="0"/>
+              <a:t>，把發射與接收的時間差分佈在</a:t>
+            </a:r>
+            <a:r>
+              <a:rPr lang="en-US" altLang="zh-TW" sz="2000" dirty="0"/>
               <a:t>0~1250</a:t>
             </a:r>
             <a:r>
@@ -13053,17 +12050,12 @@
             </a:r>
             <a:r>
               <a:rPr lang="en-US" altLang="zh-TW" sz="2000" dirty="0"/>
-              <a:t>:100ps</a:t>
-            </a:r>
-            <a:r>
-              <a:rPr lang="en-US" altLang="zh-TW" sz="2000" dirty="0" smtClean="0"/>
-              <a:t>)</a:t>
-            </a:r>
-            <a:endParaRPr lang="en-US" altLang="zh-TW" sz="2000" dirty="0"/>
-          </a:p>
-          <a:p>
-            <a:r>
-              <a:rPr lang="zh-TW" altLang="en-US" sz="2000" dirty="0" smtClean="0">
+              <a:t>:100ps)</a:t>
+            </a:r>
+          </a:p>
+          <a:p>
+            <a:r>
+              <a:rPr lang="zh-TW" altLang="en-US" sz="2000" dirty="0">
                 <a:latin typeface="Century Gothic" panose="020B0502020202020204" pitchFamily="34" charset="0"/>
               </a:rPr>
               <a:t>●</a:t>
@@ -13086,40 +12078,28 @@
             </a:r>
             <a:r>
               <a:rPr lang="zh-TW" altLang="en-US" sz="2000" dirty="0"/>
-              <a:t>數最高的位置當作答案，並估計物體所在</a:t>
-            </a:r>
-            <a:r>
-              <a:rPr lang="zh-TW" altLang="en-US" sz="2000" dirty="0" smtClean="0"/>
-              <a:t>距離</a:t>
-            </a:r>
-            <a:endParaRPr lang="en-US" altLang="zh-TW" sz="2000" dirty="0" smtClean="0"/>
-          </a:p>
-          <a:p>
-            <a:endParaRPr lang="en-US" altLang="zh-TW" sz="2000" dirty="0" smtClean="0">
+              <a:t>數最高的位置當作答案，並估計物體所在距離</a:t>
+            </a:r>
+            <a:endParaRPr lang="en-US" altLang="zh-TW" sz="2000" dirty="0"/>
+          </a:p>
+          <a:p>
+            <a:endParaRPr lang="en-US" altLang="zh-TW" sz="2000" dirty="0">
               <a:latin typeface="Century Gothic" panose="020B0502020202020204" pitchFamily="34" charset="0"/>
             </a:endParaRPr>
           </a:p>
           <a:p>
             <a:r>
-              <a:rPr lang="zh-TW" altLang="en-US" sz="2000" dirty="0" smtClean="0">
+              <a:rPr lang="zh-TW" altLang="en-US" sz="2000" dirty="0">
                 <a:latin typeface="Century Gothic" panose="020B0502020202020204" pitchFamily="34" charset="0"/>
               </a:rPr>
               <a:t>●以下為參考完成圖</a:t>
             </a:r>
             <a:r>
               <a:rPr lang="zh-TW" altLang="en-US" sz="2000" dirty="0"/>
-              <a:t>，</a:t>
-            </a:r>
-            <a:r>
-              <a:rPr lang="zh-TW" altLang="en-US" sz="2000" dirty="0" smtClean="0"/>
-              <a:t>峰</a:t>
-            </a:r>
-            <a:r>
-              <a:rPr lang="zh-TW" altLang="en-US" sz="2000" dirty="0"/>
-              <a:t>值大約在</a:t>
-            </a:r>
-            <a:r>
-              <a:rPr lang="en-US" altLang="zh-TW" sz="2000" dirty="0" smtClean="0"/>
+              <a:t>，峰值大約在</a:t>
+            </a:r>
+            <a:r>
+              <a:rPr lang="en-US" altLang="zh-TW" sz="2000" dirty="0"/>
               <a:t>14-16m</a:t>
             </a:r>
           </a:p>
@@ -13127,10 +12107,10 @@
             <a:endParaRPr lang="en-US" altLang="zh-TW" dirty="0"/>
           </a:p>
           <a:p>
-            <a:endParaRPr lang="en-US" altLang="zh-TW" dirty="0" smtClean="0"/>
-          </a:p>
-          <a:p>
-            <a:endParaRPr lang="en-US" altLang="zh-TW" dirty="0" smtClean="0"/>
+            <a:endParaRPr lang="en-US" altLang="zh-TW" dirty="0"/>
+          </a:p>
+          <a:p>
+            <a:endParaRPr lang="en-US" altLang="zh-TW" dirty="0"/>
           </a:p>
           <a:p>
             <a:endParaRPr lang="en-US" altLang="zh-TW" dirty="0"/>
@@ -13179,13 +12159,6 @@
   <p:clrMapOvr>
     <a:masterClrMapping/>
   </p:clrMapOvr>
-  <p:timing>
-    <p:tnLst>
-      <p:par>
-        <p:cTn id="1" dur="indefinite" restart="never" nodeType="tmRoot"/>
-      </p:par>
-    </p:tnLst>
-  </p:timing>
 </p:sld>
 </file>
 
@@ -13225,15 +12198,7 @@
           <a:p>
             <a:r>
               <a:rPr lang="en-US" altLang="zh-TW" sz="4400" b="1" dirty="0"/>
-              <a:t>Part </a:t>
-            </a:r>
-            <a:r>
-              <a:rPr lang="en-US" altLang="zh-TW" sz="4400" b="1" dirty="0" smtClean="0"/>
-              <a:t>2:Window</a:t>
-            </a:r>
-            <a:r>
-              <a:rPr lang="en-US" altLang="zh-TW" sz="4400" b="1" dirty="0"/>
-              <a:t>+</a:t>
+              <a:t>Part 2:Window+</a:t>
             </a:r>
             <a:r>
               <a:rPr lang="zh-TW" altLang="en-US" sz="4400" b="1" dirty="0"/>
@@ -13252,13 +12217,6 @@
   <p:clrMapOvr>
     <a:masterClrMapping/>
   </p:clrMapOvr>
-  <p:timing>
-    <p:tnLst>
-      <p:par>
-        <p:cTn id="1" dur="indefinite" restart="never" nodeType="tmRoot"/>
-      </p:par>
-    </p:tnLst>
-  </p:timing>
 </p:sld>
 </file>
 
